--- a/260418_add/supplefigure_260420/SuppFig_S21_GSE254249_SCRT_validation.pptx
+++ b/260418_add/supplefigure_260420/SuppFig_S21_GSE254249_SCRT_validation.pptx
@@ -3135,7 +3135,7 @@
         <p:spPr>
           <a:xfrm>
             <a:off x="822960" y="320040"/>
-            <a:ext cx="9601200" cy="365760"/>
+            <a:ext cx="10515600" cy="365760"/>
           </a:xfrm>
           <a:prstGeom prst="rect">
             <a:avLst/>
@@ -3157,7 +3157,7 @@
                 </a:solidFill>
                 <a:latin typeface="Arial"/>
               </a:rPr>
-              <a:t>GSE254249 pre-treatment × propagated response (n = 3; 1 good CR + 2 non-CR) — directional only</a:t>
+              <a:t>GSE254249 pre-treatment × response (n = 3; directional only; Gao Cancer Cell 2025 cohort)</a:t>
             </a:r>
           </a:p>
         </p:txBody>
@@ -3704,7 +3704,167 @@
       </p:sp>
       <p:sp>
         <p:nvSpPr>
-          <p:cNvPr id="19" name="TextBox 18"/>
+          <p:cNvPr id="19" name="Rectangle 18"/>
+          <p:cNvSpPr/>
+          <p:nvPr/>
+        </p:nvSpPr>
+        <p:spPr>
+          <a:xfrm>
+            <a:off x="1463040" y="1197864"/>
+            <a:ext cx="5538651" cy="4828032"/>
+          </a:xfrm>
+          <a:prstGeom prst="rect">
+            <a:avLst/>
+          </a:prstGeom>
+          <a:solidFill>
+            <a:srgbClr val="F0F5F7"/>
+          </a:solidFill>
+          <a:ln>
+            <a:noFill/>
+          </a:ln>
+          <a:effectLst/>
+        </p:spPr>
+        <p:style>
+          <a:lnRef idx="1">
+            <a:schemeClr val="accent1"/>
+          </a:lnRef>
+          <a:fillRef idx="3">
+            <a:schemeClr val="accent1"/>
+          </a:fillRef>
+          <a:effectRef idx="2">
+            <a:schemeClr val="accent1"/>
+          </a:effectRef>
+          <a:fontRef idx="minor">
+            <a:schemeClr val="lt1"/>
+          </a:fontRef>
+        </p:style>
+        <p:txBody>
+          <a:bodyPr rtlCol="0" anchor="ctr"/>
+          <a:lstStyle/>
+          <a:p>
+            <a:pPr algn="ctr"/>
+          </a:p>
+        </p:txBody>
+      </p:sp>
+      <p:sp>
+        <p:nvSpPr>
+          <p:cNvPr id="20" name="Rectangle 19"/>
+          <p:cNvSpPr/>
+          <p:nvPr/>
+        </p:nvSpPr>
+        <p:spPr>
+          <a:xfrm>
+            <a:off x="7001691" y="1197864"/>
+            <a:ext cx="4153989" cy="4828032"/>
+          </a:xfrm>
+          <a:prstGeom prst="rect">
+            <a:avLst/>
+          </a:prstGeom>
+          <a:solidFill>
+            <a:srgbClr val="FAEFF3"/>
+          </a:solidFill>
+          <a:ln>
+            <a:noFill/>
+          </a:ln>
+          <a:effectLst/>
+        </p:spPr>
+        <p:style>
+          <a:lnRef idx="1">
+            <a:schemeClr val="accent1"/>
+          </a:lnRef>
+          <a:fillRef idx="3">
+            <a:schemeClr val="accent1"/>
+          </a:fillRef>
+          <a:effectRef idx="2">
+            <a:schemeClr val="accent1"/>
+          </a:effectRef>
+          <a:fontRef idx="minor">
+            <a:schemeClr val="lt1"/>
+          </a:fontRef>
+        </p:style>
+        <p:txBody>
+          <a:bodyPr rtlCol="0" anchor="ctr"/>
+          <a:lstStyle/>
+          <a:p>
+            <a:pPr algn="ctr"/>
+          </a:p>
+        </p:txBody>
+      </p:sp>
+      <p:cxnSp>
+        <p:nvCxnSpPr>
+          <p:cNvPr id="21" name="Connector 20"/>
+          <p:cNvCxnSpPr/>
+          <p:nvPr/>
+        </p:nvCxnSpPr>
+        <p:spPr>
+          <a:xfrm>
+            <a:off x="1463040" y="6035040"/>
+            <a:ext cx="9692640" cy="0"/>
+          </a:xfrm>
+          <a:prstGeom prst="line">
+            <a:avLst/>
+          </a:prstGeom>
+          <a:ln w="12700">
+            <a:solidFill>
+              <a:srgbClr val="222222"/>
+            </a:solidFill>
+          </a:ln>
+          <a:effectLst/>
+        </p:spPr>
+        <p:style>
+          <a:lnRef idx="2">
+            <a:schemeClr val="accent1"/>
+          </a:lnRef>
+          <a:fillRef idx="0">
+            <a:schemeClr val="accent1"/>
+          </a:fillRef>
+          <a:effectRef idx="1">
+            <a:schemeClr val="accent1"/>
+          </a:effectRef>
+          <a:fontRef idx="minor">
+            <a:schemeClr val="tx1"/>
+          </a:fontRef>
+        </p:style>
+      </p:cxnSp>
+      <p:cxnSp>
+        <p:nvCxnSpPr>
+          <p:cNvPr id="22" name="Connector 21"/>
+          <p:cNvCxnSpPr/>
+          <p:nvPr/>
+        </p:nvCxnSpPr>
+        <p:spPr>
+          <a:xfrm>
+            <a:off x="1463040" y="1188720"/>
+            <a:ext cx="0" cy="4846320"/>
+          </a:xfrm>
+          <a:prstGeom prst="line">
+            <a:avLst/>
+          </a:prstGeom>
+          <a:ln w="12700">
+            <a:solidFill>
+              <a:srgbClr val="222222"/>
+            </a:solidFill>
+          </a:ln>
+          <a:effectLst/>
+        </p:spPr>
+        <p:style>
+          <a:lnRef idx="2">
+            <a:schemeClr val="accent1"/>
+          </a:lnRef>
+          <a:fillRef idx="0">
+            <a:schemeClr val="accent1"/>
+          </a:fillRef>
+          <a:effectRef idx="1">
+            <a:schemeClr val="accent1"/>
+          </a:effectRef>
+          <a:fontRef idx="minor">
+            <a:schemeClr val="tx1"/>
+          </a:fontRef>
+        </p:style>
+      </p:cxnSp>
+      <p:sp>
+        <p:nvSpPr>
+          <p:cNvPr id="23" name="TextBox 22"/>
           <p:cNvSpPr txBox="1"/>
           <p:nvPr/>
         </p:nvSpPr>
@@ -3740,7 +3900,7 @@
       </p:sp>
       <p:sp>
         <p:nvSpPr>
-          <p:cNvPr id="20" name="TextBox 19"/>
+          <p:cNvPr id="24" name="TextBox 23"/>
           <p:cNvSpPr txBox="1"/>
           <p:nvPr/>
         </p:nvSpPr>
@@ -3763,7 +3923,7 @@
           <a:p>
             <a:pPr algn="ctr"/>
             <a:r>
-              <a:rPr sz="900" b="1" i="0">
+              <a:rPr sz="1000" b="1" i="0">
                 <a:solidFill>
                   <a:srgbClr val="0E4A68"/>
                 </a:solidFill>
@@ -3774,52 +3934,16 @@
           </a:p>
         </p:txBody>
       </p:sp>
-      <p:cxnSp>
-        <p:nvCxnSpPr>
-          <p:cNvPr id="21" name="Connector 20"/>
-          <p:cNvCxnSpPr/>
-          <p:nvPr/>
-        </p:nvCxnSpPr>
-        <p:spPr>
-          <a:xfrm>
-            <a:off x="1805548" y="3570603"/>
-            <a:ext cx="201168" cy="0"/>
-          </a:xfrm>
-          <a:prstGeom prst="line">
-            <a:avLst/>
-          </a:prstGeom>
-          <a:ln w="31750">
-            <a:solidFill>
-              <a:srgbClr val="0A7D6E"/>
-            </a:solidFill>
-          </a:ln>
-          <a:effectLst/>
-        </p:spPr>
-        <p:style>
-          <a:lnRef idx="2">
-            <a:schemeClr val="accent1"/>
-          </a:lnRef>
-          <a:fillRef idx="0">
-            <a:schemeClr val="accent1"/>
-          </a:fillRef>
-          <a:effectRef idx="1">
-            <a:schemeClr val="accent1"/>
-          </a:effectRef>
-          <a:fontRef idx="minor">
-            <a:schemeClr val="tx1"/>
-          </a:fontRef>
-        </p:style>
-      </p:cxnSp>
-      <p:sp>
-        <p:nvSpPr>
-          <p:cNvPr id="22" name="Oval 21"/>
+      <p:sp>
+        <p:nvSpPr>
+          <p:cNvPr id="25" name="Oval 24"/>
           <p:cNvSpPr/>
           <p:nvPr/>
         </p:nvSpPr>
         <p:spPr>
           <a:xfrm>
-            <a:off x="1860412" y="3524883"/>
-            <a:ext cx="91440" cy="91440"/>
+            <a:off x="1851268" y="3515739"/>
+            <a:ext cx="109728" cy="109728"/>
           </a:xfrm>
           <a:prstGeom prst="ellipse">
             <a:avLst/>
@@ -3856,52 +3980,16 @@
           </a:p>
         </p:txBody>
       </p:sp>
-      <p:cxnSp>
-        <p:nvCxnSpPr>
-          <p:cNvPr id="23" name="Connector 22"/>
-          <p:cNvCxnSpPr/>
-          <p:nvPr/>
-        </p:nvCxnSpPr>
-        <p:spPr>
-          <a:xfrm>
-            <a:off x="2304027" y="3572148"/>
-            <a:ext cx="201168" cy="0"/>
-          </a:xfrm>
-          <a:prstGeom prst="line">
-            <a:avLst/>
-          </a:prstGeom>
-          <a:ln w="31750">
-            <a:solidFill>
-              <a:srgbClr val="C53E1F"/>
-            </a:solidFill>
-          </a:ln>
-          <a:effectLst/>
-        </p:spPr>
-        <p:style>
-          <a:lnRef idx="2">
-            <a:schemeClr val="accent1"/>
-          </a:lnRef>
-          <a:fillRef idx="0">
-            <a:schemeClr val="accent1"/>
-          </a:fillRef>
-          <a:effectRef idx="1">
-            <a:schemeClr val="accent1"/>
-          </a:effectRef>
-          <a:fontRef idx="minor">
-            <a:schemeClr val="tx1"/>
-          </a:fontRef>
-        </p:style>
-      </p:cxnSp>
-      <p:sp>
-        <p:nvSpPr>
-          <p:cNvPr id="24" name="Oval 23"/>
+      <p:sp>
+        <p:nvSpPr>
+          <p:cNvPr id="26" name="Oval 25"/>
           <p:cNvSpPr/>
           <p:nvPr/>
         </p:nvSpPr>
         <p:spPr>
           <a:xfrm>
-            <a:off x="2358891" y="2642396"/>
-            <a:ext cx="91440" cy="91440"/>
+            <a:off x="2349747" y="2633252"/>
+            <a:ext cx="109728" cy="109728"/>
           </a:xfrm>
           <a:prstGeom prst="ellipse">
             <a:avLst/>
@@ -3940,14 +4028,14 @@
       </p:sp>
       <p:sp>
         <p:nvSpPr>
-          <p:cNvPr id="25" name="Oval 24"/>
+          <p:cNvPr id="27" name="Oval 26"/>
           <p:cNvSpPr/>
           <p:nvPr/>
         </p:nvSpPr>
         <p:spPr>
           <a:xfrm>
-            <a:off x="2358891" y="4410459"/>
-            <a:ext cx="91440" cy="91440"/>
+            <a:off x="2349747" y="4401315"/>
+            <a:ext cx="109728" cy="109728"/>
           </a:xfrm>
           <a:prstGeom prst="ellipse">
             <a:avLst/>
@@ -3986,7 +4074,7 @@
       </p:sp>
       <p:sp>
         <p:nvSpPr>
-          <p:cNvPr id="26" name="TextBox 25"/>
+          <p:cNvPr id="28" name="TextBox 27"/>
           <p:cNvSpPr txBox="1"/>
           <p:nvPr/>
         </p:nvSpPr>
@@ -4020,52 +4108,16 @@
           </a:p>
         </p:txBody>
       </p:sp>
-      <p:cxnSp>
-        <p:nvCxnSpPr>
-          <p:cNvPr id="27" name="Connector 26"/>
-          <p:cNvCxnSpPr/>
-          <p:nvPr/>
-        </p:nvCxnSpPr>
-        <p:spPr>
-          <a:xfrm>
-            <a:off x="3190211" y="3656428"/>
-            <a:ext cx="201168" cy="0"/>
-          </a:xfrm>
-          <a:prstGeom prst="line">
-            <a:avLst/>
-          </a:prstGeom>
-          <a:ln w="31750">
-            <a:solidFill>
-              <a:srgbClr val="0A7D6E"/>
-            </a:solidFill>
-          </a:ln>
-          <a:effectLst/>
-        </p:spPr>
-        <p:style>
-          <a:lnRef idx="2">
-            <a:schemeClr val="accent1"/>
-          </a:lnRef>
-          <a:fillRef idx="0">
-            <a:schemeClr val="accent1"/>
-          </a:fillRef>
-          <a:effectRef idx="1">
-            <a:schemeClr val="accent1"/>
-          </a:effectRef>
-          <a:fontRef idx="minor">
-            <a:schemeClr val="tx1"/>
-          </a:fontRef>
-        </p:style>
-      </p:cxnSp>
-      <p:sp>
-        <p:nvSpPr>
-          <p:cNvPr id="28" name="Oval 27"/>
+      <p:sp>
+        <p:nvSpPr>
+          <p:cNvPr id="29" name="Oval 28"/>
           <p:cNvSpPr/>
           <p:nvPr/>
         </p:nvSpPr>
         <p:spPr>
           <a:xfrm>
-            <a:off x="3245075" y="3610708"/>
-            <a:ext cx="91440" cy="91440"/>
+            <a:off x="3235931" y="3601564"/>
+            <a:ext cx="109728" cy="109728"/>
           </a:xfrm>
           <a:prstGeom prst="ellipse">
             <a:avLst/>
@@ -4102,42 +4154,6 @@
           </a:p>
         </p:txBody>
       </p:sp>
-      <p:cxnSp>
-        <p:nvCxnSpPr>
-          <p:cNvPr id="29" name="Connector 28"/>
-          <p:cNvCxnSpPr/>
-          <p:nvPr/>
-        </p:nvCxnSpPr>
-        <p:spPr>
-          <a:xfrm>
-            <a:off x="3688690" y="4136089"/>
-            <a:ext cx="201168" cy="0"/>
-          </a:xfrm>
-          <a:prstGeom prst="line">
-            <a:avLst/>
-          </a:prstGeom>
-          <a:ln w="31750">
-            <a:solidFill>
-              <a:srgbClr val="C53E1F"/>
-            </a:solidFill>
-          </a:ln>
-          <a:effectLst/>
-        </p:spPr>
-        <p:style>
-          <a:lnRef idx="2">
-            <a:schemeClr val="accent1"/>
-          </a:lnRef>
-          <a:fillRef idx="0">
-            <a:schemeClr val="accent1"/>
-          </a:fillRef>
-          <a:effectRef idx="1">
-            <a:schemeClr val="accent1"/>
-          </a:effectRef>
-          <a:fontRef idx="minor">
-            <a:schemeClr val="tx1"/>
-          </a:fontRef>
-        </p:style>
-      </p:cxnSp>
       <p:sp>
         <p:nvSpPr>
           <p:cNvPr id="30" name="Oval 29"/>
@@ -4146,8 +4162,8 @@
         </p:nvSpPr>
         <p:spPr>
           <a:xfrm>
-            <a:off x="3743554" y="3557560"/>
-            <a:ext cx="91440" cy="91440"/>
+            <a:off x="3734410" y="3548416"/>
+            <a:ext cx="109728" cy="109728"/>
           </a:xfrm>
           <a:prstGeom prst="ellipse">
             <a:avLst/>
@@ -4192,8 +4208,8 @@
         </p:nvSpPr>
         <p:spPr>
           <a:xfrm>
-            <a:off x="3743554" y="4623178"/>
-            <a:ext cx="91440" cy="91440"/>
+            <a:off x="3734410" y="4614034"/>
+            <a:ext cx="109728" cy="109728"/>
           </a:xfrm>
           <a:prstGeom prst="ellipse">
             <a:avLst/>
@@ -4267,52 +4283,16 @@
           </a:p>
         </p:txBody>
       </p:sp>
-      <p:cxnSp>
-        <p:nvCxnSpPr>
-          <p:cNvPr id="33" name="Connector 32"/>
-          <p:cNvCxnSpPr/>
-          <p:nvPr/>
-        </p:nvCxnSpPr>
-        <p:spPr>
-          <a:xfrm>
-            <a:off x="4574874" y="4164745"/>
-            <a:ext cx="201168" cy="0"/>
-          </a:xfrm>
-          <a:prstGeom prst="line">
-            <a:avLst/>
-          </a:prstGeom>
-          <a:ln w="31750">
-            <a:solidFill>
-              <a:srgbClr val="0A7D6E"/>
-            </a:solidFill>
-          </a:ln>
-          <a:effectLst/>
-        </p:spPr>
-        <p:style>
-          <a:lnRef idx="2">
-            <a:schemeClr val="accent1"/>
-          </a:lnRef>
-          <a:fillRef idx="0">
-            <a:schemeClr val="accent1"/>
-          </a:fillRef>
-          <a:effectRef idx="1">
-            <a:schemeClr val="accent1"/>
-          </a:effectRef>
-          <a:fontRef idx="minor">
-            <a:schemeClr val="tx1"/>
-          </a:fontRef>
-        </p:style>
-      </p:cxnSp>
-      <p:sp>
-        <p:nvSpPr>
-          <p:cNvPr id="34" name="Oval 33"/>
+      <p:sp>
+        <p:nvSpPr>
+          <p:cNvPr id="33" name="Oval 32"/>
           <p:cNvSpPr/>
           <p:nvPr/>
         </p:nvSpPr>
         <p:spPr>
           <a:xfrm>
-            <a:off x="4629738" y="4119025"/>
-            <a:ext cx="91440" cy="91440"/>
+            <a:off x="4620594" y="4109881"/>
+            <a:ext cx="109728" cy="109728"/>
           </a:xfrm>
           <a:prstGeom prst="ellipse">
             <a:avLst/>
@@ -4349,52 +4329,16 @@
           </a:p>
         </p:txBody>
       </p:sp>
-      <p:cxnSp>
-        <p:nvCxnSpPr>
-          <p:cNvPr id="35" name="Connector 34"/>
-          <p:cNvCxnSpPr/>
-          <p:nvPr/>
-        </p:nvCxnSpPr>
-        <p:spPr>
-          <a:xfrm>
-            <a:off x="5073352" y="3952253"/>
-            <a:ext cx="201168" cy="0"/>
-          </a:xfrm>
-          <a:prstGeom prst="line">
-            <a:avLst/>
-          </a:prstGeom>
-          <a:ln w="31750">
-            <a:solidFill>
-              <a:srgbClr val="C53E1F"/>
-            </a:solidFill>
-          </a:ln>
-          <a:effectLst/>
-        </p:spPr>
-        <p:style>
-          <a:lnRef idx="2">
-            <a:schemeClr val="accent1"/>
-          </a:lnRef>
-          <a:fillRef idx="0">
-            <a:schemeClr val="accent1"/>
-          </a:fillRef>
-          <a:effectRef idx="1">
-            <a:schemeClr val="accent1"/>
-          </a:effectRef>
-          <a:fontRef idx="minor">
-            <a:schemeClr val="tx1"/>
-          </a:fontRef>
-        </p:style>
-      </p:cxnSp>
-      <p:sp>
-        <p:nvSpPr>
-          <p:cNvPr id="36" name="Oval 35"/>
+      <p:sp>
+        <p:nvSpPr>
+          <p:cNvPr id="34" name="Oval 33"/>
           <p:cNvSpPr/>
           <p:nvPr/>
         </p:nvSpPr>
         <p:spPr>
           <a:xfrm>
-            <a:off x="5128216" y="3299002"/>
-            <a:ext cx="91440" cy="91440"/>
+            <a:off x="5119072" y="3289858"/>
+            <a:ext cx="109728" cy="109728"/>
           </a:xfrm>
           <a:prstGeom prst="ellipse">
             <a:avLst/>
@@ -4433,14 +4377,14 @@
       </p:sp>
       <p:sp>
         <p:nvSpPr>
-          <p:cNvPr id="37" name="Oval 36"/>
+          <p:cNvPr id="35" name="Oval 34"/>
           <p:cNvSpPr/>
           <p:nvPr/>
         </p:nvSpPr>
         <p:spPr>
           <a:xfrm>
-            <a:off x="5128216" y="4514063"/>
-            <a:ext cx="91440" cy="91440"/>
+            <a:off x="5119072" y="4504919"/>
+            <a:ext cx="109728" cy="109728"/>
           </a:xfrm>
           <a:prstGeom prst="ellipse">
             <a:avLst/>
@@ -4479,7 +4423,7 @@
       </p:sp>
       <p:sp>
         <p:nvSpPr>
-          <p:cNvPr id="38" name="TextBox 37"/>
+          <p:cNvPr id="36" name="TextBox 35"/>
           <p:cNvSpPr txBox="1"/>
           <p:nvPr/>
         </p:nvSpPr>
@@ -4513,52 +4457,16 @@
           </a:p>
         </p:txBody>
       </p:sp>
-      <p:cxnSp>
-        <p:nvCxnSpPr>
-          <p:cNvPr id="39" name="Connector 38"/>
-          <p:cNvCxnSpPr/>
-          <p:nvPr/>
-        </p:nvCxnSpPr>
-        <p:spPr>
-          <a:xfrm>
-            <a:off x="5959537" y="5114467"/>
-            <a:ext cx="201168" cy="0"/>
-          </a:xfrm>
-          <a:prstGeom prst="line">
-            <a:avLst/>
-          </a:prstGeom>
-          <a:ln w="31750">
-            <a:solidFill>
-              <a:srgbClr val="0A7D6E"/>
-            </a:solidFill>
-          </a:ln>
-          <a:effectLst/>
-        </p:spPr>
-        <p:style>
-          <a:lnRef idx="2">
-            <a:schemeClr val="accent1"/>
-          </a:lnRef>
-          <a:fillRef idx="0">
-            <a:schemeClr val="accent1"/>
-          </a:fillRef>
-          <a:effectRef idx="1">
-            <a:schemeClr val="accent1"/>
-          </a:effectRef>
-          <a:fontRef idx="minor">
-            <a:schemeClr val="tx1"/>
-          </a:fontRef>
-        </p:style>
-      </p:cxnSp>
-      <p:sp>
-        <p:nvSpPr>
-          <p:cNvPr id="40" name="Oval 39"/>
+      <p:sp>
+        <p:nvSpPr>
+          <p:cNvPr id="37" name="Oval 36"/>
           <p:cNvSpPr/>
           <p:nvPr/>
         </p:nvSpPr>
         <p:spPr>
           <a:xfrm>
-            <a:off x="6014401" y="5068747"/>
-            <a:ext cx="91440" cy="91440"/>
+            <a:off x="6005257" y="5059603"/>
+            <a:ext cx="109728" cy="109728"/>
           </a:xfrm>
           <a:prstGeom prst="ellipse">
             <a:avLst/>
@@ -4595,52 +4503,16 @@
           </a:p>
         </p:txBody>
       </p:sp>
-      <p:cxnSp>
-        <p:nvCxnSpPr>
-          <p:cNvPr id="41" name="Connector 40"/>
-          <p:cNvCxnSpPr/>
-          <p:nvPr/>
-        </p:nvCxnSpPr>
-        <p:spPr>
-          <a:xfrm>
-            <a:off x="6458015" y="4108675"/>
-            <a:ext cx="201168" cy="0"/>
-          </a:xfrm>
-          <a:prstGeom prst="line">
-            <a:avLst/>
-          </a:prstGeom>
-          <a:ln w="31750">
-            <a:solidFill>
-              <a:srgbClr val="C53E1F"/>
-            </a:solidFill>
-          </a:ln>
-          <a:effectLst/>
-        </p:spPr>
-        <p:style>
-          <a:lnRef idx="2">
-            <a:schemeClr val="accent1"/>
-          </a:lnRef>
-          <a:fillRef idx="0">
-            <a:schemeClr val="accent1"/>
-          </a:fillRef>
-          <a:effectRef idx="1">
-            <a:schemeClr val="accent1"/>
-          </a:effectRef>
-          <a:fontRef idx="minor">
-            <a:schemeClr val="tx1"/>
-          </a:fontRef>
-        </p:style>
-      </p:cxnSp>
-      <p:sp>
-        <p:nvSpPr>
-          <p:cNvPr id="42" name="Oval 41"/>
+      <p:sp>
+        <p:nvSpPr>
+          <p:cNvPr id="38" name="Oval 37"/>
           <p:cNvSpPr/>
           <p:nvPr/>
         </p:nvSpPr>
         <p:spPr>
           <a:xfrm>
-            <a:off x="6512879" y="3376414"/>
-            <a:ext cx="91440" cy="91440"/>
+            <a:off x="6503735" y="3367270"/>
+            <a:ext cx="109728" cy="109728"/>
           </a:xfrm>
           <a:prstGeom prst="ellipse">
             <a:avLst/>
@@ -4679,14 +4551,14 @@
       </p:sp>
       <p:sp>
         <p:nvSpPr>
-          <p:cNvPr id="43" name="Oval 42"/>
+          <p:cNvPr id="39" name="Oval 38"/>
           <p:cNvSpPr/>
           <p:nvPr/>
         </p:nvSpPr>
         <p:spPr>
           <a:xfrm>
-            <a:off x="6512879" y="4749496"/>
-            <a:ext cx="91440" cy="91440"/>
+            <a:off x="6503735" y="4740352"/>
+            <a:ext cx="109728" cy="109728"/>
           </a:xfrm>
           <a:prstGeom prst="ellipse">
             <a:avLst/>
@@ -4725,7 +4597,7 @@
       </p:sp>
       <p:sp>
         <p:nvSpPr>
-          <p:cNvPr id="44" name="TextBox 43"/>
+          <p:cNvPr id="40" name="TextBox 39"/>
           <p:cNvSpPr txBox="1"/>
           <p:nvPr/>
         </p:nvSpPr>
@@ -4762,7 +4634,7 @@
       </p:sp>
       <p:sp>
         <p:nvSpPr>
-          <p:cNvPr id="45" name="TextBox 44"/>
+          <p:cNvPr id="41" name="TextBox 40"/>
           <p:cNvSpPr txBox="1"/>
           <p:nvPr/>
         </p:nvSpPr>
@@ -4785,7 +4657,7 @@
           <a:p>
             <a:pPr algn="ctr"/>
             <a:r>
-              <a:rPr sz="900" b="1" i="0">
+              <a:rPr sz="1000" b="1" i="0">
                 <a:solidFill>
                   <a:srgbClr val="8A2B4C"/>
                 </a:solidFill>
@@ -4796,52 +4668,16 @@
           </a:p>
         </p:txBody>
       </p:sp>
-      <p:cxnSp>
-        <p:nvCxnSpPr>
-          <p:cNvPr id="46" name="Connector 45"/>
-          <p:cNvCxnSpPr/>
-          <p:nvPr/>
-        </p:nvCxnSpPr>
-        <p:spPr>
-          <a:xfrm>
-            <a:off x="7344200" y="3823751"/>
-            <a:ext cx="201168" cy="0"/>
-          </a:xfrm>
-          <a:prstGeom prst="line">
-            <a:avLst/>
-          </a:prstGeom>
-          <a:ln w="31750">
-            <a:solidFill>
-              <a:srgbClr val="0A7D6E"/>
-            </a:solidFill>
-          </a:ln>
-          <a:effectLst/>
-        </p:spPr>
-        <p:style>
-          <a:lnRef idx="2">
-            <a:schemeClr val="accent1"/>
-          </a:lnRef>
-          <a:fillRef idx="0">
-            <a:schemeClr val="accent1"/>
-          </a:fillRef>
-          <a:effectRef idx="1">
-            <a:schemeClr val="accent1"/>
-          </a:effectRef>
-          <a:fontRef idx="minor">
-            <a:schemeClr val="tx1"/>
-          </a:fontRef>
-        </p:style>
-      </p:cxnSp>
-      <p:sp>
-        <p:nvSpPr>
-          <p:cNvPr id="47" name="Oval 46"/>
+      <p:sp>
+        <p:nvSpPr>
+          <p:cNvPr id="42" name="Oval 41"/>
           <p:cNvSpPr/>
           <p:nvPr/>
         </p:nvSpPr>
         <p:spPr>
           <a:xfrm>
-            <a:off x="7399064" y="3778031"/>
-            <a:ext cx="91440" cy="91440"/>
+            <a:off x="7389920" y="3768887"/>
+            <a:ext cx="109728" cy="109728"/>
           </a:xfrm>
           <a:prstGeom prst="ellipse">
             <a:avLst/>
@@ -4878,52 +4714,16 @@
           </a:p>
         </p:txBody>
       </p:sp>
-      <p:cxnSp>
-        <p:nvCxnSpPr>
-          <p:cNvPr id="48" name="Connector 47"/>
-          <p:cNvCxnSpPr/>
-          <p:nvPr/>
-        </p:nvCxnSpPr>
-        <p:spPr>
-          <a:xfrm>
-            <a:off x="7842678" y="2971518"/>
-            <a:ext cx="201168" cy="0"/>
-          </a:xfrm>
-          <a:prstGeom prst="line">
-            <a:avLst/>
-          </a:prstGeom>
-          <a:ln w="31750">
-            <a:solidFill>
-              <a:srgbClr val="C53E1F"/>
-            </a:solidFill>
-          </a:ln>
-          <a:effectLst/>
-        </p:spPr>
-        <p:style>
-          <a:lnRef idx="2">
-            <a:schemeClr val="accent1"/>
-          </a:lnRef>
-          <a:fillRef idx="0">
-            <a:schemeClr val="accent1"/>
-          </a:fillRef>
-          <a:effectRef idx="1">
-            <a:schemeClr val="accent1"/>
-          </a:effectRef>
-          <a:fontRef idx="minor">
-            <a:schemeClr val="tx1"/>
-          </a:fontRef>
-        </p:style>
-      </p:cxnSp>
-      <p:sp>
-        <p:nvSpPr>
-          <p:cNvPr id="49" name="Oval 48"/>
+      <p:sp>
+        <p:nvSpPr>
+          <p:cNvPr id="43" name="Oval 42"/>
           <p:cNvSpPr/>
           <p:nvPr/>
         </p:nvSpPr>
         <p:spPr>
           <a:xfrm>
-            <a:off x="7897542" y="1702191"/>
-            <a:ext cx="91440" cy="91440"/>
+            <a:off x="7888398" y="1693047"/>
+            <a:ext cx="109728" cy="109728"/>
           </a:xfrm>
           <a:prstGeom prst="ellipse">
             <a:avLst/>
@@ -4962,14 +4762,14 @@
       </p:sp>
       <p:sp>
         <p:nvSpPr>
-          <p:cNvPr id="50" name="Oval 49"/>
+          <p:cNvPr id="44" name="Oval 43"/>
           <p:cNvSpPr/>
           <p:nvPr/>
         </p:nvSpPr>
         <p:spPr>
           <a:xfrm>
-            <a:off x="7897542" y="4149406"/>
-            <a:ext cx="91440" cy="91440"/>
+            <a:off x="7888398" y="4140262"/>
+            <a:ext cx="109728" cy="109728"/>
           </a:xfrm>
           <a:prstGeom prst="ellipse">
             <a:avLst/>
@@ -5008,7 +4808,7 @@
       </p:sp>
       <p:sp>
         <p:nvSpPr>
-          <p:cNvPr id="51" name="TextBox 50"/>
+          <p:cNvPr id="45" name="TextBox 44"/>
           <p:cNvSpPr txBox="1"/>
           <p:nvPr/>
         </p:nvSpPr>
@@ -5043,52 +4843,16 @@
           </a:p>
         </p:txBody>
       </p:sp>
-      <p:cxnSp>
-        <p:nvCxnSpPr>
-          <p:cNvPr id="52" name="Connector 51"/>
-          <p:cNvCxnSpPr/>
-          <p:nvPr/>
-        </p:nvCxnSpPr>
-        <p:spPr>
-          <a:xfrm>
-            <a:off x="8728862" y="2289100"/>
-            <a:ext cx="201168" cy="0"/>
-          </a:xfrm>
-          <a:prstGeom prst="line">
-            <a:avLst/>
-          </a:prstGeom>
-          <a:ln w="31750">
-            <a:solidFill>
-              <a:srgbClr val="0A7D6E"/>
-            </a:solidFill>
-          </a:ln>
-          <a:effectLst/>
-        </p:spPr>
-        <p:style>
-          <a:lnRef idx="2">
-            <a:schemeClr val="accent1"/>
-          </a:lnRef>
-          <a:fillRef idx="0">
-            <a:schemeClr val="accent1"/>
-          </a:fillRef>
-          <a:effectRef idx="1">
-            <a:schemeClr val="accent1"/>
-          </a:effectRef>
-          <a:fontRef idx="minor">
-            <a:schemeClr val="tx1"/>
-          </a:fontRef>
-        </p:style>
-      </p:cxnSp>
-      <p:sp>
-        <p:nvSpPr>
-          <p:cNvPr id="53" name="Oval 52"/>
+      <p:sp>
+        <p:nvSpPr>
+          <p:cNvPr id="46" name="Oval 45"/>
           <p:cNvSpPr/>
           <p:nvPr/>
         </p:nvSpPr>
         <p:spPr>
           <a:xfrm>
-            <a:off x="8783726" y="2243380"/>
-            <a:ext cx="91440" cy="91440"/>
+            <a:off x="8774582" y="2234236"/>
+            <a:ext cx="109728" cy="109728"/>
           </a:xfrm>
           <a:prstGeom prst="ellipse">
             <a:avLst/>
@@ -5125,52 +4889,16 @@
           </a:p>
         </p:txBody>
       </p:sp>
-      <p:cxnSp>
-        <p:nvCxnSpPr>
-          <p:cNvPr id="54" name="Connector 53"/>
-          <p:cNvCxnSpPr/>
-          <p:nvPr/>
-        </p:nvCxnSpPr>
-        <p:spPr>
-          <a:xfrm>
-            <a:off x="9227341" y="3473325"/>
-            <a:ext cx="201168" cy="0"/>
-          </a:xfrm>
-          <a:prstGeom prst="line">
-            <a:avLst/>
-          </a:prstGeom>
-          <a:ln w="31750">
-            <a:solidFill>
-              <a:srgbClr val="C53E1F"/>
-            </a:solidFill>
-          </a:ln>
-          <a:effectLst/>
-        </p:spPr>
-        <p:style>
-          <a:lnRef idx="2">
-            <a:schemeClr val="accent1"/>
-          </a:lnRef>
-          <a:fillRef idx="0">
-            <a:schemeClr val="accent1"/>
-          </a:fillRef>
-          <a:effectRef idx="1">
-            <a:schemeClr val="accent1"/>
-          </a:effectRef>
-          <a:fontRef idx="minor">
-            <a:schemeClr val="tx1"/>
-          </a:fontRef>
-        </p:style>
-      </p:cxnSp>
-      <p:sp>
-        <p:nvSpPr>
-          <p:cNvPr id="55" name="Oval 54"/>
+      <p:sp>
+        <p:nvSpPr>
+          <p:cNvPr id="47" name="Oval 46"/>
           <p:cNvSpPr/>
           <p:nvPr/>
         </p:nvSpPr>
         <p:spPr>
           <a:xfrm>
-            <a:off x="9282205" y="3127971"/>
-            <a:ext cx="91440" cy="91440"/>
+            <a:off x="9273061" y="3118827"/>
+            <a:ext cx="109728" cy="109728"/>
           </a:xfrm>
           <a:prstGeom prst="ellipse">
             <a:avLst/>
@@ -5209,14 +4937,14 @@
       </p:sp>
       <p:sp>
         <p:nvSpPr>
-          <p:cNvPr id="56" name="Oval 55"/>
+          <p:cNvPr id="48" name="Oval 47"/>
           <p:cNvSpPr/>
           <p:nvPr/>
         </p:nvSpPr>
         <p:spPr>
           <a:xfrm>
-            <a:off x="9282205" y="3727238"/>
-            <a:ext cx="91440" cy="91440"/>
+            <a:off x="9273061" y="3718094"/>
+            <a:ext cx="109728" cy="109728"/>
           </a:xfrm>
           <a:prstGeom prst="ellipse">
             <a:avLst/>
@@ -5255,7 +4983,7 @@
       </p:sp>
       <p:sp>
         <p:nvSpPr>
-          <p:cNvPr id="57" name="TextBox 56"/>
+          <p:cNvPr id="49" name="TextBox 48"/>
           <p:cNvSpPr txBox="1"/>
           <p:nvPr/>
         </p:nvSpPr>
@@ -5290,52 +5018,16 @@
           </a:p>
         </p:txBody>
       </p:sp>
-      <p:cxnSp>
-        <p:nvCxnSpPr>
-          <p:cNvPr id="58" name="Connector 57"/>
-          <p:cNvCxnSpPr/>
-          <p:nvPr/>
-        </p:nvCxnSpPr>
-        <p:spPr>
-          <a:xfrm>
-            <a:off x="10113525" y="2012604"/>
-            <a:ext cx="201168" cy="0"/>
-          </a:xfrm>
-          <a:prstGeom prst="line">
-            <a:avLst/>
-          </a:prstGeom>
-          <a:ln w="31750">
-            <a:solidFill>
-              <a:srgbClr val="0A7D6E"/>
-            </a:solidFill>
-          </a:ln>
-          <a:effectLst/>
-        </p:spPr>
-        <p:style>
-          <a:lnRef idx="2">
-            <a:schemeClr val="accent1"/>
-          </a:lnRef>
-          <a:fillRef idx="0">
-            <a:schemeClr val="accent1"/>
-          </a:fillRef>
-          <a:effectRef idx="1">
-            <a:schemeClr val="accent1"/>
-          </a:effectRef>
-          <a:fontRef idx="minor">
-            <a:schemeClr val="tx1"/>
-          </a:fontRef>
-        </p:style>
-      </p:cxnSp>
-      <p:sp>
-        <p:nvSpPr>
-          <p:cNvPr id="59" name="Oval 58"/>
+      <p:sp>
+        <p:nvSpPr>
+          <p:cNvPr id="50" name="Oval 49"/>
           <p:cNvSpPr/>
           <p:nvPr/>
         </p:nvSpPr>
         <p:spPr>
           <a:xfrm>
-            <a:off x="10168389" y="1966884"/>
-            <a:ext cx="91440" cy="91440"/>
+            <a:off x="10159245" y="1957740"/>
+            <a:ext cx="109728" cy="109728"/>
           </a:xfrm>
           <a:prstGeom prst="ellipse">
             <a:avLst/>
@@ -5372,52 +5064,16 @@
           </a:p>
         </p:txBody>
       </p:sp>
-      <p:cxnSp>
-        <p:nvCxnSpPr>
-          <p:cNvPr id="60" name="Connector 59"/>
-          <p:cNvCxnSpPr/>
-          <p:nvPr/>
-        </p:nvCxnSpPr>
-        <p:spPr>
-          <a:xfrm>
-            <a:off x="10612004" y="4534088"/>
-            <a:ext cx="201168" cy="0"/>
-          </a:xfrm>
-          <a:prstGeom prst="line">
-            <a:avLst/>
-          </a:prstGeom>
-          <a:ln w="31750">
-            <a:solidFill>
-              <a:srgbClr val="C53E1F"/>
-            </a:solidFill>
-          </a:ln>
-          <a:effectLst/>
-        </p:spPr>
-        <p:style>
-          <a:lnRef idx="2">
-            <a:schemeClr val="accent1"/>
-          </a:lnRef>
-          <a:fillRef idx="0">
-            <a:schemeClr val="accent1"/>
-          </a:fillRef>
-          <a:effectRef idx="1">
-            <a:schemeClr val="accent1"/>
-          </a:effectRef>
-          <a:fontRef idx="minor">
-            <a:schemeClr val="tx1"/>
-          </a:fontRef>
-        </p:style>
-      </p:cxnSp>
-      <p:sp>
-        <p:nvSpPr>
-          <p:cNvPr id="61" name="Oval 60"/>
+      <p:sp>
+        <p:nvSpPr>
+          <p:cNvPr id="51" name="Oval 50"/>
           <p:cNvSpPr/>
           <p:nvPr/>
         </p:nvSpPr>
         <p:spPr>
           <a:xfrm>
-            <a:off x="10666868" y="5430129"/>
-            <a:ext cx="91440" cy="91440"/>
+            <a:off x="10657724" y="5420985"/>
+            <a:ext cx="109728" cy="109728"/>
           </a:xfrm>
           <a:prstGeom prst="ellipse">
             <a:avLst/>
@@ -5456,14 +5112,14 @@
       </p:sp>
       <p:sp>
         <p:nvSpPr>
-          <p:cNvPr id="62" name="Oval 61"/>
+          <p:cNvPr id="52" name="Oval 51"/>
           <p:cNvSpPr/>
           <p:nvPr/>
         </p:nvSpPr>
         <p:spPr>
           <a:xfrm>
-            <a:off x="10666868" y="3546607"/>
-            <a:ext cx="91440" cy="91440"/>
+            <a:off x="10657724" y="3537463"/>
+            <a:ext cx="109728" cy="109728"/>
           </a:xfrm>
           <a:prstGeom prst="ellipse">
             <a:avLst/>
@@ -5502,7 +5158,7 @@
       </p:sp>
       <p:cxnSp>
         <p:nvCxnSpPr>
-          <p:cNvPr id="63" name="Connector 62"/>
+          <p:cNvPr id="53" name="Connector 52"/>
           <p:cNvCxnSpPr/>
           <p:nvPr/>
         </p:nvCxnSpPr>
@@ -5514,7 +5170,7 @@
           <a:prstGeom prst="line">
             <a:avLst/>
           </a:prstGeom>
-          <a:ln w="6350">
+          <a:ln w="7620">
             <a:solidFill>
               <a:srgbClr val="BBBBBB"/>
             </a:solidFill>
@@ -5539,23 +5195,25 @@
       </p:cxnSp>
       <p:sp>
         <p:nvSpPr>
-          <p:cNvPr id="64" name="Oval 63"/>
+          <p:cNvPr id="54" name="Rectangle 53"/>
           <p:cNvSpPr/>
           <p:nvPr/>
         </p:nvSpPr>
         <p:spPr>
           <a:xfrm>
-            <a:off x="10177272" y="621792"/>
-            <a:ext cx="128016" cy="128016"/>
-          </a:xfrm>
-          <a:prstGeom prst="ellipse">
+            <a:off x="1463040" y="6263640"/>
+            <a:ext cx="9692640" cy="320040"/>
+          </a:xfrm>
+          <a:prstGeom prst="rect">
             <a:avLst/>
           </a:prstGeom>
           <a:solidFill>
-            <a:srgbClr val="0A7D6E"/>
+            <a:srgbClr val="F0F0F0"/>
           </a:solidFill>
-          <a:ln>
-            <a:noFill/>
+          <a:ln w="10160">
+            <a:solidFill>
+              <a:srgbClr val="222222"/>
+            </a:solidFill>
           </a:ln>
           <a:effectLst/>
         </p:spPr>
@@ -5583,14 +5241,14 @@
       </p:sp>
       <p:sp>
         <p:nvSpPr>
-          <p:cNvPr id="65" name="TextBox 64"/>
+          <p:cNvPr id="55" name="TextBox 54"/>
           <p:cNvSpPr txBox="1"/>
           <p:nvPr/>
         </p:nvSpPr>
         <p:spPr>
           <a:xfrm>
-            <a:off x="10332720" y="594360"/>
-            <a:ext cx="1097280" cy="182880"/>
+            <a:off x="1463040" y="6263640"/>
+            <a:ext cx="9692640" cy="320040"/>
           </a:xfrm>
           <a:prstGeom prst="rect">
             <a:avLst/>
@@ -5604,7 +5262,7 @@
           </a:bodyPr>
           <a:lstStyle/>
           <a:p>
-            <a:pPr algn="l"/>
+            <a:pPr algn="ctr"/>
             <a:r>
               <a:rPr sz="900" b="0" i="0">
                 <a:solidFill>
@@ -5612,123 +5270,7 @@
                 </a:solidFill>
                 <a:latin typeface="Arial"/>
               </a:rPr>
-              <a:t>good (n=1)</a:t>
-            </a:r>
-          </a:p>
-        </p:txBody>
-      </p:sp>
-      <p:sp>
-        <p:nvSpPr>
-          <p:cNvPr id="66" name="Oval 65"/>
-          <p:cNvSpPr/>
-          <p:nvPr/>
-        </p:nvSpPr>
-        <p:spPr>
-          <a:xfrm>
-            <a:off x="10177272" y="804672"/>
-            <a:ext cx="128016" cy="128016"/>
-          </a:xfrm>
-          <a:prstGeom prst="ellipse">
-            <a:avLst/>
-          </a:prstGeom>
-          <a:solidFill>
-            <a:srgbClr val="C53E1F"/>
-          </a:solidFill>
-          <a:ln>
-            <a:noFill/>
-          </a:ln>
-          <a:effectLst/>
-        </p:spPr>
-        <p:style>
-          <a:lnRef idx="1">
-            <a:schemeClr val="accent1"/>
-          </a:lnRef>
-          <a:fillRef idx="3">
-            <a:schemeClr val="accent1"/>
-          </a:fillRef>
-          <a:effectRef idx="2">
-            <a:schemeClr val="accent1"/>
-          </a:effectRef>
-          <a:fontRef idx="minor">
-            <a:schemeClr val="lt1"/>
-          </a:fontRef>
-        </p:style>
-        <p:txBody>
-          <a:bodyPr rtlCol="0" anchor="ctr"/>
-          <a:lstStyle/>
-          <a:p>
-            <a:pPr algn="ctr"/>
-          </a:p>
-        </p:txBody>
-      </p:sp>
-      <p:sp>
-        <p:nvSpPr>
-          <p:cNvPr id="67" name="TextBox 66"/>
-          <p:cNvSpPr txBox="1"/>
-          <p:nvPr/>
-        </p:nvSpPr>
-        <p:spPr>
-          <a:xfrm>
-            <a:off x="10332720" y="777240"/>
-            <a:ext cx="1097280" cy="182880"/>
-          </a:xfrm>
-          <a:prstGeom prst="rect">
-            <a:avLst/>
-          </a:prstGeom>
-          <a:noFill/>
-          <a:effectLst/>
-        </p:spPr>
-        <p:txBody>
-          <a:bodyPr wrap="square" lIns="0" rIns="0" tIns="0" bIns="0" anchor="ctr">
-            <a:spAutoFit/>
-          </a:bodyPr>
-          <a:lstStyle/>
-          <a:p>
-            <a:pPr algn="l"/>
-            <a:r>
-              <a:rPr sz="900" b="0" i="0">
-                <a:solidFill>
-                  <a:srgbClr val="222222"/>
-                </a:solidFill>
-                <a:latin typeface="Arial"/>
-              </a:rPr>
-              <a:t>non-CR (n=2)</a:t>
-            </a:r>
-          </a:p>
-        </p:txBody>
-      </p:sp>
-      <p:sp>
-        <p:nvSpPr>
-          <p:cNvPr id="68" name="TextBox 67"/>
-          <p:cNvSpPr txBox="1"/>
-          <p:nvPr/>
-        </p:nvSpPr>
-        <p:spPr>
-          <a:xfrm>
-            <a:off x="1463040" y="6263640"/>
-            <a:ext cx="9601200" cy="320040"/>
-          </a:xfrm>
-          <a:prstGeom prst="rect">
-            <a:avLst/>
-          </a:prstGeom>
-          <a:noFill/>
-          <a:effectLst/>
-        </p:spPr>
-        <p:txBody>
-          <a:bodyPr wrap="square" lIns="0" rIns="0" tIns="0" bIns="0" anchor="ctr">
-            <a:spAutoFit/>
-          </a:bodyPr>
-          <a:lstStyle/>
-          <a:p>
-            <a:pPr algn="l"/>
-            <a:r>
-              <a:rPr sz="900" b="0" i="1">
-                <a:solidFill>
-                  <a:srgbClr val="BBBBBB"/>
-                </a:solidFill>
-                <a:latin typeface="Arial"/>
-              </a:rPr>
-              <a:t>Sample size (n = 3; 1 good + 2 bad) prohibits formal testing; directional 4/7 concordance is uninformative given the imbalance.</a:t>
+              <a:t>Sample size n = 3 (1 good + 2 bad) prohibits formal testing; directional concordance uninformative</a:t>
             </a:r>
           </a:p>
         </p:txBody>
@@ -5818,7 +5360,7 @@
                 </a:solidFill>
                 <a:latin typeface="Arial"/>
               </a:rPr>
-              <a:t>GSE254249 post-TNT × response (n = 8; 5 CR + 3 non-CR) — primary SC-RT validation</a:t>
+              <a:t>GSE254249 post-TNT × response (n = 8, 5 CR + 3 non-CR) — PRIMARY SC-RT validation test</a:t>
             </a:r>
           </a:p>
         </p:txBody>
@@ -6402,7 +5944,51 @@
       </p:cxnSp>
       <p:sp>
         <p:nvSpPr>
-          <p:cNvPr id="20" name="TextBox 19"/>
+          <p:cNvPr id="20" name="Rectangle 19"/>
+          <p:cNvSpPr/>
+          <p:nvPr/>
+        </p:nvSpPr>
+        <p:spPr>
+          <a:xfrm>
+            <a:off x="1532273" y="1188720"/>
+            <a:ext cx="1246197" cy="2221442"/>
+          </a:xfrm>
+          <a:prstGeom prst="rect">
+            <a:avLst/>
+          </a:prstGeom>
+          <a:solidFill>
+            <a:srgbClr val="ECF5F1"/>
+          </a:solidFill>
+          <a:ln>
+            <a:noFill/>
+          </a:ln>
+          <a:effectLst/>
+        </p:spPr>
+        <p:style>
+          <a:lnRef idx="1">
+            <a:schemeClr val="accent1"/>
+          </a:lnRef>
+          <a:fillRef idx="3">
+            <a:schemeClr val="accent1"/>
+          </a:fillRef>
+          <a:effectRef idx="2">
+            <a:schemeClr val="accent1"/>
+          </a:effectRef>
+          <a:fontRef idx="minor">
+            <a:schemeClr val="lt1"/>
+          </a:fontRef>
+        </p:style>
+        <p:txBody>
+          <a:bodyPr rtlCol="0" anchor="ctr"/>
+          <a:lstStyle/>
+          <a:p>
+            <a:pPr algn="ctr"/>
+          </a:p>
+        </p:txBody>
+      </p:sp>
+      <p:sp>
+        <p:nvSpPr>
+          <p:cNvPr id="21" name="TextBox 20"/>
           <p:cNvSpPr txBox="1"/>
           <p:nvPr/>
         </p:nvSpPr>
@@ -6436,42 +6022,6 @@
           </a:p>
         </p:txBody>
       </p:sp>
-      <p:sp>
-        <p:nvSpPr>
-          <p:cNvPr id="21" name="TextBox 20"/>
-          <p:cNvSpPr txBox="1"/>
-          <p:nvPr/>
-        </p:nvSpPr>
-        <p:spPr>
-          <a:xfrm>
-            <a:off x="1463040" y="868680"/>
-            <a:ext cx="5538651" cy="256032"/>
-          </a:xfrm>
-          <a:prstGeom prst="rect">
-            <a:avLst/>
-          </a:prstGeom>
-          <a:noFill/>
-          <a:effectLst/>
-        </p:spPr>
-        <p:txBody>
-          <a:bodyPr wrap="square" lIns="0" rIns="0" tIns="0" bIns="0" anchor="ctr">
-            <a:spAutoFit/>
-          </a:bodyPr>
-          <a:lstStyle/>
-          <a:p>
-            <a:pPr algn="ctr"/>
-            <a:r>
-              <a:rPr sz="900" b="1" i="0">
-                <a:solidFill>
-                  <a:srgbClr val="0E4A68"/>
-                </a:solidFill>
-                <a:latin typeface="Arial"/>
-              </a:rPr>
-              <a:t>Thread 1 (tumor-intrinsic)</a:t>
-            </a:r>
-          </a:p>
-        </p:txBody>
-      </p:sp>
       <p:cxnSp>
         <p:nvCxnSpPr>
           <p:cNvPr id="22" name="Connector 21"/>
@@ -6668,8 +6218,8 @@
         </p:nvSpPr>
         <p:spPr>
           <a:xfrm>
-            <a:off x="1904312" y="2529305"/>
-            <a:ext cx="64008" cy="64008"/>
+            <a:off x="1890596" y="2515589"/>
+            <a:ext cx="91440" cy="91440"/>
           </a:xfrm>
           <a:prstGeom prst="ellipse">
             <a:avLst/>
@@ -6712,8 +6262,8 @@
         </p:nvSpPr>
         <p:spPr>
           <a:xfrm>
-            <a:off x="1807742" y="3099828"/>
-            <a:ext cx="64008" cy="64008"/>
+            <a:off x="1794026" y="3086112"/>
+            <a:ext cx="91440" cy="91440"/>
           </a:xfrm>
           <a:prstGeom prst="ellipse">
             <a:avLst/>
@@ -6756,8 +6306,8 @@
         </p:nvSpPr>
         <p:spPr>
           <a:xfrm>
-            <a:off x="1875869" y="3120055"/>
-            <a:ext cx="64008" cy="64008"/>
+            <a:off x="1862153" y="3106339"/>
+            <a:ext cx="91440" cy="91440"/>
           </a:xfrm>
           <a:prstGeom prst="ellipse">
             <a:avLst/>
@@ -6800,8 +6350,8 @@
         </p:nvSpPr>
         <p:spPr>
           <a:xfrm>
-            <a:off x="1937321" y="3337357"/>
-            <a:ext cx="64008" cy="64008"/>
+            <a:off x="1923605" y="3323641"/>
+            <a:ext cx="91440" cy="91440"/>
           </a:xfrm>
           <a:prstGeom prst="ellipse">
             <a:avLst/>
@@ -6844,8 +6394,8 @@
         </p:nvSpPr>
         <p:spPr>
           <a:xfrm>
-            <a:off x="1915929" y="3718830"/>
-            <a:ext cx="64008" cy="64008"/>
+            <a:off x="1902213" y="3705114"/>
+            <a:ext cx="91440" cy="91440"/>
           </a:xfrm>
           <a:prstGeom prst="ellipse">
             <a:avLst/>
@@ -7076,8 +6626,8 @@
         </p:nvSpPr>
         <p:spPr>
           <a:xfrm>
-            <a:off x="2346039" y="3444487"/>
-            <a:ext cx="64008" cy="64008"/>
+            <a:off x="2332323" y="3430771"/>
+            <a:ext cx="91440" cy="91440"/>
           </a:xfrm>
           <a:prstGeom prst="ellipse">
             <a:avLst/>
@@ -7120,8 +6670,8 @@
         </p:nvSpPr>
         <p:spPr>
           <a:xfrm>
-            <a:off x="2378669" y="4573473"/>
-            <a:ext cx="64008" cy="64008"/>
+            <a:off x="2364953" y="4559757"/>
+            <a:ext cx="91440" cy="91440"/>
           </a:xfrm>
           <a:prstGeom prst="ellipse">
             <a:avLst/>
@@ -7164,8 +6714,8 @@
         </p:nvSpPr>
         <p:spPr>
           <a:xfrm>
-            <a:off x="2356570" y="4664495"/>
-            <a:ext cx="64008" cy="64008"/>
+            <a:off x="2342854" y="4650779"/>
+            <a:ext cx="91440" cy="91440"/>
           </a:xfrm>
           <a:prstGeom prst="ellipse">
             <a:avLst/>
@@ -7274,7 +6824,51 @@
       </p:sp>
       <p:sp>
         <p:nvSpPr>
-          <p:cNvPr id="42" name="TextBox 41"/>
+          <p:cNvPr id="42" name="Rectangle 41"/>
+          <p:cNvSpPr/>
+          <p:nvPr/>
+        </p:nvSpPr>
+        <p:spPr>
+          <a:xfrm>
+            <a:off x="2916936" y="1188720"/>
+            <a:ext cx="1246197" cy="2221442"/>
+          </a:xfrm>
+          <a:prstGeom prst="rect">
+            <a:avLst/>
+          </a:prstGeom>
+          <a:solidFill>
+            <a:srgbClr val="ECF5F1"/>
+          </a:solidFill>
+          <a:ln>
+            <a:noFill/>
+          </a:ln>
+          <a:effectLst/>
+        </p:spPr>
+        <p:style>
+          <a:lnRef idx="1">
+            <a:schemeClr val="accent1"/>
+          </a:lnRef>
+          <a:fillRef idx="3">
+            <a:schemeClr val="accent1"/>
+          </a:fillRef>
+          <a:effectRef idx="2">
+            <a:schemeClr val="accent1"/>
+          </a:effectRef>
+          <a:fontRef idx="minor">
+            <a:schemeClr val="lt1"/>
+          </a:fontRef>
+        </p:style>
+        <p:txBody>
+          <a:bodyPr rtlCol="0" anchor="ctr"/>
+          <a:lstStyle/>
+          <a:p>
+            <a:pPr algn="ctr"/>
+          </a:p>
+        </p:txBody>
+      </p:sp>
+      <p:sp>
+        <p:nvSpPr>
+          <p:cNvPr id="43" name="TextBox 42"/>
           <p:cNvSpPr txBox="1"/>
           <p:nvPr/>
         </p:nvSpPr>
@@ -7310,7 +6904,7 @@
       </p:sp>
       <p:cxnSp>
         <p:nvCxnSpPr>
-          <p:cNvPr id="43" name="Connector 42"/>
+          <p:cNvPr id="44" name="Connector 43"/>
           <p:cNvCxnSpPr/>
           <p:nvPr/>
         </p:nvCxnSpPr>
@@ -7318,42 +6912,6 @@
           <a:xfrm flipV="1">
             <a:off x="3290795" y="2851588"/>
             <a:ext cx="0" cy="677616"/>
-          </a:xfrm>
-          <a:prstGeom prst="line">
-            <a:avLst/>
-          </a:prstGeom>
-          <a:ln w="10160">
-            <a:solidFill>
-              <a:srgbClr val="0A7D6E"/>
-            </a:solidFill>
-          </a:ln>
-          <a:effectLst/>
-        </p:spPr>
-        <p:style>
-          <a:lnRef idx="2">
-            <a:schemeClr val="accent1"/>
-          </a:lnRef>
-          <a:fillRef idx="0">
-            <a:schemeClr val="accent1"/>
-          </a:fillRef>
-          <a:effectRef idx="1">
-            <a:schemeClr val="accent1"/>
-          </a:effectRef>
-          <a:fontRef idx="minor">
-            <a:schemeClr val="tx1"/>
-          </a:fontRef>
-        </p:style>
-      </p:cxnSp>
-      <p:cxnSp>
-        <p:nvCxnSpPr>
-          <p:cNvPr id="44" name="Connector 43"/>
-          <p:cNvCxnSpPr/>
-          <p:nvPr/>
-        </p:nvCxnSpPr>
-        <p:spPr>
-          <a:xfrm>
-            <a:off x="3217643" y="3529204"/>
-            <a:ext cx="146304" cy="0"/>
           </a:xfrm>
           <a:prstGeom prst="line">
             <a:avLst/>
@@ -7388,6 +6946,42 @@
         </p:nvCxnSpPr>
         <p:spPr>
           <a:xfrm>
+            <a:off x="3217643" y="3529204"/>
+            <a:ext cx="146304" cy="0"/>
+          </a:xfrm>
+          <a:prstGeom prst="line">
+            <a:avLst/>
+          </a:prstGeom>
+          <a:ln w="10160">
+            <a:solidFill>
+              <a:srgbClr val="0A7D6E"/>
+            </a:solidFill>
+          </a:ln>
+          <a:effectLst/>
+        </p:spPr>
+        <p:style>
+          <a:lnRef idx="2">
+            <a:schemeClr val="accent1"/>
+          </a:lnRef>
+          <a:fillRef idx="0">
+            <a:schemeClr val="accent1"/>
+          </a:fillRef>
+          <a:effectRef idx="1">
+            <a:schemeClr val="accent1"/>
+          </a:effectRef>
+          <a:fontRef idx="minor">
+            <a:schemeClr val="tx1"/>
+          </a:fontRef>
+        </p:style>
+      </p:cxnSp>
+      <p:cxnSp>
+        <p:nvCxnSpPr>
+          <p:cNvPr id="46" name="Connector 45"/>
+          <p:cNvCxnSpPr/>
+          <p:nvPr/>
+        </p:nvCxnSpPr>
+        <p:spPr>
+          <a:xfrm>
             <a:off x="3217643" y="2851588"/>
             <a:ext cx="146304" cy="0"/>
           </a:xfrm>
@@ -7418,7 +7012,7 @@
       </p:cxnSp>
       <p:sp>
         <p:nvSpPr>
-          <p:cNvPr id="46" name="Rectangle 45"/>
+          <p:cNvPr id="47" name="Rectangle 46"/>
           <p:cNvSpPr/>
           <p:nvPr/>
         </p:nvSpPr>
@@ -7462,7 +7056,7 @@
       </p:sp>
       <p:cxnSp>
         <p:nvCxnSpPr>
-          <p:cNvPr id="47" name="Connector 46"/>
+          <p:cNvPr id="48" name="Connector 47"/>
           <p:cNvCxnSpPr/>
           <p:nvPr/>
         </p:nvCxnSpPr>
@@ -7498,14 +7092,14 @@
       </p:cxnSp>
       <p:sp>
         <p:nvSpPr>
-          <p:cNvPr id="48" name="Oval 47"/>
+          <p:cNvPr id="49" name="Oval 48"/>
           <p:cNvSpPr/>
           <p:nvPr/>
         </p:nvSpPr>
         <p:spPr>
           <a:xfrm>
-            <a:off x="3241329" y="2819584"/>
-            <a:ext cx="64008" cy="64008"/>
+            <a:off x="3227613" y="2805868"/>
+            <a:ext cx="91440" cy="91440"/>
           </a:xfrm>
           <a:prstGeom prst="ellipse">
             <a:avLst/>
@@ -7542,14 +7136,14 @@
       </p:sp>
       <p:sp>
         <p:nvSpPr>
-          <p:cNvPr id="49" name="Oval 48"/>
+          <p:cNvPr id="50" name="Oval 49"/>
           <p:cNvSpPr/>
           <p:nvPr/>
         </p:nvSpPr>
         <p:spPr>
           <a:xfrm>
-            <a:off x="3229799" y="2822124"/>
-            <a:ext cx="64008" cy="64008"/>
+            <a:off x="3216083" y="2808408"/>
+            <a:ext cx="91440" cy="91440"/>
           </a:xfrm>
           <a:prstGeom prst="ellipse">
             <a:avLst/>
@@ -7586,14 +7180,14 @@
       </p:sp>
       <p:sp>
         <p:nvSpPr>
-          <p:cNvPr id="50" name="Oval 49"/>
+          <p:cNvPr id="51" name="Oval 50"/>
           <p:cNvSpPr/>
           <p:nvPr/>
         </p:nvSpPr>
         <p:spPr>
           <a:xfrm>
-            <a:off x="3207103" y="2973839"/>
-            <a:ext cx="64008" cy="64008"/>
+            <a:off x="3193387" y="2960123"/>
+            <a:ext cx="91440" cy="91440"/>
           </a:xfrm>
           <a:prstGeom prst="ellipse">
             <a:avLst/>
@@ -7630,14 +7224,14 @@
       </p:sp>
       <p:sp>
         <p:nvSpPr>
-          <p:cNvPr id="51" name="Oval 50"/>
+          <p:cNvPr id="52" name="Oval 51"/>
           <p:cNvSpPr/>
           <p:nvPr/>
         </p:nvSpPr>
         <p:spPr>
           <a:xfrm>
-            <a:off x="3253498" y="3318025"/>
-            <a:ext cx="64008" cy="64008"/>
+            <a:off x="3239782" y="3304309"/>
+            <a:ext cx="91440" cy="91440"/>
           </a:xfrm>
           <a:prstGeom prst="ellipse">
             <a:avLst/>
@@ -7674,14 +7268,14 @@
       </p:sp>
       <p:sp>
         <p:nvSpPr>
-          <p:cNvPr id="52" name="Oval 51"/>
+          <p:cNvPr id="53" name="Oval 52"/>
           <p:cNvSpPr/>
           <p:nvPr/>
         </p:nvSpPr>
         <p:spPr>
           <a:xfrm>
-            <a:off x="3215051" y="3497200"/>
-            <a:ext cx="64008" cy="64008"/>
+            <a:off x="3201335" y="3483484"/>
+            <a:ext cx="91440" cy="91440"/>
           </a:xfrm>
           <a:prstGeom prst="ellipse">
             <a:avLst/>
@@ -7718,7 +7312,7 @@
       </p:sp>
       <p:cxnSp>
         <p:nvCxnSpPr>
-          <p:cNvPr id="53" name="Connector 52"/>
+          <p:cNvPr id="54" name="Connector 53"/>
           <p:cNvCxnSpPr/>
           <p:nvPr/>
         </p:nvCxnSpPr>
@@ -7726,42 +7320,6 @@
           <a:xfrm flipV="1">
             <a:off x="3789274" y="3175994"/>
             <a:ext cx="0" cy="1666464"/>
-          </a:xfrm>
-          <a:prstGeom prst="line">
-            <a:avLst/>
-          </a:prstGeom>
-          <a:ln w="10160">
-            <a:solidFill>
-              <a:srgbClr val="C53E1F"/>
-            </a:solidFill>
-          </a:ln>
-          <a:effectLst/>
-        </p:spPr>
-        <p:style>
-          <a:lnRef idx="2">
-            <a:schemeClr val="accent1"/>
-          </a:lnRef>
-          <a:fillRef idx="0">
-            <a:schemeClr val="accent1"/>
-          </a:fillRef>
-          <a:effectRef idx="1">
-            <a:schemeClr val="accent1"/>
-          </a:effectRef>
-          <a:fontRef idx="minor">
-            <a:schemeClr val="tx1"/>
-          </a:fontRef>
-        </p:style>
-      </p:cxnSp>
-      <p:cxnSp>
-        <p:nvCxnSpPr>
-          <p:cNvPr id="54" name="Connector 53"/>
-          <p:cNvCxnSpPr/>
-          <p:nvPr/>
-        </p:nvCxnSpPr>
-        <p:spPr>
-          <a:xfrm>
-            <a:off x="3716122" y="4842458"/>
-            <a:ext cx="146304" cy="0"/>
           </a:xfrm>
           <a:prstGeom prst="line">
             <a:avLst/>
@@ -7796,6 +7354,42 @@
         </p:nvCxnSpPr>
         <p:spPr>
           <a:xfrm>
+            <a:off x="3716122" y="4842458"/>
+            <a:ext cx="146304" cy="0"/>
+          </a:xfrm>
+          <a:prstGeom prst="line">
+            <a:avLst/>
+          </a:prstGeom>
+          <a:ln w="10160">
+            <a:solidFill>
+              <a:srgbClr val="C53E1F"/>
+            </a:solidFill>
+          </a:ln>
+          <a:effectLst/>
+        </p:spPr>
+        <p:style>
+          <a:lnRef idx="2">
+            <a:schemeClr val="accent1"/>
+          </a:lnRef>
+          <a:fillRef idx="0">
+            <a:schemeClr val="accent1"/>
+          </a:fillRef>
+          <a:effectRef idx="1">
+            <a:schemeClr val="accent1"/>
+          </a:effectRef>
+          <a:fontRef idx="minor">
+            <a:schemeClr val="tx1"/>
+          </a:fontRef>
+        </p:style>
+      </p:cxnSp>
+      <p:cxnSp>
+        <p:nvCxnSpPr>
+          <p:cNvPr id="56" name="Connector 55"/>
+          <p:cNvCxnSpPr/>
+          <p:nvPr/>
+        </p:nvCxnSpPr>
+        <p:spPr>
+          <a:xfrm>
             <a:off x="3716122" y="3175994"/>
             <a:ext cx="146304" cy="0"/>
           </a:xfrm>
@@ -7826,7 +7420,7 @@
       </p:cxnSp>
       <p:sp>
         <p:nvSpPr>
-          <p:cNvPr id="56" name="Rectangle 55"/>
+          <p:cNvPr id="57" name="Rectangle 56"/>
           <p:cNvSpPr/>
           <p:nvPr/>
         </p:nvSpPr>
@@ -7870,7 +7464,7 @@
       </p:sp>
       <p:cxnSp>
         <p:nvCxnSpPr>
-          <p:cNvPr id="57" name="Connector 56"/>
+          <p:cNvPr id="58" name="Connector 57"/>
           <p:cNvCxnSpPr/>
           <p:nvPr/>
         </p:nvCxnSpPr>
@@ -7906,14 +7500,14 @@
       </p:cxnSp>
       <p:sp>
         <p:nvSpPr>
-          <p:cNvPr id="58" name="Oval 57"/>
+          <p:cNvPr id="59" name="Oval 58"/>
           <p:cNvSpPr/>
           <p:nvPr/>
         </p:nvSpPr>
         <p:spPr>
           <a:xfrm>
-            <a:off x="3738531" y="3143990"/>
-            <a:ext cx="64008" cy="64008"/>
+            <a:off x="3724815" y="3130274"/>
+            <a:ext cx="91440" cy="91440"/>
           </a:xfrm>
           <a:prstGeom prst="ellipse">
             <a:avLst/>
@@ -7950,14 +7544,14 @@
       </p:sp>
       <p:sp>
         <p:nvSpPr>
-          <p:cNvPr id="59" name="Oval 58"/>
+          <p:cNvPr id="60" name="Oval 59"/>
           <p:cNvSpPr/>
           <p:nvPr/>
         </p:nvSpPr>
         <p:spPr>
           <a:xfrm>
-            <a:off x="3758424" y="4340937"/>
-            <a:ext cx="64008" cy="64008"/>
+            <a:off x="3744708" y="4327221"/>
+            <a:ext cx="91440" cy="91440"/>
           </a:xfrm>
           <a:prstGeom prst="ellipse">
             <a:avLst/>
@@ -7994,14 +7588,14 @@
       </p:sp>
       <p:sp>
         <p:nvSpPr>
-          <p:cNvPr id="60" name="Oval 59"/>
+          <p:cNvPr id="61" name="Oval 60"/>
           <p:cNvSpPr/>
           <p:nvPr/>
         </p:nvSpPr>
         <p:spPr>
           <a:xfrm>
-            <a:off x="3816486" y="4810454"/>
-            <a:ext cx="64008" cy="64008"/>
+            <a:off x="3802770" y="4796738"/>
+            <a:ext cx="91440" cy="91440"/>
           </a:xfrm>
           <a:prstGeom prst="ellipse">
             <a:avLst/>
@@ -8038,7 +7632,7 @@
       </p:sp>
       <p:sp>
         <p:nvSpPr>
-          <p:cNvPr id="61" name="TextBox 60"/>
+          <p:cNvPr id="62" name="TextBox 61"/>
           <p:cNvSpPr txBox="1"/>
           <p:nvPr/>
         </p:nvSpPr>
@@ -8074,7 +7668,7 @@
       </p:sp>
       <p:sp>
         <p:nvSpPr>
-          <p:cNvPr id="62" name="TextBox 61"/>
+          <p:cNvPr id="63" name="TextBox 62"/>
           <p:cNvSpPr txBox="1"/>
           <p:nvPr/>
         </p:nvSpPr>
@@ -8110,7 +7704,51 @@
       </p:sp>
       <p:sp>
         <p:nvSpPr>
-          <p:cNvPr id="63" name="TextBox 62"/>
+          <p:cNvPr id="64" name="Rectangle 63"/>
+          <p:cNvSpPr/>
+          <p:nvPr/>
+        </p:nvSpPr>
+        <p:spPr>
+          <a:xfrm>
+            <a:off x="4301599" y="1188720"/>
+            <a:ext cx="1246197" cy="2221442"/>
+          </a:xfrm>
+          <a:prstGeom prst="rect">
+            <a:avLst/>
+          </a:prstGeom>
+          <a:solidFill>
+            <a:srgbClr val="ECF5F1"/>
+          </a:solidFill>
+          <a:ln>
+            <a:noFill/>
+          </a:ln>
+          <a:effectLst/>
+        </p:spPr>
+        <p:style>
+          <a:lnRef idx="1">
+            <a:schemeClr val="accent1"/>
+          </a:lnRef>
+          <a:fillRef idx="3">
+            <a:schemeClr val="accent1"/>
+          </a:fillRef>
+          <a:effectRef idx="2">
+            <a:schemeClr val="accent1"/>
+          </a:effectRef>
+          <a:fontRef idx="minor">
+            <a:schemeClr val="lt1"/>
+          </a:fontRef>
+        </p:style>
+        <p:txBody>
+          <a:bodyPr rtlCol="0" anchor="ctr"/>
+          <a:lstStyle/>
+          <a:p>
+            <a:pPr algn="ctr"/>
+          </a:p>
+        </p:txBody>
+      </p:sp>
+      <p:sp>
+        <p:nvSpPr>
+          <p:cNvPr id="65" name="TextBox 64"/>
           <p:cNvSpPr txBox="1"/>
           <p:nvPr/>
         </p:nvSpPr>
@@ -8147,7 +7785,7 @@
       </p:sp>
       <p:cxnSp>
         <p:nvCxnSpPr>
-          <p:cNvPr id="64" name="Connector 63"/>
+          <p:cNvPr id="66" name="Connector 65"/>
           <p:cNvCxnSpPr/>
           <p:nvPr/>
         </p:nvCxnSpPr>
@@ -8183,7 +7821,7 @@
       </p:cxnSp>
       <p:cxnSp>
         <p:nvCxnSpPr>
-          <p:cNvPr id="65" name="Connector 64"/>
+          <p:cNvPr id="67" name="Connector 66"/>
           <p:cNvCxnSpPr/>
           <p:nvPr/>
         </p:nvCxnSpPr>
@@ -8217,86 +7855,6 @@
           </a:fontRef>
         </p:style>
       </p:cxnSp>
-      <p:cxnSp>
-        <p:nvCxnSpPr>
-          <p:cNvPr id="66" name="Connector 65"/>
-          <p:cNvCxnSpPr/>
-          <p:nvPr/>
-        </p:nvCxnSpPr>
-        <p:spPr>
-          <a:xfrm>
-            <a:off x="4602306" y="2773238"/>
-            <a:ext cx="146304" cy="0"/>
-          </a:xfrm>
-          <a:prstGeom prst="line">
-            <a:avLst/>
-          </a:prstGeom>
-          <a:ln w="10160">
-            <a:solidFill>
-              <a:srgbClr val="0A7D6E"/>
-            </a:solidFill>
-          </a:ln>
-          <a:effectLst/>
-        </p:spPr>
-        <p:style>
-          <a:lnRef idx="2">
-            <a:schemeClr val="accent1"/>
-          </a:lnRef>
-          <a:fillRef idx="0">
-            <a:schemeClr val="accent1"/>
-          </a:fillRef>
-          <a:effectRef idx="1">
-            <a:schemeClr val="accent1"/>
-          </a:effectRef>
-          <a:fontRef idx="minor">
-            <a:schemeClr val="tx1"/>
-          </a:fontRef>
-        </p:style>
-      </p:cxnSp>
-      <p:sp>
-        <p:nvSpPr>
-          <p:cNvPr id="67" name="Rectangle 66"/>
-          <p:cNvSpPr/>
-          <p:nvPr/>
-        </p:nvSpPr>
-        <p:spPr>
-          <a:xfrm>
-            <a:off x="4529154" y="3294538"/>
-            <a:ext cx="292608" cy="1"/>
-          </a:xfrm>
-          <a:prstGeom prst="rect">
-            <a:avLst/>
-          </a:prstGeom>
-          <a:noFill/>
-          <a:ln w="10160">
-            <a:solidFill>
-              <a:srgbClr val="0A7D6E"/>
-            </a:solidFill>
-          </a:ln>
-          <a:effectLst/>
-        </p:spPr>
-        <p:style>
-          <a:lnRef idx="1">
-            <a:schemeClr val="accent1"/>
-          </a:lnRef>
-          <a:fillRef idx="3">
-            <a:schemeClr val="accent1"/>
-          </a:fillRef>
-          <a:effectRef idx="2">
-            <a:schemeClr val="accent1"/>
-          </a:effectRef>
-          <a:fontRef idx="minor">
-            <a:schemeClr val="lt1"/>
-          </a:fontRef>
-        </p:style>
-        <p:txBody>
-          <a:bodyPr rtlCol="0" anchor="ctr"/>
-          <a:lstStyle/>
-          <a:p>
-            <a:pPr algn="ctr"/>
-          </a:p>
-        </p:txBody>
-      </p:sp>
       <p:cxnSp>
         <p:nvCxnSpPr>
           <p:cNvPr id="68" name="Connector 67"/>
@@ -8305,6 +7863,86 @@
         </p:nvCxnSpPr>
         <p:spPr>
           <a:xfrm>
+            <a:off x="4602306" y="2773238"/>
+            <a:ext cx="146304" cy="0"/>
+          </a:xfrm>
+          <a:prstGeom prst="line">
+            <a:avLst/>
+          </a:prstGeom>
+          <a:ln w="10160">
+            <a:solidFill>
+              <a:srgbClr val="0A7D6E"/>
+            </a:solidFill>
+          </a:ln>
+          <a:effectLst/>
+        </p:spPr>
+        <p:style>
+          <a:lnRef idx="2">
+            <a:schemeClr val="accent1"/>
+          </a:lnRef>
+          <a:fillRef idx="0">
+            <a:schemeClr val="accent1"/>
+          </a:fillRef>
+          <a:effectRef idx="1">
+            <a:schemeClr val="accent1"/>
+          </a:effectRef>
+          <a:fontRef idx="minor">
+            <a:schemeClr val="tx1"/>
+          </a:fontRef>
+        </p:style>
+      </p:cxnSp>
+      <p:sp>
+        <p:nvSpPr>
+          <p:cNvPr id="69" name="Rectangle 68"/>
+          <p:cNvSpPr/>
+          <p:nvPr/>
+        </p:nvSpPr>
+        <p:spPr>
+          <a:xfrm>
+            <a:off x="4529154" y="3294538"/>
+            <a:ext cx="292608" cy="1"/>
+          </a:xfrm>
+          <a:prstGeom prst="rect">
+            <a:avLst/>
+          </a:prstGeom>
+          <a:noFill/>
+          <a:ln w="10160">
+            <a:solidFill>
+              <a:srgbClr val="0A7D6E"/>
+            </a:solidFill>
+          </a:ln>
+          <a:effectLst/>
+        </p:spPr>
+        <p:style>
+          <a:lnRef idx="1">
+            <a:schemeClr val="accent1"/>
+          </a:lnRef>
+          <a:fillRef idx="3">
+            <a:schemeClr val="accent1"/>
+          </a:fillRef>
+          <a:effectRef idx="2">
+            <a:schemeClr val="accent1"/>
+          </a:effectRef>
+          <a:fontRef idx="minor">
+            <a:schemeClr val="lt1"/>
+          </a:fontRef>
+        </p:style>
+        <p:txBody>
+          <a:bodyPr rtlCol="0" anchor="ctr"/>
+          <a:lstStyle/>
+          <a:p>
+            <a:pPr algn="ctr"/>
+          </a:p>
+        </p:txBody>
+      </p:sp>
+      <p:cxnSp>
+        <p:nvCxnSpPr>
+          <p:cNvPr id="70" name="Connector 69"/>
+          <p:cNvCxnSpPr/>
+          <p:nvPr/>
+        </p:nvCxnSpPr>
+        <p:spPr>
+          <a:xfrm>
             <a:off x="4529154" y="3097850"/>
             <a:ext cx="292608" cy="0"/>
           </a:xfrm>
@@ -8335,14 +7973,14 @@
       </p:cxnSp>
       <p:sp>
         <p:nvSpPr>
-          <p:cNvPr id="69" name="Oval 68"/>
+          <p:cNvPr id="71" name="Oval 70"/>
           <p:cNvSpPr/>
           <p:nvPr/>
         </p:nvSpPr>
         <p:spPr>
           <a:xfrm>
-            <a:off x="4589710" y="2741234"/>
-            <a:ext cx="64008" cy="64008"/>
+            <a:off x="4575994" y="2727518"/>
+            <a:ext cx="91440" cy="91440"/>
           </a:xfrm>
           <a:prstGeom prst="ellipse">
             <a:avLst/>
@@ -8379,14 +8017,14 @@
       </p:sp>
       <p:sp>
         <p:nvSpPr>
-          <p:cNvPr id="70" name="Oval 69"/>
+          <p:cNvPr id="72" name="Oval 71"/>
           <p:cNvSpPr/>
           <p:nvPr/>
         </p:nvSpPr>
         <p:spPr>
           <a:xfrm>
-            <a:off x="4682922" y="2919501"/>
-            <a:ext cx="64008" cy="64008"/>
+            <a:off x="4669206" y="2905785"/>
+            <a:ext cx="91440" cy="91440"/>
           </a:xfrm>
           <a:prstGeom prst="ellipse">
             <a:avLst/>
@@ -8423,14 +8061,14 @@
       </p:sp>
       <p:sp>
         <p:nvSpPr>
-          <p:cNvPr id="71" name="Oval 70"/>
+          <p:cNvPr id="73" name="Oval 72"/>
           <p:cNvSpPr/>
           <p:nvPr/>
         </p:nvSpPr>
         <p:spPr>
           <a:xfrm>
-            <a:off x="4658131" y="3065846"/>
-            <a:ext cx="64008" cy="64008"/>
+            <a:off x="4644415" y="3052130"/>
+            <a:ext cx="91440" cy="91440"/>
           </a:xfrm>
           <a:prstGeom prst="ellipse">
             <a:avLst/>
@@ -8467,14 +8105,14 @@
       </p:sp>
       <p:sp>
         <p:nvSpPr>
-          <p:cNvPr id="72" name="Oval 71"/>
+          <p:cNvPr id="74" name="Oval 73"/>
           <p:cNvSpPr/>
           <p:nvPr/>
         </p:nvSpPr>
         <p:spPr>
           <a:xfrm>
-            <a:off x="4627190" y="3262534"/>
-            <a:ext cx="64008" cy="64008"/>
+            <a:off x="4613474" y="3248818"/>
+            <a:ext cx="91440" cy="91440"/>
           </a:xfrm>
           <a:prstGeom prst="ellipse">
             <a:avLst/>
@@ -8511,14 +8149,14 @@
       </p:sp>
       <p:sp>
         <p:nvSpPr>
-          <p:cNvPr id="73" name="Oval 72"/>
+          <p:cNvPr id="75" name="Oval 74"/>
           <p:cNvSpPr/>
           <p:nvPr/>
         </p:nvSpPr>
         <p:spPr>
           <a:xfrm>
-            <a:off x="4655943" y="3362459"/>
-            <a:ext cx="64008" cy="64008"/>
+            <a:off x="4642227" y="3348743"/>
+            <a:ext cx="91440" cy="91440"/>
           </a:xfrm>
           <a:prstGeom prst="ellipse">
             <a:avLst/>
@@ -8555,7 +8193,7 @@
       </p:sp>
       <p:cxnSp>
         <p:nvCxnSpPr>
-          <p:cNvPr id="74" name="Connector 73"/>
+          <p:cNvPr id="76" name="Connector 75"/>
           <p:cNvCxnSpPr/>
           <p:nvPr/>
         </p:nvCxnSpPr>
@@ -8591,7 +8229,7 @@
       </p:cxnSp>
       <p:cxnSp>
         <p:nvCxnSpPr>
-          <p:cNvPr id="75" name="Connector 74"/>
+          <p:cNvPr id="77" name="Connector 76"/>
           <p:cNvCxnSpPr/>
           <p:nvPr/>
         </p:nvCxnSpPr>
@@ -8625,86 +8263,6 @@
           </a:fontRef>
         </p:style>
       </p:cxnSp>
-      <p:cxnSp>
-        <p:nvCxnSpPr>
-          <p:cNvPr id="76" name="Connector 75"/>
-          <p:cNvCxnSpPr/>
-          <p:nvPr/>
-        </p:nvCxnSpPr>
-        <p:spPr>
-          <a:xfrm>
-            <a:off x="5100784" y="2873154"/>
-            <a:ext cx="146304" cy="0"/>
-          </a:xfrm>
-          <a:prstGeom prst="line">
-            <a:avLst/>
-          </a:prstGeom>
-          <a:ln w="10160">
-            <a:solidFill>
-              <a:srgbClr val="C53E1F"/>
-            </a:solidFill>
-          </a:ln>
-          <a:effectLst/>
-        </p:spPr>
-        <p:style>
-          <a:lnRef idx="2">
-            <a:schemeClr val="accent1"/>
-          </a:lnRef>
-          <a:fillRef idx="0">
-            <a:schemeClr val="accent1"/>
-          </a:fillRef>
-          <a:effectRef idx="1">
-            <a:schemeClr val="accent1"/>
-          </a:effectRef>
-          <a:fontRef idx="minor">
-            <a:schemeClr val="tx1"/>
-          </a:fontRef>
-        </p:style>
-      </p:cxnSp>
-      <p:sp>
-        <p:nvSpPr>
-          <p:cNvPr id="77" name="Rectangle 76"/>
-          <p:cNvSpPr/>
-          <p:nvPr/>
-        </p:nvSpPr>
-        <p:spPr>
-          <a:xfrm>
-            <a:off x="5027632" y="4754588"/>
-            <a:ext cx="292608" cy="1"/>
-          </a:xfrm>
-          <a:prstGeom prst="rect">
-            <a:avLst/>
-          </a:prstGeom>
-          <a:noFill/>
-          <a:ln w="10160">
-            <a:solidFill>
-              <a:srgbClr val="C53E1F"/>
-            </a:solidFill>
-          </a:ln>
-          <a:effectLst/>
-        </p:spPr>
-        <p:style>
-          <a:lnRef idx="1">
-            <a:schemeClr val="accent1"/>
-          </a:lnRef>
-          <a:fillRef idx="3">
-            <a:schemeClr val="accent1"/>
-          </a:fillRef>
-          <a:effectRef idx="2">
-            <a:schemeClr val="accent1"/>
-          </a:effectRef>
-          <a:fontRef idx="minor">
-            <a:schemeClr val="lt1"/>
-          </a:fontRef>
-        </p:style>
-        <p:txBody>
-          <a:bodyPr rtlCol="0" anchor="ctr"/>
-          <a:lstStyle/>
-          <a:p>
-            <a:pPr algn="ctr"/>
-          </a:p>
-        </p:txBody>
-      </p:sp>
       <p:cxnSp>
         <p:nvCxnSpPr>
           <p:cNvPr id="78" name="Connector 77"/>
@@ -8713,6 +8271,86 @@
         </p:nvCxnSpPr>
         <p:spPr>
           <a:xfrm>
+            <a:off x="5100784" y="2873154"/>
+            <a:ext cx="146304" cy="0"/>
+          </a:xfrm>
+          <a:prstGeom prst="line">
+            <a:avLst/>
+          </a:prstGeom>
+          <a:ln w="10160">
+            <a:solidFill>
+              <a:srgbClr val="C53E1F"/>
+            </a:solidFill>
+          </a:ln>
+          <a:effectLst/>
+        </p:spPr>
+        <p:style>
+          <a:lnRef idx="2">
+            <a:schemeClr val="accent1"/>
+          </a:lnRef>
+          <a:fillRef idx="0">
+            <a:schemeClr val="accent1"/>
+          </a:fillRef>
+          <a:effectRef idx="1">
+            <a:schemeClr val="accent1"/>
+          </a:effectRef>
+          <a:fontRef idx="minor">
+            <a:schemeClr val="tx1"/>
+          </a:fontRef>
+        </p:style>
+      </p:cxnSp>
+      <p:sp>
+        <p:nvSpPr>
+          <p:cNvPr id="79" name="Rectangle 78"/>
+          <p:cNvSpPr/>
+          <p:nvPr/>
+        </p:nvSpPr>
+        <p:spPr>
+          <a:xfrm>
+            <a:off x="5027632" y="4754588"/>
+            <a:ext cx="292608" cy="1"/>
+          </a:xfrm>
+          <a:prstGeom prst="rect">
+            <a:avLst/>
+          </a:prstGeom>
+          <a:noFill/>
+          <a:ln w="10160">
+            <a:solidFill>
+              <a:srgbClr val="C53E1F"/>
+            </a:solidFill>
+          </a:ln>
+          <a:effectLst/>
+        </p:spPr>
+        <p:style>
+          <a:lnRef idx="1">
+            <a:schemeClr val="accent1"/>
+          </a:lnRef>
+          <a:fillRef idx="3">
+            <a:schemeClr val="accent1"/>
+          </a:fillRef>
+          <a:effectRef idx="2">
+            <a:schemeClr val="accent1"/>
+          </a:effectRef>
+          <a:fontRef idx="minor">
+            <a:schemeClr val="lt1"/>
+          </a:fontRef>
+        </p:style>
+        <p:txBody>
+          <a:bodyPr rtlCol="0" anchor="ctr"/>
+          <a:lstStyle/>
+          <a:p>
+            <a:pPr algn="ctr"/>
+          </a:p>
+        </p:txBody>
+      </p:sp>
+      <p:cxnSp>
+        <p:nvCxnSpPr>
+          <p:cNvPr id="80" name="Connector 79"/>
+          <p:cNvCxnSpPr/>
+          <p:nvPr/>
+        </p:nvCxnSpPr>
+        <p:spPr>
+          <a:xfrm>
             <a:off x="5027632" y="4309071"/>
             <a:ext cx="292608" cy="0"/>
           </a:xfrm>
@@ -8743,14 +8381,14 @@
       </p:cxnSp>
       <p:sp>
         <p:nvSpPr>
-          <p:cNvPr id="79" name="Oval 78"/>
+          <p:cNvPr id="81" name="Oval 80"/>
           <p:cNvSpPr/>
           <p:nvPr/>
         </p:nvSpPr>
         <p:spPr>
           <a:xfrm>
-            <a:off x="5145500" y="2841150"/>
-            <a:ext cx="64008" cy="64008"/>
+            <a:off x="5131784" y="2827434"/>
+            <a:ext cx="91440" cy="91440"/>
           </a:xfrm>
           <a:prstGeom prst="ellipse">
             <a:avLst/>
@@ -8787,14 +8425,14 @@
       </p:sp>
       <p:sp>
         <p:nvSpPr>
-          <p:cNvPr id="80" name="Oval 79"/>
+          <p:cNvPr id="82" name="Oval 81"/>
           <p:cNvSpPr/>
           <p:nvPr/>
         </p:nvSpPr>
         <p:spPr>
           <a:xfrm>
-            <a:off x="5154589" y="4277067"/>
-            <a:ext cx="64008" cy="64008"/>
+            <a:off x="5140873" y="4263351"/>
+            <a:ext cx="91440" cy="91440"/>
           </a:xfrm>
           <a:prstGeom prst="ellipse">
             <a:avLst/>
@@ -8831,14 +8469,14 @@
       </p:sp>
       <p:sp>
         <p:nvSpPr>
-          <p:cNvPr id="81" name="Oval 80"/>
+          <p:cNvPr id="83" name="Oval 82"/>
           <p:cNvSpPr/>
           <p:nvPr/>
         </p:nvSpPr>
         <p:spPr>
           <a:xfrm>
-            <a:off x="5107943" y="5168100"/>
-            <a:ext cx="64008" cy="64008"/>
+            <a:off x="5094227" y="5154384"/>
+            <a:ext cx="91440" cy="91440"/>
           </a:xfrm>
           <a:prstGeom prst="ellipse">
             <a:avLst/>
@@ -8875,7 +8513,7 @@
       </p:sp>
       <p:sp>
         <p:nvSpPr>
-          <p:cNvPr id="82" name="TextBox 81"/>
+          <p:cNvPr id="84" name="TextBox 83"/>
           <p:cNvSpPr txBox="1"/>
           <p:nvPr/>
         </p:nvSpPr>
@@ -8911,7 +8549,7 @@
       </p:sp>
       <p:sp>
         <p:nvSpPr>
-          <p:cNvPr id="83" name="TextBox 82"/>
+          <p:cNvPr id="85" name="TextBox 84"/>
           <p:cNvSpPr txBox="1"/>
           <p:nvPr/>
         </p:nvSpPr>
@@ -8947,7 +8585,51 @@
       </p:sp>
       <p:sp>
         <p:nvSpPr>
-          <p:cNvPr id="84" name="TextBox 83"/>
+          <p:cNvPr id="86" name="Rectangle 85"/>
+          <p:cNvSpPr/>
+          <p:nvPr/>
+        </p:nvSpPr>
+        <p:spPr>
+          <a:xfrm>
+            <a:off x="5686262" y="3410162"/>
+            <a:ext cx="1246197" cy="2624878"/>
+          </a:xfrm>
+          <a:prstGeom prst="rect">
+            <a:avLst/>
+          </a:prstGeom>
+          <a:solidFill>
+            <a:srgbClr val="ECF5F1"/>
+          </a:solidFill>
+          <a:ln>
+            <a:noFill/>
+          </a:ln>
+          <a:effectLst/>
+        </p:spPr>
+        <p:style>
+          <a:lnRef idx="1">
+            <a:schemeClr val="accent1"/>
+          </a:lnRef>
+          <a:fillRef idx="3">
+            <a:schemeClr val="accent1"/>
+          </a:fillRef>
+          <a:effectRef idx="2">
+            <a:schemeClr val="accent1"/>
+          </a:effectRef>
+          <a:fontRef idx="minor">
+            <a:schemeClr val="lt1"/>
+          </a:fontRef>
+        </p:style>
+        <p:txBody>
+          <a:bodyPr rtlCol="0" anchor="ctr"/>
+          <a:lstStyle/>
+          <a:p>
+            <a:pPr algn="ctr"/>
+          </a:p>
+        </p:txBody>
+      </p:sp>
+      <p:sp>
+        <p:nvSpPr>
+          <p:cNvPr id="87" name="TextBox 86"/>
           <p:cNvSpPr txBox="1"/>
           <p:nvPr/>
         </p:nvSpPr>
@@ -8983,7 +8665,7 @@
       </p:sp>
       <p:cxnSp>
         <p:nvCxnSpPr>
-          <p:cNvPr id="85" name="Connector 84"/>
+          <p:cNvPr id="88" name="Connector 87"/>
           <p:cNvCxnSpPr/>
           <p:nvPr/>
         </p:nvCxnSpPr>
@@ -9017,122 +8699,6 @@
           </a:fontRef>
         </p:style>
       </p:cxnSp>
-      <p:cxnSp>
-        <p:nvCxnSpPr>
-          <p:cNvPr id="86" name="Connector 85"/>
-          <p:cNvCxnSpPr/>
-          <p:nvPr/>
-        </p:nvCxnSpPr>
-        <p:spPr>
-          <a:xfrm>
-            <a:off x="5986969" y="3572356"/>
-            <a:ext cx="146304" cy="0"/>
-          </a:xfrm>
-          <a:prstGeom prst="line">
-            <a:avLst/>
-          </a:prstGeom>
-          <a:ln w="10160">
-            <a:solidFill>
-              <a:srgbClr val="0A7D6E"/>
-            </a:solidFill>
-          </a:ln>
-          <a:effectLst/>
-        </p:spPr>
-        <p:style>
-          <a:lnRef idx="2">
-            <a:schemeClr val="accent1"/>
-          </a:lnRef>
-          <a:fillRef idx="0">
-            <a:schemeClr val="accent1"/>
-          </a:fillRef>
-          <a:effectRef idx="1">
-            <a:schemeClr val="accent1"/>
-          </a:effectRef>
-          <a:fontRef idx="minor">
-            <a:schemeClr val="tx1"/>
-          </a:fontRef>
-        </p:style>
-      </p:cxnSp>
-      <p:cxnSp>
-        <p:nvCxnSpPr>
-          <p:cNvPr id="87" name="Connector 86"/>
-          <p:cNvCxnSpPr/>
-          <p:nvPr/>
-        </p:nvCxnSpPr>
-        <p:spPr>
-          <a:xfrm>
-            <a:off x="5986969" y="3161371"/>
-            <a:ext cx="146304" cy="0"/>
-          </a:xfrm>
-          <a:prstGeom prst="line">
-            <a:avLst/>
-          </a:prstGeom>
-          <a:ln w="10160">
-            <a:solidFill>
-              <a:srgbClr val="0A7D6E"/>
-            </a:solidFill>
-          </a:ln>
-          <a:effectLst/>
-        </p:spPr>
-        <p:style>
-          <a:lnRef idx="2">
-            <a:schemeClr val="accent1"/>
-          </a:lnRef>
-          <a:fillRef idx="0">
-            <a:schemeClr val="accent1"/>
-          </a:fillRef>
-          <a:effectRef idx="1">
-            <a:schemeClr val="accent1"/>
-          </a:effectRef>
-          <a:fontRef idx="minor">
-            <a:schemeClr val="tx1"/>
-          </a:fontRef>
-        </p:style>
-      </p:cxnSp>
-      <p:sp>
-        <p:nvSpPr>
-          <p:cNvPr id="88" name="Rectangle 87"/>
-          <p:cNvSpPr/>
-          <p:nvPr/>
-        </p:nvSpPr>
-        <p:spPr>
-          <a:xfrm>
-            <a:off x="5913817" y="3549304"/>
-            <a:ext cx="292608" cy="1"/>
-          </a:xfrm>
-          <a:prstGeom prst="rect">
-            <a:avLst/>
-          </a:prstGeom>
-          <a:noFill/>
-          <a:ln w="10160">
-            <a:solidFill>
-              <a:srgbClr val="0A7D6E"/>
-            </a:solidFill>
-          </a:ln>
-          <a:effectLst/>
-        </p:spPr>
-        <p:style>
-          <a:lnRef idx="1">
-            <a:schemeClr val="accent1"/>
-          </a:lnRef>
-          <a:fillRef idx="3">
-            <a:schemeClr val="accent1"/>
-          </a:fillRef>
-          <a:effectRef idx="2">
-            <a:schemeClr val="accent1"/>
-          </a:effectRef>
-          <a:fontRef idx="minor">
-            <a:schemeClr val="lt1"/>
-          </a:fontRef>
-        </p:style>
-        <p:txBody>
-          <a:bodyPr rtlCol="0" anchor="ctr"/>
-          <a:lstStyle/>
-          <a:p>
-            <a:pPr algn="ctr"/>
-          </a:p>
-        </p:txBody>
-      </p:sp>
       <p:cxnSp>
         <p:nvCxnSpPr>
           <p:cNvPr id="89" name="Connector 88"/>
@@ -9141,6 +8707,122 @@
         </p:nvCxnSpPr>
         <p:spPr>
           <a:xfrm>
+            <a:off x="5986969" y="3572356"/>
+            <a:ext cx="146304" cy="0"/>
+          </a:xfrm>
+          <a:prstGeom prst="line">
+            <a:avLst/>
+          </a:prstGeom>
+          <a:ln w="10160">
+            <a:solidFill>
+              <a:srgbClr val="0A7D6E"/>
+            </a:solidFill>
+          </a:ln>
+          <a:effectLst/>
+        </p:spPr>
+        <p:style>
+          <a:lnRef idx="2">
+            <a:schemeClr val="accent1"/>
+          </a:lnRef>
+          <a:fillRef idx="0">
+            <a:schemeClr val="accent1"/>
+          </a:fillRef>
+          <a:effectRef idx="1">
+            <a:schemeClr val="accent1"/>
+          </a:effectRef>
+          <a:fontRef idx="minor">
+            <a:schemeClr val="tx1"/>
+          </a:fontRef>
+        </p:style>
+      </p:cxnSp>
+      <p:cxnSp>
+        <p:nvCxnSpPr>
+          <p:cNvPr id="90" name="Connector 89"/>
+          <p:cNvCxnSpPr/>
+          <p:nvPr/>
+        </p:nvCxnSpPr>
+        <p:spPr>
+          <a:xfrm>
+            <a:off x="5986969" y="3161371"/>
+            <a:ext cx="146304" cy="0"/>
+          </a:xfrm>
+          <a:prstGeom prst="line">
+            <a:avLst/>
+          </a:prstGeom>
+          <a:ln w="10160">
+            <a:solidFill>
+              <a:srgbClr val="0A7D6E"/>
+            </a:solidFill>
+          </a:ln>
+          <a:effectLst/>
+        </p:spPr>
+        <p:style>
+          <a:lnRef idx="2">
+            <a:schemeClr val="accent1"/>
+          </a:lnRef>
+          <a:fillRef idx="0">
+            <a:schemeClr val="accent1"/>
+          </a:fillRef>
+          <a:effectRef idx="1">
+            <a:schemeClr val="accent1"/>
+          </a:effectRef>
+          <a:fontRef idx="minor">
+            <a:schemeClr val="tx1"/>
+          </a:fontRef>
+        </p:style>
+      </p:cxnSp>
+      <p:sp>
+        <p:nvSpPr>
+          <p:cNvPr id="91" name="Rectangle 90"/>
+          <p:cNvSpPr/>
+          <p:nvPr/>
+        </p:nvSpPr>
+        <p:spPr>
+          <a:xfrm>
+            <a:off x="5913817" y="3549304"/>
+            <a:ext cx="292608" cy="1"/>
+          </a:xfrm>
+          <a:prstGeom prst="rect">
+            <a:avLst/>
+          </a:prstGeom>
+          <a:noFill/>
+          <a:ln w="10160">
+            <a:solidFill>
+              <a:srgbClr val="0A7D6E"/>
+            </a:solidFill>
+          </a:ln>
+          <a:effectLst/>
+        </p:spPr>
+        <p:style>
+          <a:lnRef idx="1">
+            <a:schemeClr val="accent1"/>
+          </a:lnRef>
+          <a:fillRef idx="3">
+            <a:schemeClr val="accent1"/>
+          </a:fillRef>
+          <a:effectRef idx="2">
+            <a:schemeClr val="accent1"/>
+          </a:effectRef>
+          <a:fontRef idx="minor">
+            <a:schemeClr val="lt1"/>
+          </a:fontRef>
+        </p:style>
+        <p:txBody>
+          <a:bodyPr rtlCol="0" anchor="ctr"/>
+          <a:lstStyle/>
+          <a:p>
+            <a:pPr algn="ctr"/>
+          </a:p>
+        </p:txBody>
+      </p:sp>
+      <p:cxnSp>
+        <p:nvCxnSpPr>
+          <p:cNvPr id="92" name="Connector 91"/>
+          <p:cNvCxnSpPr/>
+          <p:nvPr/>
+        </p:nvCxnSpPr>
+        <p:spPr>
+          <a:xfrm>
             <a:off x="5913817" y="3409019"/>
             <a:ext cx="292608" cy="0"/>
           </a:xfrm>
@@ -9171,14 +8853,14 @@
       </p:cxnSp>
       <p:sp>
         <p:nvSpPr>
-          <p:cNvPr id="90" name="Oval 89"/>
+          <p:cNvPr id="93" name="Oval 92"/>
           <p:cNvSpPr/>
           <p:nvPr/>
         </p:nvSpPr>
         <p:spPr>
           <a:xfrm>
-            <a:off x="6003761" y="3129367"/>
-            <a:ext cx="64008" cy="64008"/>
+            <a:off x="5990045" y="3115651"/>
+            <a:ext cx="91440" cy="91440"/>
           </a:xfrm>
           <a:prstGeom prst="ellipse">
             <a:avLst/>
@@ -9215,14 +8897,14 @@
       </p:sp>
       <p:sp>
         <p:nvSpPr>
-          <p:cNvPr id="91" name="Oval 90"/>
+          <p:cNvPr id="94" name="Oval 93"/>
           <p:cNvSpPr/>
           <p:nvPr/>
         </p:nvSpPr>
         <p:spPr>
           <a:xfrm>
-            <a:off x="6024608" y="3251271"/>
-            <a:ext cx="64008" cy="64008"/>
+            <a:off x="6010892" y="3237555"/>
+            <a:ext cx="91440" cy="91440"/>
           </a:xfrm>
           <a:prstGeom prst="ellipse">
             <a:avLst/>
@@ -9259,14 +8941,14 @@
       </p:sp>
       <p:sp>
         <p:nvSpPr>
-          <p:cNvPr id="92" name="Oval 91"/>
+          <p:cNvPr id="95" name="Oval 94"/>
           <p:cNvSpPr/>
           <p:nvPr/>
         </p:nvSpPr>
         <p:spPr>
           <a:xfrm>
-            <a:off x="5972261" y="3377015"/>
-            <a:ext cx="64008" cy="64008"/>
+            <a:off x="5958545" y="3363299"/>
+            <a:ext cx="91440" cy="91440"/>
           </a:xfrm>
           <a:prstGeom prst="ellipse">
             <a:avLst/>
@@ -9303,14 +8985,14 @@
       </p:sp>
       <p:sp>
         <p:nvSpPr>
-          <p:cNvPr id="93" name="Oval 92"/>
+          <p:cNvPr id="96" name="Oval 95"/>
           <p:cNvSpPr/>
           <p:nvPr/>
         </p:nvSpPr>
         <p:spPr>
           <a:xfrm>
-            <a:off x="6065458" y="3517300"/>
-            <a:ext cx="64008" cy="64008"/>
+            <a:off x="6051742" y="3503584"/>
+            <a:ext cx="91440" cy="91440"/>
           </a:xfrm>
           <a:prstGeom prst="ellipse">
             <a:avLst/>
@@ -9347,14 +9029,14 @@
       </p:sp>
       <p:sp>
         <p:nvSpPr>
-          <p:cNvPr id="94" name="Oval 93"/>
+          <p:cNvPr id="97" name="Oval 96"/>
           <p:cNvSpPr/>
           <p:nvPr/>
         </p:nvSpPr>
         <p:spPr>
           <a:xfrm>
-            <a:off x="6071652" y="3540352"/>
-            <a:ext cx="64008" cy="64008"/>
+            <a:off x="6057936" y="3526636"/>
+            <a:ext cx="91440" cy="91440"/>
           </a:xfrm>
           <a:prstGeom prst="ellipse">
             <a:avLst/>
@@ -9391,7 +9073,7 @@
       </p:sp>
       <p:cxnSp>
         <p:nvCxnSpPr>
-          <p:cNvPr id="95" name="Connector 94"/>
+          <p:cNvPr id="98" name="Connector 97"/>
           <p:cNvCxnSpPr/>
           <p:nvPr/>
         </p:nvCxnSpPr>
@@ -9425,122 +9107,6 @@
           </a:fontRef>
         </p:style>
       </p:cxnSp>
-      <p:cxnSp>
-        <p:nvCxnSpPr>
-          <p:cNvPr id="96" name="Connector 95"/>
-          <p:cNvCxnSpPr/>
-          <p:nvPr/>
-        </p:nvCxnSpPr>
-        <p:spPr>
-          <a:xfrm>
-            <a:off x="6485447" y="3451146"/>
-            <a:ext cx="146304" cy="0"/>
-          </a:xfrm>
-          <a:prstGeom prst="line">
-            <a:avLst/>
-          </a:prstGeom>
-          <a:ln w="10160">
-            <a:solidFill>
-              <a:srgbClr val="C53E1F"/>
-            </a:solidFill>
-          </a:ln>
-          <a:effectLst/>
-        </p:spPr>
-        <p:style>
-          <a:lnRef idx="2">
-            <a:schemeClr val="accent1"/>
-          </a:lnRef>
-          <a:fillRef idx="0">
-            <a:schemeClr val="accent1"/>
-          </a:fillRef>
-          <a:effectRef idx="1">
-            <a:schemeClr val="accent1"/>
-          </a:effectRef>
-          <a:fontRef idx="minor">
-            <a:schemeClr val="tx1"/>
-          </a:fontRef>
-        </p:style>
-      </p:cxnSp>
-      <p:cxnSp>
-        <p:nvCxnSpPr>
-          <p:cNvPr id="97" name="Connector 96"/>
-          <p:cNvCxnSpPr/>
-          <p:nvPr/>
-        </p:nvCxnSpPr>
-        <p:spPr>
-          <a:xfrm>
-            <a:off x="6485447" y="3299857"/>
-            <a:ext cx="146304" cy="0"/>
-          </a:xfrm>
-          <a:prstGeom prst="line">
-            <a:avLst/>
-          </a:prstGeom>
-          <a:ln w="10160">
-            <a:solidFill>
-              <a:srgbClr val="C53E1F"/>
-            </a:solidFill>
-          </a:ln>
-          <a:effectLst/>
-        </p:spPr>
-        <p:style>
-          <a:lnRef idx="2">
-            <a:schemeClr val="accent1"/>
-          </a:lnRef>
-          <a:fillRef idx="0">
-            <a:schemeClr val="accent1"/>
-          </a:fillRef>
-          <a:effectRef idx="1">
-            <a:schemeClr val="accent1"/>
-          </a:effectRef>
-          <a:fontRef idx="minor">
-            <a:schemeClr val="tx1"/>
-          </a:fontRef>
-        </p:style>
-      </p:cxnSp>
-      <p:sp>
-        <p:nvSpPr>
-          <p:cNvPr id="98" name="Rectangle 97"/>
-          <p:cNvSpPr/>
-          <p:nvPr/>
-        </p:nvSpPr>
-        <p:spPr>
-          <a:xfrm>
-            <a:off x="6412295" y="3413201"/>
-            <a:ext cx="292608" cy="1"/>
-          </a:xfrm>
-          <a:prstGeom prst="rect">
-            <a:avLst/>
-          </a:prstGeom>
-          <a:noFill/>
-          <a:ln w="10160">
-            <a:solidFill>
-              <a:srgbClr val="C53E1F"/>
-            </a:solidFill>
-          </a:ln>
-          <a:effectLst/>
-        </p:spPr>
-        <p:style>
-          <a:lnRef idx="1">
-            <a:schemeClr val="accent1"/>
-          </a:lnRef>
-          <a:fillRef idx="3">
-            <a:schemeClr val="accent1"/>
-          </a:fillRef>
-          <a:effectRef idx="2">
-            <a:schemeClr val="accent1"/>
-          </a:effectRef>
-          <a:fontRef idx="minor">
-            <a:schemeClr val="lt1"/>
-          </a:fontRef>
-        </p:style>
-        <p:txBody>
-          <a:bodyPr rtlCol="0" anchor="ctr"/>
-          <a:lstStyle/>
-          <a:p>
-            <a:pPr algn="ctr"/>
-          </a:p>
-        </p:txBody>
-      </p:sp>
       <p:cxnSp>
         <p:nvCxnSpPr>
           <p:cNvPr id="99" name="Connector 98"/>
@@ -9549,6 +9115,122 @@
         </p:nvCxnSpPr>
         <p:spPr>
           <a:xfrm>
+            <a:off x="6485447" y="3451146"/>
+            <a:ext cx="146304" cy="0"/>
+          </a:xfrm>
+          <a:prstGeom prst="line">
+            <a:avLst/>
+          </a:prstGeom>
+          <a:ln w="10160">
+            <a:solidFill>
+              <a:srgbClr val="C53E1F"/>
+            </a:solidFill>
+          </a:ln>
+          <a:effectLst/>
+        </p:spPr>
+        <p:style>
+          <a:lnRef idx="2">
+            <a:schemeClr val="accent1"/>
+          </a:lnRef>
+          <a:fillRef idx="0">
+            <a:schemeClr val="accent1"/>
+          </a:fillRef>
+          <a:effectRef idx="1">
+            <a:schemeClr val="accent1"/>
+          </a:effectRef>
+          <a:fontRef idx="minor">
+            <a:schemeClr val="tx1"/>
+          </a:fontRef>
+        </p:style>
+      </p:cxnSp>
+      <p:cxnSp>
+        <p:nvCxnSpPr>
+          <p:cNvPr id="100" name="Connector 99"/>
+          <p:cNvCxnSpPr/>
+          <p:nvPr/>
+        </p:nvCxnSpPr>
+        <p:spPr>
+          <a:xfrm>
+            <a:off x="6485447" y="3299857"/>
+            <a:ext cx="146304" cy="0"/>
+          </a:xfrm>
+          <a:prstGeom prst="line">
+            <a:avLst/>
+          </a:prstGeom>
+          <a:ln w="10160">
+            <a:solidFill>
+              <a:srgbClr val="C53E1F"/>
+            </a:solidFill>
+          </a:ln>
+          <a:effectLst/>
+        </p:spPr>
+        <p:style>
+          <a:lnRef idx="2">
+            <a:schemeClr val="accent1"/>
+          </a:lnRef>
+          <a:fillRef idx="0">
+            <a:schemeClr val="accent1"/>
+          </a:fillRef>
+          <a:effectRef idx="1">
+            <a:schemeClr val="accent1"/>
+          </a:effectRef>
+          <a:fontRef idx="minor">
+            <a:schemeClr val="tx1"/>
+          </a:fontRef>
+        </p:style>
+      </p:cxnSp>
+      <p:sp>
+        <p:nvSpPr>
+          <p:cNvPr id="101" name="Rectangle 100"/>
+          <p:cNvSpPr/>
+          <p:nvPr/>
+        </p:nvSpPr>
+        <p:spPr>
+          <a:xfrm>
+            <a:off x="6412295" y="3413201"/>
+            <a:ext cx="292608" cy="1"/>
+          </a:xfrm>
+          <a:prstGeom prst="rect">
+            <a:avLst/>
+          </a:prstGeom>
+          <a:noFill/>
+          <a:ln w="10160">
+            <a:solidFill>
+              <a:srgbClr val="C53E1F"/>
+            </a:solidFill>
+          </a:ln>
+          <a:effectLst/>
+        </p:spPr>
+        <p:style>
+          <a:lnRef idx="1">
+            <a:schemeClr val="accent1"/>
+          </a:lnRef>
+          <a:fillRef idx="3">
+            <a:schemeClr val="accent1"/>
+          </a:fillRef>
+          <a:effectRef idx="2">
+            <a:schemeClr val="accent1"/>
+          </a:effectRef>
+          <a:fontRef idx="minor">
+            <a:schemeClr val="lt1"/>
+          </a:fontRef>
+        </p:style>
+        <p:txBody>
+          <a:bodyPr rtlCol="0" anchor="ctr"/>
+          <a:lstStyle/>
+          <a:p>
+            <a:pPr algn="ctr"/>
+          </a:p>
+        </p:txBody>
+      </p:sp>
+      <p:cxnSp>
+        <p:nvCxnSpPr>
+          <p:cNvPr id="102" name="Connector 101"/>
+          <p:cNvCxnSpPr/>
+          <p:nvPr/>
+        </p:nvCxnSpPr>
+        <p:spPr>
+          <a:xfrm>
             <a:off x="6412295" y="3375256"/>
             <a:ext cx="292608" cy="0"/>
           </a:xfrm>
@@ -9579,14 +9261,14 @@
       </p:cxnSp>
       <p:sp>
         <p:nvSpPr>
-          <p:cNvPr id="100" name="Oval 99"/>
+          <p:cNvPr id="103" name="Oval 102"/>
           <p:cNvSpPr/>
           <p:nvPr/>
         </p:nvSpPr>
         <p:spPr>
           <a:xfrm>
-            <a:off x="6465384" y="3267853"/>
-            <a:ext cx="64008" cy="64008"/>
+            <a:off x="6451668" y="3254137"/>
+            <a:ext cx="91440" cy="91440"/>
           </a:xfrm>
           <a:prstGeom prst="ellipse">
             <a:avLst/>
@@ -9623,14 +9305,14 @@
       </p:sp>
       <p:sp>
         <p:nvSpPr>
-          <p:cNvPr id="101" name="Oval 100"/>
+          <p:cNvPr id="104" name="Oval 103"/>
           <p:cNvSpPr/>
           <p:nvPr/>
         </p:nvSpPr>
         <p:spPr>
           <a:xfrm>
-            <a:off x="6583956" y="3343252"/>
-            <a:ext cx="64008" cy="64008"/>
+            <a:off x="6570240" y="3329536"/>
+            <a:ext cx="91440" cy="91440"/>
           </a:xfrm>
           <a:prstGeom prst="ellipse">
             <a:avLst/>
@@ -9667,14 +9349,14 @@
       </p:sp>
       <p:sp>
         <p:nvSpPr>
-          <p:cNvPr id="102" name="Oval 101"/>
+          <p:cNvPr id="105" name="Oval 104"/>
           <p:cNvSpPr/>
           <p:nvPr/>
         </p:nvSpPr>
         <p:spPr>
           <a:xfrm>
-            <a:off x="6539458" y="3419142"/>
-            <a:ext cx="64008" cy="64008"/>
+            <a:off x="6525742" y="3405426"/>
+            <a:ext cx="91440" cy="91440"/>
           </a:xfrm>
           <a:prstGeom prst="ellipse">
             <a:avLst/>
@@ -9711,7 +9393,7 @@
       </p:sp>
       <p:sp>
         <p:nvSpPr>
-          <p:cNvPr id="103" name="TextBox 102"/>
+          <p:cNvPr id="106" name="TextBox 105"/>
           <p:cNvSpPr txBox="1"/>
           <p:nvPr/>
         </p:nvSpPr>
@@ -9747,7 +9429,7 @@
       </p:sp>
       <p:sp>
         <p:nvSpPr>
-          <p:cNvPr id="104" name="TextBox 103"/>
+          <p:cNvPr id="107" name="TextBox 106"/>
           <p:cNvSpPr txBox="1"/>
           <p:nvPr/>
         </p:nvSpPr>
@@ -9783,7 +9465,51 @@
       </p:sp>
       <p:sp>
         <p:nvSpPr>
-          <p:cNvPr id="105" name="TextBox 104"/>
+          <p:cNvPr id="108" name="Rectangle 107"/>
+          <p:cNvSpPr/>
+          <p:nvPr/>
+        </p:nvSpPr>
+        <p:spPr>
+          <a:xfrm>
+            <a:off x="7070925" y="1188720"/>
+            <a:ext cx="1246197" cy="2221442"/>
+          </a:xfrm>
+          <a:prstGeom prst="rect">
+            <a:avLst/>
+          </a:prstGeom>
+          <a:solidFill>
+            <a:srgbClr val="ECF5F1"/>
+          </a:solidFill>
+          <a:ln>
+            <a:noFill/>
+          </a:ln>
+          <a:effectLst/>
+        </p:spPr>
+        <p:style>
+          <a:lnRef idx="1">
+            <a:schemeClr val="accent1"/>
+          </a:lnRef>
+          <a:fillRef idx="3">
+            <a:schemeClr val="accent1"/>
+          </a:fillRef>
+          <a:effectRef idx="2">
+            <a:schemeClr val="accent1"/>
+          </a:effectRef>
+          <a:fontRef idx="minor">
+            <a:schemeClr val="lt1"/>
+          </a:fontRef>
+        </p:style>
+        <p:txBody>
+          <a:bodyPr rtlCol="0" anchor="ctr"/>
+          <a:lstStyle/>
+          <a:p>
+            <a:pPr algn="ctr"/>
+          </a:p>
+        </p:txBody>
+      </p:sp>
+      <p:sp>
+        <p:nvSpPr>
+          <p:cNvPr id="109" name="TextBox 108"/>
           <p:cNvSpPr txBox="1"/>
           <p:nvPr/>
         </p:nvSpPr>
@@ -9818,45 +9544,9 @@
           </a:p>
         </p:txBody>
       </p:sp>
-      <p:sp>
-        <p:nvSpPr>
-          <p:cNvPr id="106" name="TextBox 105"/>
-          <p:cNvSpPr txBox="1"/>
-          <p:nvPr/>
-        </p:nvSpPr>
-        <p:spPr>
-          <a:xfrm>
-            <a:off x="7001691" y="868680"/>
-            <a:ext cx="4153989" cy="256032"/>
-          </a:xfrm>
-          <a:prstGeom prst="rect">
-            <a:avLst/>
-          </a:prstGeom>
-          <a:noFill/>
-          <a:effectLst/>
-        </p:spPr>
-        <p:txBody>
-          <a:bodyPr wrap="square" lIns="0" rIns="0" tIns="0" bIns="0" anchor="ctr">
-            <a:spAutoFit/>
-          </a:bodyPr>
-          <a:lstStyle/>
-          <a:p>
-            <a:pPr algn="ctr"/>
-            <a:r>
-              <a:rPr sz="900" b="1" i="0">
-                <a:solidFill>
-                  <a:srgbClr val="8A2B4C"/>
-                </a:solidFill>
-                <a:latin typeface="Arial"/>
-              </a:rPr>
-              <a:t>Thread 2 (immune)</a:t>
-            </a:r>
-          </a:p>
-        </p:txBody>
-      </p:sp>
       <p:cxnSp>
         <p:nvCxnSpPr>
-          <p:cNvPr id="107" name="Connector 106"/>
+          <p:cNvPr id="110" name="Connector 109"/>
           <p:cNvCxnSpPr/>
           <p:nvPr/>
         </p:nvCxnSpPr>
@@ -9890,122 +9580,6 @@
           </a:fontRef>
         </p:style>
       </p:cxnSp>
-      <p:cxnSp>
-        <p:nvCxnSpPr>
-          <p:cNvPr id="108" name="Connector 107"/>
-          <p:cNvCxnSpPr/>
-          <p:nvPr/>
-        </p:nvCxnSpPr>
-        <p:spPr>
-          <a:xfrm>
-            <a:off x="7371632" y="3637501"/>
-            <a:ext cx="146304" cy="0"/>
-          </a:xfrm>
-          <a:prstGeom prst="line">
-            <a:avLst/>
-          </a:prstGeom>
-          <a:ln w="10160">
-            <a:solidFill>
-              <a:srgbClr val="0A7D6E"/>
-            </a:solidFill>
-          </a:ln>
-          <a:effectLst/>
-        </p:spPr>
-        <p:style>
-          <a:lnRef idx="2">
-            <a:schemeClr val="accent1"/>
-          </a:lnRef>
-          <a:fillRef idx="0">
-            <a:schemeClr val="accent1"/>
-          </a:fillRef>
-          <a:effectRef idx="1">
-            <a:schemeClr val="accent1"/>
-          </a:effectRef>
-          <a:fontRef idx="minor">
-            <a:schemeClr val="tx1"/>
-          </a:fontRef>
-        </p:style>
-      </p:cxnSp>
-      <p:cxnSp>
-        <p:nvCxnSpPr>
-          <p:cNvPr id="109" name="Connector 108"/>
-          <p:cNvCxnSpPr/>
-          <p:nvPr/>
-        </p:nvCxnSpPr>
-        <p:spPr>
-          <a:xfrm>
-            <a:off x="7371632" y="3069005"/>
-            <a:ext cx="146304" cy="0"/>
-          </a:xfrm>
-          <a:prstGeom prst="line">
-            <a:avLst/>
-          </a:prstGeom>
-          <a:ln w="10160">
-            <a:solidFill>
-              <a:srgbClr val="0A7D6E"/>
-            </a:solidFill>
-          </a:ln>
-          <a:effectLst/>
-        </p:spPr>
-        <p:style>
-          <a:lnRef idx="2">
-            <a:schemeClr val="accent1"/>
-          </a:lnRef>
-          <a:fillRef idx="0">
-            <a:schemeClr val="accent1"/>
-          </a:fillRef>
-          <a:effectRef idx="1">
-            <a:schemeClr val="accent1"/>
-          </a:effectRef>
-          <a:fontRef idx="minor">
-            <a:schemeClr val="tx1"/>
-          </a:fontRef>
-        </p:style>
-      </p:cxnSp>
-      <p:sp>
-        <p:nvSpPr>
-          <p:cNvPr id="110" name="Rectangle 109"/>
-          <p:cNvSpPr/>
-          <p:nvPr/>
-        </p:nvSpPr>
-        <p:spPr>
-          <a:xfrm>
-            <a:off x="7298480" y="3508592"/>
-            <a:ext cx="292608" cy="1"/>
-          </a:xfrm>
-          <a:prstGeom prst="rect">
-            <a:avLst/>
-          </a:prstGeom>
-          <a:noFill/>
-          <a:ln w="10160">
-            <a:solidFill>
-              <a:srgbClr val="0A7D6E"/>
-            </a:solidFill>
-          </a:ln>
-          <a:effectLst/>
-        </p:spPr>
-        <p:style>
-          <a:lnRef idx="1">
-            <a:schemeClr val="accent1"/>
-          </a:lnRef>
-          <a:fillRef idx="3">
-            <a:schemeClr val="accent1"/>
-          </a:fillRef>
-          <a:effectRef idx="2">
-            <a:schemeClr val="accent1"/>
-          </a:effectRef>
-          <a:fontRef idx="minor">
-            <a:schemeClr val="lt1"/>
-          </a:fontRef>
-        </p:style>
-        <p:txBody>
-          <a:bodyPr rtlCol="0" anchor="ctr"/>
-          <a:lstStyle/>
-          <a:p>
-            <a:pPr algn="ctr"/>
-          </a:p>
-        </p:txBody>
-      </p:sp>
       <p:cxnSp>
         <p:nvCxnSpPr>
           <p:cNvPr id="111" name="Connector 110"/>
@@ -10014,6 +9588,122 @@
         </p:nvCxnSpPr>
         <p:spPr>
           <a:xfrm>
+            <a:off x="7371632" y="3637501"/>
+            <a:ext cx="146304" cy="0"/>
+          </a:xfrm>
+          <a:prstGeom prst="line">
+            <a:avLst/>
+          </a:prstGeom>
+          <a:ln w="10160">
+            <a:solidFill>
+              <a:srgbClr val="0A7D6E"/>
+            </a:solidFill>
+          </a:ln>
+          <a:effectLst/>
+        </p:spPr>
+        <p:style>
+          <a:lnRef idx="2">
+            <a:schemeClr val="accent1"/>
+          </a:lnRef>
+          <a:fillRef idx="0">
+            <a:schemeClr val="accent1"/>
+          </a:fillRef>
+          <a:effectRef idx="1">
+            <a:schemeClr val="accent1"/>
+          </a:effectRef>
+          <a:fontRef idx="minor">
+            <a:schemeClr val="tx1"/>
+          </a:fontRef>
+        </p:style>
+      </p:cxnSp>
+      <p:cxnSp>
+        <p:nvCxnSpPr>
+          <p:cNvPr id="112" name="Connector 111"/>
+          <p:cNvCxnSpPr/>
+          <p:nvPr/>
+        </p:nvCxnSpPr>
+        <p:spPr>
+          <a:xfrm>
+            <a:off x="7371632" y="3069005"/>
+            <a:ext cx="146304" cy="0"/>
+          </a:xfrm>
+          <a:prstGeom prst="line">
+            <a:avLst/>
+          </a:prstGeom>
+          <a:ln w="10160">
+            <a:solidFill>
+              <a:srgbClr val="0A7D6E"/>
+            </a:solidFill>
+          </a:ln>
+          <a:effectLst/>
+        </p:spPr>
+        <p:style>
+          <a:lnRef idx="2">
+            <a:schemeClr val="accent1"/>
+          </a:lnRef>
+          <a:fillRef idx="0">
+            <a:schemeClr val="accent1"/>
+          </a:fillRef>
+          <a:effectRef idx="1">
+            <a:schemeClr val="accent1"/>
+          </a:effectRef>
+          <a:fontRef idx="minor">
+            <a:schemeClr val="tx1"/>
+          </a:fontRef>
+        </p:style>
+      </p:cxnSp>
+      <p:sp>
+        <p:nvSpPr>
+          <p:cNvPr id="113" name="Rectangle 112"/>
+          <p:cNvSpPr/>
+          <p:nvPr/>
+        </p:nvSpPr>
+        <p:spPr>
+          <a:xfrm>
+            <a:off x="7298480" y="3508592"/>
+            <a:ext cx="292608" cy="1"/>
+          </a:xfrm>
+          <a:prstGeom prst="rect">
+            <a:avLst/>
+          </a:prstGeom>
+          <a:noFill/>
+          <a:ln w="10160">
+            <a:solidFill>
+              <a:srgbClr val="0A7D6E"/>
+            </a:solidFill>
+          </a:ln>
+          <a:effectLst/>
+        </p:spPr>
+        <p:style>
+          <a:lnRef idx="1">
+            <a:schemeClr val="accent1"/>
+          </a:lnRef>
+          <a:fillRef idx="3">
+            <a:schemeClr val="accent1"/>
+          </a:fillRef>
+          <a:effectRef idx="2">
+            <a:schemeClr val="accent1"/>
+          </a:effectRef>
+          <a:fontRef idx="minor">
+            <a:schemeClr val="lt1"/>
+          </a:fontRef>
+        </p:style>
+        <p:txBody>
+          <a:bodyPr rtlCol="0" anchor="ctr"/>
+          <a:lstStyle/>
+          <a:p>
+            <a:pPr algn="ctr"/>
+          </a:p>
+        </p:txBody>
+      </p:sp>
+      <p:cxnSp>
+        <p:nvCxnSpPr>
+          <p:cNvPr id="114" name="Connector 113"/>
+          <p:cNvCxnSpPr/>
+          <p:nvPr/>
+        </p:nvCxnSpPr>
+        <p:spPr>
+          <a:xfrm>
             <a:off x="7298480" y="3433731"/>
             <a:ext cx="292608" cy="0"/>
           </a:xfrm>
@@ -10044,14 +9734,14 @@
       </p:cxnSp>
       <p:sp>
         <p:nvSpPr>
-          <p:cNvPr id="112" name="Oval 111"/>
+          <p:cNvPr id="115" name="Oval 114"/>
           <p:cNvSpPr/>
           <p:nvPr/>
         </p:nvSpPr>
         <p:spPr>
           <a:xfrm>
-            <a:off x="7482532" y="3037001"/>
-            <a:ext cx="64008" cy="64008"/>
+            <a:off x="7468816" y="3023285"/>
+            <a:ext cx="91440" cy="91440"/>
           </a:xfrm>
           <a:prstGeom prst="ellipse">
             <a:avLst/>
@@ -10088,14 +9778,14 @@
       </p:sp>
       <p:sp>
         <p:nvSpPr>
-          <p:cNvPr id="113" name="Oval 112"/>
+          <p:cNvPr id="116" name="Oval 115"/>
           <p:cNvSpPr/>
           <p:nvPr/>
         </p:nvSpPr>
         <p:spPr>
           <a:xfrm>
-            <a:off x="7422539" y="3214105"/>
-            <a:ext cx="64008" cy="64008"/>
+            <a:off x="7408823" y="3200389"/>
+            <a:ext cx="91440" cy="91440"/>
           </a:xfrm>
           <a:prstGeom prst="ellipse">
             <a:avLst/>
@@ -10132,14 +9822,14 @@
       </p:sp>
       <p:sp>
         <p:nvSpPr>
-          <p:cNvPr id="114" name="Oval 113"/>
+          <p:cNvPr id="117" name="Oval 116"/>
           <p:cNvSpPr/>
           <p:nvPr/>
         </p:nvSpPr>
         <p:spPr>
           <a:xfrm>
-            <a:off x="7467330" y="3401727"/>
-            <a:ext cx="64008" cy="64008"/>
+            <a:off x="7453614" y="3388011"/>
+            <a:ext cx="91440" cy="91440"/>
           </a:xfrm>
           <a:prstGeom prst="ellipse">
             <a:avLst/>
@@ -10176,14 +9866,14 @@
       </p:sp>
       <p:sp>
         <p:nvSpPr>
-          <p:cNvPr id="115" name="Oval 114"/>
+          <p:cNvPr id="118" name="Oval 117"/>
           <p:cNvSpPr/>
           <p:nvPr/>
         </p:nvSpPr>
         <p:spPr>
           <a:xfrm>
-            <a:off x="7358473" y="3476588"/>
-            <a:ext cx="64008" cy="64008"/>
+            <a:off x="7344757" y="3462872"/>
+            <a:ext cx="91440" cy="91440"/>
           </a:xfrm>
           <a:prstGeom prst="ellipse">
             <a:avLst/>
@@ -10220,14 +9910,14 @@
       </p:sp>
       <p:sp>
         <p:nvSpPr>
-          <p:cNvPr id="116" name="Oval 115"/>
+          <p:cNvPr id="119" name="Oval 118"/>
           <p:cNvSpPr/>
           <p:nvPr/>
         </p:nvSpPr>
         <p:spPr>
           <a:xfrm>
-            <a:off x="7441548" y="3605497"/>
-            <a:ext cx="64008" cy="64008"/>
+            <a:off x="7427832" y="3591781"/>
+            <a:ext cx="91440" cy="91440"/>
           </a:xfrm>
           <a:prstGeom prst="ellipse">
             <a:avLst/>
@@ -10264,7 +9954,7 @@
       </p:sp>
       <p:cxnSp>
         <p:nvCxnSpPr>
-          <p:cNvPr id="117" name="Connector 116"/>
+          <p:cNvPr id="120" name="Connector 119"/>
           <p:cNvCxnSpPr/>
           <p:nvPr/>
         </p:nvCxnSpPr>
@@ -10298,122 +9988,6 @@
           </a:fontRef>
         </p:style>
       </p:cxnSp>
-      <p:cxnSp>
-        <p:nvCxnSpPr>
-          <p:cNvPr id="118" name="Connector 117"/>
-          <p:cNvCxnSpPr/>
-          <p:nvPr/>
-        </p:nvCxnSpPr>
-        <p:spPr>
-          <a:xfrm>
-            <a:off x="7870110" y="5018370"/>
-            <a:ext cx="146304" cy="0"/>
-          </a:xfrm>
-          <a:prstGeom prst="line">
-            <a:avLst/>
-          </a:prstGeom>
-          <a:ln w="10160">
-            <a:solidFill>
-              <a:srgbClr val="C53E1F"/>
-            </a:solidFill>
-          </a:ln>
-          <a:effectLst/>
-        </p:spPr>
-        <p:style>
-          <a:lnRef idx="2">
-            <a:schemeClr val="accent1"/>
-          </a:lnRef>
-          <a:fillRef idx="0">
-            <a:schemeClr val="accent1"/>
-          </a:fillRef>
-          <a:effectRef idx="1">
-            <a:schemeClr val="accent1"/>
-          </a:effectRef>
-          <a:fontRef idx="minor">
-            <a:schemeClr val="tx1"/>
-          </a:fontRef>
-        </p:style>
-      </p:cxnSp>
-      <p:cxnSp>
-        <p:nvCxnSpPr>
-          <p:cNvPr id="119" name="Connector 118"/>
-          <p:cNvCxnSpPr/>
-          <p:nvPr/>
-        </p:nvCxnSpPr>
-        <p:spPr>
-          <a:xfrm>
-            <a:off x="7870110" y="2895347"/>
-            <a:ext cx="146304" cy="0"/>
-          </a:xfrm>
-          <a:prstGeom prst="line">
-            <a:avLst/>
-          </a:prstGeom>
-          <a:ln w="10160">
-            <a:solidFill>
-              <a:srgbClr val="C53E1F"/>
-            </a:solidFill>
-          </a:ln>
-          <a:effectLst/>
-        </p:spPr>
-        <p:style>
-          <a:lnRef idx="2">
-            <a:schemeClr val="accent1"/>
-          </a:lnRef>
-          <a:fillRef idx="0">
-            <a:schemeClr val="accent1"/>
-          </a:fillRef>
-          <a:effectRef idx="1">
-            <a:schemeClr val="accent1"/>
-          </a:effectRef>
-          <a:fontRef idx="minor">
-            <a:schemeClr val="tx1"/>
-          </a:fontRef>
-        </p:style>
-      </p:cxnSp>
-      <p:sp>
-        <p:nvSpPr>
-          <p:cNvPr id="120" name="Rectangle 119"/>
-          <p:cNvSpPr/>
-          <p:nvPr/>
-        </p:nvSpPr>
-        <p:spPr>
-          <a:xfrm>
-            <a:off x="7796958" y="4774287"/>
-            <a:ext cx="292608" cy="1"/>
-          </a:xfrm>
-          <a:prstGeom prst="rect">
-            <a:avLst/>
-          </a:prstGeom>
-          <a:noFill/>
-          <a:ln w="10160">
-            <a:solidFill>
-              <a:srgbClr val="C53E1F"/>
-            </a:solidFill>
-          </a:ln>
-          <a:effectLst/>
-        </p:spPr>
-        <p:style>
-          <a:lnRef idx="1">
-            <a:schemeClr val="accent1"/>
-          </a:lnRef>
-          <a:fillRef idx="3">
-            <a:schemeClr val="accent1"/>
-          </a:fillRef>
-          <a:effectRef idx="2">
-            <a:schemeClr val="accent1"/>
-          </a:effectRef>
-          <a:fontRef idx="minor">
-            <a:schemeClr val="lt1"/>
-          </a:fontRef>
-        </p:style>
-        <p:txBody>
-          <a:bodyPr rtlCol="0" anchor="ctr"/>
-          <a:lstStyle/>
-          <a:p>
-            <a:pPr algn="ctr"/>
-          </a:p>
-        </p:txBody>
-      </p:sp>
       <p:cxnSp>
         <p:nvCxnSpPr>
           <p:cNvPr id="121" name="Connector 120"/>
@@ -10422,6 +9996,122 @@
         </p:nvCxnSpPr>
         <p:spPr>
           <a:xfrm>
+            <a:off x="7870110" y="5018370"/>
+            <a:ext cx="146304" cy="0"/>
+          </a:xfrm>
+          <a:prstGeom prst="line">
+            <a:avLst/>
+          </a:prstGeom>
+          <a:ln w="10160">
+            <a:solidFill>
+              <a:srgbClr val="C53E1F"/>
+            </a:solidFill>
+          </a:ln>
+          <a:effectLst/>
+        </p:spPr>
+        <p:style>
+          <a:lnRef idx="2">
+            <a:schemeClr val="accent1"/>
+          </a:lnRef>
+          <a:fillRef idx="0">
+            <a:schemeClr val="accent1"/>
+          </a:fillRef>
+          <a:effectRef idx="1">
+            <a:schemeClr val="accent1"/>
+          </a:effectRef>
+          <a:fontRef idx="minor">
+            <a:schemeClr val="tx1"/>
+          </a:fontRef>
+        </p:style>
+      </p:cxnSp>
+      <p:cxnSp>
+        <p:nvCxnSpPr>
+          <p:cNvPr id="122" name="Connector 121"/>
+          <p:cNvCxnSpPr/>
+          <p:nvPr/>
+        </p:nvCxnSpPr>
+        <p:spPr>
+          <a:xfrm>
+            <a:off x="7870110" y="2895347"/>
+            <a:ext cx="146304" cy="0"/>
+          </a:xfrm>
+          <a:prstGeom prst="line">
+            <a:avLst/>
+          </a:prstGeom>
+          <a:ln w="10160">
+            <a:solidFill>
+              <a:srgbClr val="C53E1F"/>
+            </a:solidFill>
+          </a:ln>
+          <a:effectLst/>
+        </p:spPr>
+        <p:style>
+          <a:lnRef idx="2">
+            <a:schemeClr val="accent1"/>
+          </a:lnRef>
+          <a:fillRef idx="0">
+            <a:schemeClr val="accent1"/>
+          </a:fillRef>
+          <a:effectRef idx="1">
+            <a:schemeClr val="accent1"/>
+          </a:effectRef>
+          <a:fontRef idx="minor">
+            <a:schemeClr val="tx1"/>
+          </a:fontRef>
+        </p:style>
+      </p:cxnSp>
+      <p:sp>
+        <p:nvSpPr>
+          <p:cNvPr id="123" name="Rectangle 122"/>
+          <p:cNvSpPr/>
+          <p:nvPr/>
+        </p:nvSpPr>
+        <p:spPr>
+          <a:xfrm>
+            <a:off x="7796958" y="4774287"/>
+            <a:ext cx="292608" cy="1"/>
+          </a:xfrm>
+          <a:prstGeom prst="rect">
+            <a:avLst/>
+          </a:prstGeom>
+          <a:noFill/>
+          <a:ln w="10160">
+            <a:solidFill>
+              <a:srgbClr val="C53E1F"/>
+            </a:solidFill>
+          </a:ln>
+          <a:effectLst/>
+        </p:spPr>
+        <p:style>
+          <a:lnRef idx="1">
+            <a:schemeClr val="accent1"/>
+          </a:lnRef>
+          <a:fillRef idx="3">
+            <a:schemeClr val="accent1"/>
+          </a:fillRef>
+          <a:effectRef idx="2">
+            <a:schemeClr val="accent1"/>
+          </a:effectRef>
+          <a:fontRef idx="minor">
+            <a:schemeClr val="lt1"/>
+          </a:fontRef>
+        </p:style>
+        <p:txBody>
+          <a:bodyPr rtlCol="0" anchor="ctr"/>
+          <a:lstStyle/>
+          <a:p>
+            <a:pPr algn="ctr"/>
+          </a:p>
+        </p:txBody>
+      </p:sp>
+      <p:cxnSp>
+        <p:nvCxnSpPr>
+          <p:cNvPr id="124" name="Connector 123"/>
+          <p:cNvCxnSpPr/>
+          <p:nvPr/>
+        </p:nvCxnSpPr>
+        <p:spPr>
+          <a:xfrm>
             <a:off x="7796958" y="4530203"/>
             <a:ext cx="292608" cy="0"/>
           </a:xfrm>
@@ -10452,14 +10142,14 @@
       </p:cxnSp>
       <p:sp>
         <p:nvSpPr>
-          <p:cNvPr id="122" name="Oval 121"/>
+          <p:cNvPr id="125" name="Oval 124"/>
           <p:cNvSpPr/>
           <p:nvPr/>
         </p:nvSpPr>
         <p:spPr>
           <a:xfrm>
-            <a:off x="7842905" y="2863343"/>
-            <a:ext cx="64008" cy="64008"/>
+            <a:off x="7829189" y="2849627"/>
+            <a:ext cx="91440" cy="91440"/>
           </a:xfrm>
           <a:prstGeom prst="ellipse">
             <a:avLst/>
@@ -10496,14 +10186,14 @@
       </p:sp>
       <p:sp>
         <p:nvSpPr>
-          <p:cNvPr id="123" name="Oval 122"/>
+          <p:cNvPr id="126" name="Oval 125"/>
           <p:cNvSpPr/>
           <p:nvPr/>
         </p:nvSpPr>
         <p:spPr>
           <a:xfrm>
-            <a:off x="7895445" y="4498199"/>
-            <a:ext cx="64008" cy="64008"/>
+            <a:off x="7881729" y="4484483"/>
+            <a:ext cx="91440" cy="91440"/>
           </a:xfrm>
           <a:prstGeom prst="ellipse">
             <a:avLst/>
@@ -10540,14 +10230,14 @@
       </p:sp>
       <p:sp>
         <p:nvSpPr>
-          <p:cNvPr id="124" name="Oval 123"/>
+          <p:cNvPr id="127" name="Oval 126"/>
           <p:cNvSpPr/>
           <p:nvPr/>
         </p:nvSpPr>
         <p:spPr>
           <a:xfrm>
-            <a:off x="7860380" y="4986366"/>
-            <a:ext cx="64008" cy="64008"/>
+            <a:off x="7846664" y="4972650"/>
+            <a:ext cx="91440" cy="91440"/>
           </a:xfrm>
           <a:prstGeom prst="ellipse">
             <a:avLst/>
@@ -10584,7 +10274,7 @@
       </p:sp>
       <p:sp>
         <p:nvSpPr>
-          <p:cNvPr id="125" name="TextBox 124"/>
+          <p:cNvPr id="128" name="TextBox 127"/>
           <p:cNvSpPr txBox="1"/>
           <p:nvPr/>
         </p:nvSpPr>
@@ -10620,7 +10310,7 @@
       </p:sp>
       <p:sp>
         <p:nvSpPr>
-          <p:cNvPr id="126" name="TextBox 125"/>
+          <p:cNvPr id="129" name="TextBox 128"/>
           <p:cNvSpPr txBox="1"/>
           <p:nvPr/>
         </p:nvSpPr>
@@ -10656,7 +10346,51 @@
       </p:sp>
       <p:sp>
         <p:nvSpPr>
-          <p:cNvPr id="127" name="TextBox 126"/>
+          <p:cNvPr id="130" name="Rectangle 129"/>
+          <p:cNvSpPr/>
+          <p:nvPr/>
+        </p:nvSpPr>
+        <p:spPr>
+          <a:xfrm>
+            <a:off x="8455587" y="1188720"/>
+            <a:ext cx="1246197" cy="2221442"/>
+          </a:xfrm>
+          <a:prstGeom prst="rect">
+            <a:avLst/>
+          </a:prstGeom>
+          <a:solidFill>
+            <a:srgbClr val="ECF5F1"/>
+          </a:solidFill>
+          <a:ln>
+            <a:noFill/>
+          </a:ln>
+          <a:effectLst/>
+        </p:spPr>
+        <p:style>
+          <a:lnRef idx="1">
+            <a:schemeClr val="accent1"/>
+          </a:lnRef>
+          <a:fillRef idx="3">
+            <a:schemeClr val="accent1"/>
+          </a:fillRef>
+          <a:effectRef idx="2">
+            <a:schemeClr val="accent1"/>
+          </a:effectRef>
+          <a:fontRef idx="minor">
+            <a:schemeClr val="lt1"/>
+          </a:fontRef>
+        </p:style>
+        <p:txBody>
+          <a:bodyPr rtlCol="0" anchor="ctr"/>
+          <a:lstStyle/>
+          <a:p>
+            <a:pPr algn="ctr"/>
+          </a:p>
+        </p:txBody>
+      </p:sp>
+      <p:sp>
+        <p:nvSpPr>
+          <p:cNvPr id="131" name="TextBox 130"/>
           <p:cNvSpPr txBox="1"/>
           <p:nvPr/>
         </p:nvSpPr>
@@ -10693,7 +10427,7 @@
       </p:sp>
       <p:cxnSp>
         <p:nvCxnSpPr>
-          <p:cNvPr id="128" name="Connector 127"/>
+          <p:cNvPr id="132" name="Connector 131"/>
           <p:cNvCxnSpPr/>
           <p:nvPr/>
         </p:nvCxnSpPr>
@@ -10729,7 +10463,7 @@
       </p:cxnSp>
       <p:cxnSp>
         <p:nvCxnSpPr>
-          <p:cNvPr id="129" name="Connector 128"/>
+          <p:cNvPr id="133" name="Connector 132"/>
           <p:cNvCxnSpPr/>
           <p:nvPr/>
         </p:nvCxnSpPr>
@@ -10765,7 +10499,7 @@
       </p:cxnSp>
       <p:cxnSp>
         <p:nvCxnSpPr>
-          <p:cNvPr id="130" name="Connector 129"/>
+          <p:cNvPr id="134" name="Connector 133"/>
           <p:cNvCxnSpPr/>
           <p:nvPr/>
         </p:nvCxnSpPr>
@@ -10801,7 +10535,7 @@
       </p:cxnSp>
       <p:sp>
         <p:nvSpPr>
-          <p:cNvPr id="131" name="Rectangle 130"/>
+          <p:cNvPr id="135" name="Rectangle 134"/>
           <p:cNvSpPr/>
           <p:nvPr/>
         </p:nvSpPr>
@@ -10845,7 +10579,7 @@
       </p:sp>
       <p:cxnSp>
         <p:nvCxnSpPr>
-          <p:cNvPr id="132" name="Connector 131"/>
+          <p:cNvPr id="136" name="Connector 135"/>
           <p:cNvCxnSpPr/>
           <p:nvPr/>
         </p:nvCxnSpPr>
@@ -10881,14 +10615,14 @@
       </p:cxnSp>
       <p:sp>
         <p:nvSpPr>
-          <p:cNvPr id="133" name="Oval 132"/>
+          <p:cNvPr id="137" name="Oval 136"/>
           <p:cNvSpPr/>
           <p:nvPr/>
         </p:nvSpPr>
         <p:spPr>
           <a:xfrm>
-            <a:off x="8759150" y="2792253"/>
-            <a:ext cx="64008" cy="64008"/>
+            <a:off x="8745434" y="2778537"/>
+            <a:ext cx="91440" cy="91440"/>
           </a:xfrm>
           <a:prstGeom prst="ellipse">
             <a:avLst/>
@@ -10925,14 +10659,14 @@
       </p:sp>
       <p:sp>
         <p:nvSpPr>
-          <p:cNvPr id="134" name="Oval 133"/>
+          <p:cNvPr id="138" name="Oval 137"/>
           <p:cNvSpPr/>
           <p:nvPr/>
         </p:nvSpPr>
         <p:spPr>
           <a:xfrm>
-            <a:off x="8763419" y="2933845"/>
-            <a:ext cx="64008" cy="64008"/>
+            <a:off x="8749703" y="2920129"/>
+            <a:ext cx="91440" cy="91440"/>
           </a:xfrm>
           <a:prstGeom prst="ellipse">
             <a:avLst/>
@@ -10969,14 +10703,14 @@
       </p:sp>
       <p:sp>
         <p:nvSpPr>
-          <p:cNvPr id="135" name="Oval 134"/>
+          <p:cNvPr id="139" name="Oval 138"/>
           <p:cNvSpPr/>
           <p:nvPr/>
         </p:nvSpPr>
         <p:spPr>
           <a:xfrm>
-            <a:off x="8752147" y="3058459"/>
-            <a:ext cx="64008" cy="64008"/>
+            <a:off x="8738431" y="3044743"/>
+            <a:ext cx="91440" cy="91440"/>
           </a:xfrm>
           <a:prstGeom prst="ellipse">
             <a:avLst/>
@@ -11013,14 +10747,14 @@
       </p:sp>
       <p:sp>
         <p:nvSpPr>
-          <p:cNvPr id="136" name="Oval 135"/>
+          <p:cNvPr id="140" name="Oval 139"/>
           <p:cNvSpPr/>
           <p:nvPr/>
         </p:nvSpPr>
         <p:spPr>
           <a:xfrm>
-            <a:off x="8868847" y="3446571"/>
-            <a:ext cx="64008" cy="64008"/>
+            <a:off x="8855131" y="3432855"/>
+            <a:ext cx="91440" cy="91440"/>
           </a:xfrm>
           <a:prstGeom prst="ellipse">
             <a:avLst/>
@@ -11057,14 +10791,14 @@
       </p:sp>
       <p:sp>
         <p:nvSpPr>
-          <p:cNvPr id="137" name="Oval 136"/>
+          <p:cNvPr id="141" name="Oval 140"/>
           <p:cNvSpPr/>
           <p:nvPr/>
         </p:nvSpPr>
         <p:spPr>
           <a:xfrm>
-            <a:off x="8791834" y="3473297"/>
-            <a:ext cx="64008" cy="64008"/>
+            <a:off x="8778118" y="3459581"/>
+            <a:ext cx="91440" cy="91440"/>
           </a:xfrm>
           <a:prstGeom prst="ellipse">
             <a:avLst/>
@@ -11101,7 +10835,7 @@
       </p:sp>
       <p:cxnSp>
         <p:nvCxnSpPr>
-          <p:cNvPr id="138" name="Connector 137"/>
+          <p:cNvPr id="142" name="Connector 141"/>
           <p:cNvCxnSpPr/>
           <p:nvPr/>
         </p:nvCxnSpPr>
@@ -11137,7 +10871,7 @@
       </p:cxnSp>
       <p:cxnSp>
         <p:nvCxnSpPr>
-          <p:cNvPr id="139" name="Connector 138"/>
+          <p:cNvPr id="143" name="Connector 142"/>
           <p:cNvCxnSpPr/>
           <p:nvPr/>
         </p:nvCxnSpPr>
@@ -11173,7 +10907,7 @@
       </p:cxnSp>
       <p:cxnSp>
         <p:nvCxnSpPr>
-          <p:cNvPr id="140" name="Connector 139"/>
+          <p:cNvPr id="144" name="Connector 143"/>
           <p:cNvCxnSpPr/>
           <p:nvPr/>
         </p:nvCxnSpPr>
@@ -11209,7 +10943,7 @@
       </p:cxnSp>
       <p:sp>
         <p:nvSpPr>
-          <p:cNvPr id="141" name="Rectangle 140"/>
+          <p:cNvPr id="145" name="Rectangle 144"/>
           <p:cNvSpPr/>
           <p:nvPr/>
         </p:nvSpPr>
@@ -11253,7 +10987,7 @@
       </p:sp>
       <p:cxnSp>
         <p:nvCxnSpPr>
-          <p:cNvPr id="142" name="Connector 141"/>
+          <p:cNvPr id="146" name="Connector 145"/>
           <p:cNvCxnSpPr/>
           <p:nvPr/>
         </p:nvCxnSpPr>
@@ -11289,14 +11023,14 @@
       </p:cxnSp>
       <p:sp>
         <p:nvSpPr>
-          <p:cNvPr id="143" name="Oval 142"/>
+          <p:cNvPr id="147" name="Oval 146"/>
           <p:cNvSpPr/>
           <p:nvPr/>
         </p:nvSpPr>
         <p:spPr>
           <a:xfrm>
-            <a:off x="9270318" y="3612665"/>
-            <a:ext cx="64008" cy="64008"/>
+            <a:off x="9256602" y="3598949"/>
+            <a:ext cx="91440" cy="91440"/>
           </a:xfrm>
           <a:prstGeom prst="ellipse">
             <a:avLst/>
@@ -11333,14 +11067,14 @@
       </p:sp>
       <p:sp>
         <p:nvSpPr>
-          <p:cNvPr id="144" name="Oval 143"/>
+          <p:cNvPr id="148" name="Oval 147"/>
           <p:cNvSpPr/>
           <p:nvPr/>
         </p:nvSpPr>
         <p:spPr>
           <a:xfrm>
-            <a:off x="9295824" y="4780524"/>
-            <a:ext cx="64008" cy="64008"/>
+            <a:off x="9282108" y="4766808"/>
+            <a:ext cx="91440" cy="91440"/>
           </a:xfrm>
           <a:prstGeom prst="ellipse">
             <a:avLst/>
@@ -11377,14 +11111,14 @@
       </p:sp>
       <p:sp>
         <p:nvSpPr>
-          <p:cNvPr id="145" name="Oval 144"/>
+          <p:cNvPr id="149" name="Oval 148"/>
           <p:cNvSpPr/>
           <p:nvPr/>
         </p:nvSpPr>
         <p:spPr>
           <a:xfrm>
-            <a:off x="9261322" y="5318471"/>
-            <a:ext cx="64008" cy="64008"/>
+            <a:off x="9247606" y="5304755"/>
+            <a:ext cx="91440" cy="91440"/>
           </a:xfrm>
           <a:prstGeom prst="ellipse">
             <a:avLst/>
@@ -11421,7 +11155,7 @@
       </p:sp>
       <p:sp>
         <p:nvSpPr>
-          <p:cNvPr id="146" name="TextBox 145"/>
+          <p:cNvPr id="150" name="TextBox 149"/>
           <p:cNvSpPr txBox="1"/>
           <p:nvPr/>
         </p:nvSpPr>
@@ -11457,7 +11191,7 @@
       </p:sp>
       <p:sp>
         <p:nvSpPr>
-          <p:cNvPr id="147" name="TextBox 146"/>
+          <p:cNvPr id="151" name="TextBox 150"/>
           <p:cNvSpPr txBox="1"/>
           <p:nvPr/>
         </p:nvSpPr>
@@ -11486,14 +11220,102 @@
                 </a:solidFill>
                 <a:latin typeface="Arial"/>
               </a:rPr>
-              <a:t>P=0.036 ★</a:t>
+              <a:t>P=0.036</a:t>
             </a:r>
           </a:p>
         </p:txBody>
       </p:sp>
       <p:sp>
         <p:nvSpPr>
-          <p:cNvPr id="148" name="TextBox 147"/>
+          <p:cNvPr id="152" name="5-Point Star 151"/>
+          <p:cNvSpPr/>
+          <p:nvPr/>
+        </p:nvSpPr>
+        <p:spPr>
+          <a:xfrm>
+            <a:off x="9380438" y="941832"/>
+            <a:ext cx="128016" cy="128016"/>
+          </a:xfrm>
+          <a:prstGeom prst="star5">
+            <a:avLst/>
+          </a:prstGeom>
+          <a:solidFill>
+            <a:srgbClr val="D4A300"/>
+          </a:solidFill>
+          <a:ln>
+            <a:noFill/>
+          </a:ln>
+          <a:effectLst/>
+        </p:spPr>
+        <p:style>
+          <a:lnRef idx="1">
+            <a:schemeClr val="accent1"/>
+          </a:lnRef>
+          <a:fillRef idx="3">
+            <a:schemeClr val="accent1"/>
+          </a:fillRef>
+          <a:effectRef idx="2">
+            <a:schemeClr val="accent1"/>
+          </a:effectRef>
+          <a:fontRef idx="minor">
+            <a:schemeClr val="lt1"/>
+          </a:fontRef>
+        </p:style>
+        <p:txBody>
+          <a:bodyPr rtlCol="0" anchor="ctr"/>
+          <a:lstStyle/>
+          <a:p>
+            <a:pPr algn="ctr"/>
+          </a:p>
+        </p:txBody>
+      </p:sp>
+      <p:sp>
+        <p:nvSpPr>
+          <p:cNvPr id="153" name="Rectangle 152"/>
+          <p:cNvSpPr/>
+          <p:nvPr/>
+        </p:nvSpPr>
+        <p:spPr>
+          <a:xfrm>
+            <a:off x="9840250" y="1188720"/>
+            <a:ext cx="1246197" cy="2221442"/>
+          </a:xfrm>
+          <a:prstGeom prst="rect">
+            <a:avLst/>
+          </a:prstGeom>
+          <a:solidFill>
+            <a:srgbClr val="ECF5F1"/>
+          </a:solidFill>
+          <a:ln>
+            <a:noFill/>
+          </a:ln>
+          <a:effectLst/>
+        </p:spPr>
+        <p:style>
+          <a:lnRef idx="1">
+            <a:schemeClr val="accent1"/>
+          </a:lnRef>
+          <a:fillRef idx="3">
+            <a:schemeClr val="accent1"/>
+          </a:fillRef>
+          <a:effectRef idx="2">
+            <a:schemeClr val="accent1"/>
+          </a:effectRef>
+          <a:fontRef idx="minor">
+            <a:schemeClr val="lt1"/>
+          </a:fontRef>
+        </p:style>
+        <p:txBody>
+          <a:bodyPr rtlCol="0" anchor="ctr"/>
+          <a:lstStyle/>
+          <a:p>
+            <a:pPr algn="ctr"/>
+          </a:p>
+        </p:txBody>
+      </p:sp>
+      <p:sp>
+        <p:nvSpPr>
+          <p:cNvPr id="154" name="TextBox 153"/>
           <p:cNvSpPr txBox="1"/>
           <p:nvPr/>
         </p:nvSpPr>
@@ -11530,7 +11352,7 @@
       </p:sp>
       <p:cxnSp>
         <p:nvCxnSpPr>
-          <p:cNvPr id="149" name="Connector 148"/>
+          <p:cNvPr id="155" name="Connector 154"/>
           <p:cNvCxnSpPr/>
           <p:nvPr/>
         </p:nvCxnSpPr>
@@ -11566,7 +11388,7 @@
       </p:cxnSp>
       <p:cxnSp>
         <p:nvCxnSpPr>
-          <p:cNvPr id="150" name="Connector 149"/>
+          <p:cNvPr id="156" name="Connector 155"/>
           <p:cNvCxnSpPr/>
           <p:nvPr/>
         </p:nvCxnSpPr>
@@ -11602,7 +11424,7 @@
       </p:cxnSp>
       <p:cxnSp>
         <p:nvCxnSpPr>
-          <p:cNvPr id="151" name="Connector 150"/>
+          <p:cNvPr id="157" name="Connector 156"/>
           <p:cNvCxnSpPr/>
           <p:nvPr/>
         </p:nvCxnSpPr>
@@ -11638,7 +11460,7 @@
       </p:cxnSp>
       <p:sp>
         <p:nvSpPr>
-          <p:cNvPr id="152" name="Rectangle 151"/>
+          <p:cNvPr id="158" name="Rectangle 157"/>
           <p:cNvSpPr/>
           <p:nvPr/>
         </p:nvSpPr>
@@ -11682,7 +11504,7 @@
       </p:sp>
       <p:cxnSp>
         <p:nvCxnSpPr>
-          <p:cNvPr id="153" name="Connector 152"/>
+          <p:cNvPr id="159" name="Connector 158"/>
           <p:cNvCxnSpPr/>
           <p:nvPr/>
         </p:nvCxnSpPr>
@@ -11718,14 +11540,14 @@
       </p:cxnSp>
       <p:sp>
         <p:nvSpPr>
-          <p:cNvPr id="154" name="Oval 153"/>
+          <p:cNvPr id="160" name="Oval 159"/>
           <p:cNvSpPr/>
           <p:nvPr/>
         </p:nvSpPr>
         <p:spPr>
           <a:xfrm>
-            <a:off x="10113484" y="1715907"/>
-            <a:ext cx="64008" cy="64008"/>
+            <a:off x="10099768" y="1702191"/>
+            <a:ext cx="91440" cy="91440"/>
           </a:xfrm>
           <a:prstGeom prst="ellipse">
             <a:avLst/>
@@ -11762,14 +11584,14 @@
       </p:sp>
       <p:sp>
         <p:nvSpPr>
-          <p:cNvPr id="155" name="Oval 154"/>
+          <p:cNvPr id="161" name="Oval 160"/>
           <p:cNvSpPr/>
           <p:nvPr/>
         </p:nvSpPr>
         <p:spPr>
           <a:xfrm>
-            <a:off x="10244579" y="2352933"/>
-            <a:ext cx="64008" cy="64008"/>
+            <a:off x="10230863" y="2339217"/>
+            <a:ext cx="91440" cy="91440"/>
           </a:xfrm>
           <a:prstGeom prst="ellipse">
             <a:avLst/>
@@ -11806,14 +11628,14 @@
       </p:sp>
       <p:sp>
         <p:nvSpPr>
-          <p:cNvPr id="156" name="Oval 155"/>
+          <p:cNvPr id="162" name="Oval 161"/>
           <p:cNvSpPr/>
           <p:nvPr/>
         </p:nvSpPr>
         <p:spPr>
           <a:xfrm>
-            <a:off x="10183418" y="3506545"/>
-            <a:ext cx="64008" cy="64008"/>
+            <a:off x="10169702" y="3492829"/>
+            <a:ext cx="91440" cy="91440"/>
           </a:xfrm>
           <a:prstGeom prst="ellipse">
             <a:avLst/>
@@ -11850,14 +11672,14 @@
       </p:sp>
       <p:sp>
         <p:nvSpPr>
-          <p:cNvPr id="157" name="Oval 156"/>
+          <p:cNvPr id="163" name="Oval 162"/>
           <p:cNvSpPr/>
           <p:nvPr/>
         </p:nvSpPr>
         <p:spPr>
           <a:xfrm>
-            <a:off x="10199800" y="3610945"/>
-            <a:ext cx="64008" cy="64008"/>
+            <a:off x="10186084" y="3597229"/>
+            <a:ext cx="91440" cy="91440"/>
           </a:xfrm>
           <a:prstGeom prst="ellipse">
             <a:avLst/>
@@ -11894,14 +11716,14 @@
       </p:sp>
       <p:sp>
         <p:nvSpPr>
-          <p:cNvPr id="158" name="Oval 157"/>
+          <p:cNvPr id="164" name="Oval 163"/>
           <p:cNvSpPr/>
           <p:nvPr/>
         </p:nvSpPr>
         <p:spPr>
           <a:xfrm>
-            <a:off x="10196954" y="4257239"/>
-            <a:ext cx="64008" cy="64008"/>
+            <a:off x="10183238" y="4243523"/>
+            <a:ext cx="91440" cy="91440"/>
           </a:xfrm>
           <a:prstGeom prst="ellipse">
             <a:avLst/>
@@ -11938,7 +11760,7 @@
       </p:sp>
       <p:cxnSp>
         <p:nvCxnSpPr>
-          <p:cNvPr id="159" name="Connector 158"/>
+          <p:cNvPr id="165" name="Connector 164"/>
           <p:cNvCxnSpPr/>
           <p:nvPr/>
         </p:nvCxnSpPr>
@@ -11974,7 +11796,7 @@
       </p:cxnSp>
       <p:cxnSp>
         <p:nvCxnSpPr>
-          <p:cNvPr id="160" name="Connector 159"/>
+          <p:cNvPr id="166" name="Connector 165"/>
           <p:cNvCxnSpPr/>
           <p:nvPr/>
         </p:nvCxnSpPr>
@@ -12010,7 +11832,7 @@
       </p:cxnSp>
       <p:cxnSp>
         <p:nvCxnSpPr>
-          <p:cNvPr id="161" name="Connector 160"/>
+          <p:cNvPr id="167" name="Connector 166"/>
           <p:cNvCxnSpPr/>
           <p:nvPr/>
         </p:nvCxnSpPr>
@@ -12046,7 +11868,7 @@
       </p:cxnSp>
       <p:sp>
         <p:nvSpPr>
-          <p:cNvPr id="162" name="Rectangle 161"/>
+          <p:cNvPr id="168" name="Rectangle 167"/>
           <p:cNvSpPr/>
           <p:nvPr/>
         </p:nvSpPr>
@@ -12090,7 +11912,7 @@
       </p:sp>
       <p:cxnSp>
         <p:nvCxnSpPr>
-          <p:cNvPr id="163" name="Connector 162"/>
+          <p:cNvPr id="169" name="Connector 168"/>
           <p:cNvCxnSpPr/>
           <p:nvPr/>
         </p:nvCxnSpPr>
@@ -12126,14 +11948,14 @@
       </p:cxnSp>
       <p:sp>
         <p:nvSpPr>
-          <p:cNvPr id="164" name="Oval 163"/>
+          <p:cNvPr id="170" name="Oval 169"/>
           <p:cNvSpPr/>
           <p:nvPr/>
         </p:nvSpPr>
         <p:spPr>
           <a:xfrm>
-            <a:off x="10613105" y="3478412"/>
-            <a:ext cx="64008" cy="64008"/>
+            <a:off x="10599389" y="3464696"/>
+            <a:ext cx="91440" cy="91440"/>
           </a:xfrm>
           <a:prstGeom prst="ellipse">
             <a:avLst/>
@@ -12170,14 +11992,14 @@
       </p:sp>
       <p:sp>
         <p:nvSpPr>
-          <p:cNvPr id="165" name="Oval 164"/>
+          <p:cNvPr id="171" name="Oval 170"/>
           <p:cNvSpPr/>
           <p:nvPr/>
         </p:nvSpPr>
         <p:spPr>
           <a:xfrm>
-            <a:off x="10752694" y="3892390"/>
-            <a:ext cx="64008" cy="64008"/>
+            <a:off x="10738978" y="3878674"/>
+            <a:ext cx="91440" cy="91440"/>
           </a:xfrm>
           <a:prstGeom prst="ellipse">
             <a:avLst/>
@@ -12214,14 +12036,14 @@
       </p:sp>
       <p:sp>
         <p:nvSpPr>
-          <p:cNvPr id="166" name="Oval 165"/>
+          <p:cNvPr id="172" name="Oval 171"/>
           <p:cNvSpPr/>
           <p:nvPr/>
         </p:nvSpPr>
         <p:spPr>
           <a:xfrm>
-            <a:off x="10658806" y="5443845"/>
-            <a:ext cx="64008" cy="64008"/>
+            <a:off x="10645090" y="5430129"/>
+            <a:ext cx="91440" cy="91440"/>
           </a:xfrm>
           <a:prstGeom prst="ellipse">
             <a:avLst/>
@@ -12258,7 +12080,7 @@
       </p:sp>
       <p:sp>
         <p:nvSpPr>
-          <p:cNvPr id="167" name="TextBox 166"/>
+          <p:cNvPr id="173" name="TextBox 172"/>
           <p:cNvSpPr txBox="1"/>
           <p:nvPr/>
         </p:nvSpPr>
@@ -12294,7 +12116,7 @@
       </p:sp>
       <p:sp>
         <p:nvSpPr>
-          <p:cNvPr id="168" name="TextBox 167"/>
+          <p:cNvPr id="174" name="TextBox 173"/>
           <p:cNvSpPr txBox="1"/>
           <p:nvPr/>
         </p:nvSpPr>
@@ -12330,23 +12152,25 @@
       </p:sp>
       <p:sp>
         <p:nvSpPr>
-          <p:cNvPr id="169" name="Oval 168"/>
+          <p:cNvPr id="175" name="Rectangle 174"/>
           <p:cNvSpPr/>
           <p:nvPr/>
         </p:nvSpPr>
         <p:spPr>
           <a:xfrm>
-            <a:off x="10177272" y="621792"/>
-            <a:ext cx="128016" cy="128016"/>
-          </a:xfrm>
-          <a:prstGeom prst="ellipse">
+            <a:off x="1463040" y="6263640"/>
+            <a:ext cx="9692640" cy="365760"/>
+          </a:xfrm>
+          <a:prstGeom prst="rect">
             <a:avLst/>
           </a:prstGeom>
           <a:solidFill>
-            <a:srgbClr val="0A7D6E"/>
+            <a:srgbClr val="D4A300"/>
           </a:solidFill>
-          <a:ln>
-            <a:noFill/>
+          <a:ln w="10160">
+            <a:solidFill>
+              <a:srgbClr val="222222"/>
+            </a:solidFill>
           </a:ln>
           <a:effectLst/>
         </p:spPr>
@@ -12374,14 +12198,14 @@
       </p:sp>
       <p:sp>
         <p:nvSpPr>
-          <p:cNvPr id="170" name="TextBox 169"/>
+          <p:cNvPr id="176" name="TextBox 175"/>
           <p:cNvSpPr txBox="1"/>
           <p:nvPr/>
         </p:nvSpPr>
         <p:spPr>
           <a:xfrm>
-            <a:off x="10332720" y="594360"/>
-            <a:ext cx="1463040" cy="182880"/>
+            <a:off x="1463040" y="6263640"/>
+            <a:ext cx="9692640" cy="365760"/>
           </a:xfrm>
           <a:prstGeom prst="rect">
             <a:avLst/>
@@ -12395,131 +12219,15 @@
           </a:bodyPr>
           <a:lstStyle/>
           <a:p>
-            <a:pPr algn="l"/>
+            <a:pPr algn="ctr"/>
             <a:r>
-              <a:rPr sz="900" b="0" i="0">
+              <a:rPr sz="1000" b="1" i="0">
                 <a:solidFill>
                   <a:srgbClr val="222222"/>
                 </a:solidFill>
                 <a:latin typeface="Arial"/>
               </a:rPr>
-              <a:t>CR (n=5)</a:t>
-            </a:r>
-          </a:p>
-        </p:txBody>
-      </p:sp>
-      <p:sp>
-        <p:nvSpPr>
-          <p:cNvPr id="171" name="Oval 170"/>
-          <p:cNvSpPr/>
-          <p:nvPr/>
-        </p:nvSpPr>
-        <p:spPr>
-          <a:xfrm>
-            <a:off x="10177272" y="804672"/>
-            <a:ext cx="128016" cy="128016"/>
-          </a:xfrm>
-          <a:prstGeom prst="ellipse">
-            <a:avLst/>
-          </a:prstGeom>
-          <a:solidFill>
-            <a:srgbClr val="C53E1F"/>
-          </a:solidFill>
-          <a:ln>
-            <a:noFill/>
-          </a:ln>
-          <a:effectLst/>
-        </p:spPr>
-        <p:style>
-          <a:lnRef idx="1">
-            <a:schemeClr val="accent1"/>
-          </a:lnRef>
-          <a:fillRef idx="3">
-            <a:schemeClr val="accent1"/>
-          </a:fillRef>
-          <a:effectRef idx="2">
-            <a:schemeClr val="accent1"/>
-          </a:effectRef>
-          <a:fontRef idx="minor">
-            <a:schemeClr val="lt1"/>
-          </a:fontRef>
-        </p:style>
-        <p:txBody>
-          <a:bodyPr rtlCol="0" anchor="ctr"/>
-          <a:lstStyle/>
-          <a:p>
-            <a:pPr algn="ctr"/>
-          </a:p>
-        </p:txBody>
-      </p:sp>
-      <p:sp>
-        <p:nvSpPr>
-          <p:cNvPr id="172" name="TextBox 171"/>
-          <p:cNvSpPr txBox="1"/>
-          <p:nvPr/>
-        </p:nvSpPr>
-        <p:spPr>
-          <a:xfrm>
-            <a:off x="10332720" y="777240"/>
-            <a:ext cx="1463040" cy="182880"/>
-          </a:xfrm>
-          <a:prstGeom prst="rect">
-            <a:avLst/>
-          </a:prstGeom>
-          <a:noFill/>
-          <a:effectLst/>
-        </p:spPr>
-        <p:txBody>
-          <a:bodyPr wrap="square" lIns="0" rIns="0" tIns="0" bIns="0" anchor="ctr">
-            <a:spAutoFit/>
-          </a:bodyPr>
-          <a:lstStyle/>
-          <a:p>
-            <a:pPr algn="l"/>
-            <a:r>
-              <a:rPr sz="900" b="0" i="0">
-                <a:solidFill>
-                  <a:srgbClr val="222222"/>
-                </a:solidFill>
-                <a:latin typeface="Arial"/>
-              </a:rPr>
-              <a:t>non-CR (n=3)</a:t>
-            </a:r>
-          </a:p>
-        </p:txBody>
-      </p:sp>
-      <p:sp>
-        <p:nvSpPr>
-          <p:cNvPr id="173" name="TextBox 172"/>
-          <p:cNvSpPr txBox="1"/>
-          <p:nvPr/>
-        </p:nvSpPr>
-        <p:spPr>
-          <a:xfrm>
-            <a:off x="1463040" y="6263640"/>
-            <a:ext cx="9601200" cy="320040"/>
-          </a:xfrm>
-          <a:prstGeom prst="rect">
-            <a:avLst/>
-          </a:prstGeom>
-          <a:noFill/>
-          <a:effectLst/>
-        </p:spPr>
-        <p:txBody>
-          <a:bodyPr wrap="square" lIns="0" rIns="0" tIns="0" bIns="0" anchor="ctr">
-            <a:spAutoFit/>
-          </a:bodyPr>
-          <a:lstStyle/>
-          <a:p>
-            <a:pPr algn="l"/>
-            <a:r>
-              <a:rPr sz="900" b="0" i="1">
-                <a:solidFill>
-                  <a:srgbClr val="222222"/>
-                </a:solidFill>
-                <a:latin typeface="Arial"/>
-              </a:rPr>
-              <a:t>7/7 signatures move in discovery-predicted direction; binomial sign test P = 0.016. Tcell_infiltration MW P = 0.036; DSB repair P = 0.071.</a:t>
+              <a:t>★ 7/7 signatures concordant with discovery direction (binomial sign P = 0.016). Tcell_infiltration MW P = 0.036. Teal shading = discovery-predicted direction.</a:t>
             </a:r>
           </a:p>
         </p:txBody>
@@ -12609,7 +12317,7 @@
                 </a:solidFill>
                 <a:latin typeface="Arial"/>
               </a:rPr>
-              <a:t>GSE254249 paired Δ(post − pre) slopegraph (n = 3 paired subjects) — target-engagement reference</a:t>
+              <a:t>GSE254249 paired Δ (n = 3) slopegraph — pre→post per subject (sign-colored) + mean Δ diamond</a:t>
             </a:r>
           </a:p>
         </p:txBody>
@@ -13149,7 +12857,7 @@
                 </a:solidFill>
                 <a:latin typeface="Arial"/>
               </a:rPr>
-              <a:t>Δ(post − pre) ssGSEA score</a:t>
+              <a:t>Δ(post − pre) ssGSEA score — gold arrow = mean Δ</a:t>
             </a:r>
           </a:p>
         </p:txBody>
@@ -13242,7 +12950,7 @@
             <a:avLst/>
           </a:prstGeom>
           <a:solidFill>
-            <a:srgbClr val="E9AE9B"/>
+            <a:srgbClr val="F7D7CE"/>
           </a:solidFill>
           <a:ln>
             <a:noFill/>
@@ -13271,15 +12979,51 @@
           </a:p>
         </p:txBody>
       </p:sp>
-      <p:sp>
-        <p:nvSpPr>
-          <p:cNvPr id="22" name="Oval 21"/>
+      <p:cxnSp>
+        <p:nvCxnSpPr>
+          <p:cNvPr id="22" name="Connector 21"/>
+          <p:cNvCxnSpPr/>
+          <p:nvPr/>
+        </p:nvCxnSpPr>
+        <p:spPr>
+          <a:xfrm>
+            <a:off x="6309360" y="1848394"/>
+            <a:ext cx="775411" cy="0"/>
+          </a:xfrm>
+          <a:prstGeom prst="line">
+            <a:avLst/>
+          </a:prstGeom>
+          <a:ln w="15240">
+            <a:solidFill>
+              <a:srgbClr val="0A7D6E"/>
+            </a:solidFill>
+          </a:ln>
+          <a:effectLst/>
+        </p:spPr>
+        <p:style>
+          <a:lnRef idx="2">
+            <a:schemeClr val="accent1"/>
+          </a:lnRef>
+          <a:fillRef idx="0">
+            <a:schemeClr val="accent1"/>
+          </a:fillRef>
+          <a:effectRef idx="1">
+            <a:schemeClr val="accent1"/>
+          </a:effectRef>
+          <a:fontRef idx="minor">
+            <a:schemeClr val="tx1"/>
+          </a:fontRef>
+        </p:style>
+      </p:cxnSp>
+      <p:sp>
+        <p:nvSpPr>
+          <p:cNvPr id="23" name="Oval 22"/>
           <p:cNvSpPr/>
           <p:nvPr/>
         </p:nvSpPr>
         <p:spPr>
           <a:xfrm>
-            <a:off x="7020763" y="1848802"/>
+            <a:off x="7020763" y="1784386"/>
             <a:ext cx="128016" cy="128016"/>
           </a:xfrm>
           <a:prstGeom prst="ellipse">
@@ -13319,14 +13063,14 @@
       </p:sp>
       <p:sp>
         <p:nvSpPr>
-          <p:cNvPr id="23" name="TextBox 22"/>
+          <p:cNvPr id="24" name="TextBox 23"/>
           <p:cNvSpPr txBox="1"/>
           <p:nvPr/>
         </p:nvSpPr>
         <p:spPr>
           <a:xfrm>
-            <a:off x="6764731" y="1620202"/>
-            <a:ext cx="640080" cy="164592"/>
+            <a:off x="6764731" y="1592362"/>
+            <a:ext cx="640080" cy="137160"/>
           </a:xfrm>
           <a:prstGeom prst="rect">
             <a:avLst/>
@@ -13342,7 +13086,7 @@
           <a:p>
             <a:pPr algn="ctr"/>
             <a:r>
-              <a:rPr sz="700" b="0" i="0">
+              <a:rPr sz="600" b="0" i="0">
                 <a:solidFill>
                   <a:srgbClr val="BBBBBB"/>
                 </a:solidFill>
@@ -13353,15 +13097,51 @@
           </a:p>
         </p:txBody>
       </p:sp>
-      <p:sp>
-        <p:nvSpPr>
-          <p:cNvPr id="24" name="Oval 23"/>
+      <p:cxnSp>
+        <p:nvCxnSpPr>
+          <p:cNvPr id="25" name="Connector 24"/>
+          <p:cNvCxnSpPr/>
+          <p:nvPr/>
+        </p:nvCxnSpPr>
+        <p:spPr>
+          <a:xfrm flipH="1">
+            <a:off x="3934663" y="1848394"/>
+            <a:ext cx="2374697" cy="0"/>
+          </a:xfrm>
+          <a:prstGeom prst="line">
+            <a:avLst/>
+          </a:prstGeom>
+          <a:ln w="15240">
+            <a:solidFill>
+              <a:srgbClr val="C53E1F"/>
+            </a:solidFill>
+          </a:ln>
+          <a:effectLst/>
+        </p:spPr>
+        <p:style>
+          <a:lnRef idx="2">
+            <a:schemeClr val="accent1"/>
+          </a:lnRef>
+          <a:fillRef idx="0">
+            <a:schemeClr val="accent1"/>
+          </a:fillRef>
+          <a:effectRef idx="1">
+            <a:schemeClr val="accent1"/>
+          </a:effectRef>
+          <a:fontRef idx="minor">
+            <a:schemeClr val="tx1"/>
+          </a:fontRef>
+        </p:style>
+      </p:cxnSp>
+      <p:sp>
+        <p:nvSpPr>
+          <p:cNvPr id="26" name="Oval 25"/>
           <p:cNvSpPr/>
           <p:nvPr/>
         </p:nvSpPr>
         <p:spPr>
           <a:xfrm>
-            <a:off x="3870655" y="1770015"/>
+            <a:off x="3870655" y="1784386"/>
             <a:ext cx="128016" cy="128016"/>
           </a:xfrm>
           <a:prstGeom prst="ellipse">
@@ -13401,14 +13181,14 @@
       </p:sp>
       <p:sp>
         <p:nvSpPr>
-          <p:cNvPr id="25" name="TextBox 24"/>
+          <p:cNvPr id="27" name="TextBox 26"/>
           <p:cNvSpPr txBox="1"/>
           <p:nvPr/>
         </p:nvSpPr>
         <p:spPr>
           <a:xfrm>
-            <a:off x="3614623" y="1541415"/>
-            <a:ext cx="640080" cy="164592"/>
+            <a:off x="3614623" y="1592362"/>
+            <a:ext cx="640080" cy="137160"/>
           </a:xfrm>
           <a:prstGeom prst="rect">
             <a:avLst/>
@@ -13424,7 +13204,7 @@
           <a:p>
             <a:pPr algn="ctr"/>
             <a:r>
-              <a:rPr sz="700" b="0" i="0">
+              <a:rPr sz="600" b="0" i="0">
                 <a:solidFill>
                   <a:srgbClr val="BBBBBB"/>
                 </a:solidFill>
@@ -13435,15 +13215,51 @@
           </a:p>
         </p:txBody>
       </p:sp>
-      <p:sp>
-        <p:nvSpPr>
-          <p:cNvPr id="26" name="Oval 25"/>
+      <p:cxnSp>
+        <p:nvCxnSpPr>
+          <p:cNvPr id="28" name="Connector 27"/>
+          <p:cNvCxnSpPr/>
+          <p:nvPr/>
+        </p:nvCxnSpPr>
+        <p:spPr>
+          <a:xfrm flipH="1">
+            <a:off x="3886200" y="1848394"/>
+            <a:ext cx="2423160" cy="0"/>
+          </a:xfrm>
+          <a:prstGeom prst="line">
+            <a:avLst/>
+          </a:prstGeom>
+          <a:ln w="15240">
+            <a:solidFill>
+              <a:srgbClr val="C53E1F"/>
+            </a:solidFill>
+          </a:ln>
+          <a:effectLst/>
+        </p:spPr>
+        <p:style>
+          <a:lnRef idx="2">
+            <a:schemeClr val="accent1"/>
+          </a:lnRef>
+          <a:fillRef idx="0">
+            <a:schemeClr val="accent1"/>
+          </a:fillRef>
+          <a:effectRef idx="1">
+            <a:schemeClr val="accent1"/>
+          </a:effectRef>
+          <a:fontRef idx="minor">
+            <a:schemeClr val="tx1"/>
+          </a:fontRef>
+        </p:style>
+      </p:cxnSp>
+      <p:sp>
+        <p:nvSpPr>
+          <p:cNvPr id="29" name="Oval 28"/>
           <p:cNvSpPr/>
           <p:nvPr/>
         </p:nvSpPr>
         <p:spPr>
           <a:xfrm>
-            <a:off x="3822192" y="1868704"/>
+            <a:off x="3822192" y="1784386"/>
             <a:ext cx="128016" cy="128016"/>
           </a:xfrm>
           <a:prstGeom prst="ellipse">
@@ -13483,14 +13299,14 @@
       </p:sp>
       <p:sp>
         <p:nvSpPr>
-          <p:cNvPr id="27" name="TextBox 26"/>
+          <p:cNvPr id="30" name="TextBox 29"/>
           <p:cNvSpPr txBox="1"/>
           <p:nvPr/>
         </p:nvSpPr>
         <p:spPr>
           <a:xfrm>
-            <a:off x="3566160" y="1640104"/>
-            <a:ext cx="640080" cy="164592"/>
+            <a:off x="3566160" y="1592362"/>
+            <a:ext cx="640080" cy="137160"/>
           </a:xfrm>
           <a:prstGeom prst="rect">
             <a:avLst/>
@@ -13506,7 +13322,7 @@
           <a:p>
             <a:pPr algn="ctr"/>
             <a:r>
-              <a:rPr sz="700" b="0" i="0">
+              <a:rPr sz="600" b="0" i="0">
                 <a:solidFill>
                   <a:srgbClr val="BBBBBB"/>
                 </a:solidFill>
@@ -13519,20 +13335,22 @@
       </p:sp>
       <p:sp>
         <p:nvSpPr>
-          <p:cNvPr id="28" name="Diamond 27"/>
+          <p:cNvPr id="31" name="Diamond 30"/>
           <p:cNvSpPr/>
           <p:nvPr/>
         </p:nvSpPr>
         <p:spPr>
           <a:xfrm>
-            <a:off x="4880336" y="1756954"/>
-            <a:ext cx="182880" cy="182880"/>
+            <a:off x="4852904" y="1729522"/>
+            <a:ext cx="237744" cy="237744"/>
           </a:xfrm>
           <a:prstGeom prst="diamond">
             <a:avLst/>
           </a:prstGeom>
-          <a:noFill/>
-          <a:ln w="19050">
+          <a:solidFill>
+            <a:srgbClr val="D4A300"/>
+          </a:solidFill>
+          <a:ln w="12700">
             <a:solidFill>
               <a:srgbClr val="222222"/>
             </a:solidFill>
@@ -13563,7 +13381,7 @@
       </p:sp>
       <p:sp>
         <p:nvSpPr>
-          <p:cNvPr id="29" name="TextBox 28"/>
+          <p:cNvPr id="32" name="TextBox 31"/>
           <p:cNvSpPr txBox="1"/>
           <p:nvPr/>
         </p:nvSpPr>
@@ -13599,7 +13417,7 @@
       </p:sp>
       <p:sp>
         <p:nvSpPr>
-          <p:cNvPr id="30" name="TextBox 29"/>
+          <p:cNvPr id="33" name="TextBox 32"/>
           <p:cNvSpPr txBox="1"/>
           <p:nvPr/>
         </p:nvSpPr>
@@ -13635,7 +13453,7 @@
       </p:sp>
       <p:sp>
         <p:nvSpPr>
-          <p:cNvPr id="31" name="Rectangle 30"/>
+          <p:cNvPr id="34" name="Rectangle 33"/>
           <p:cNvSpPr/>
           <p:nvPr/>
         </p:nvSpPr>
@@ -13648,7 +13466,7 @@
             <a:avLst/>
           </a:prstGeom>
           <a:solidFill>
-            <a:srgbClr val="E9AE9B"/>
+            <a:srgbClr val="F7D7CE"/>
           </a:solidFill>
           <a:ln>
             <a:noFill/>
@@ -13677,15 +13495,51 @@
           </a:p>
         </p:txBody>
       </p:sp>
-      <p:sp>
-        <p:nvSpPr>
-          <p:cNvPr id="32" name="Oval 31"/>
+      <p:cxnSp>
+        <p:nvCxnSpPr>
+          <p:cNvPr id="35" name="Connector 34"/>
+          <p:cNvCxnSpPr/>
+          <p:nvPr/>
+        </p:nvCxnSpPr>
+        <p:spPr>
+          <a:xfrm>
+            <a:off x="6309360" y="2436223"/>
+            <a:ext cx="266548" cy="0"/>
+          </a:xfrm>
+          <a:prstGeom prst="line">
+            <a:avLst/>
+          </a:prstGeom>
+          <a:ln w="15240">
+            <a:solidFill>
+              <a:srgbClr val="0A7D6E"/>
+            </a:solidFill>
+          </a:ln>
+          <a:effectLst/>
+        </p:spPr>
+        <p:style>
+          <a:lnRef idx="2">
+            <a:schemeClr val="accent1"/>
+          </a:lnRef>
+          <a:fillRef idx="0">
+            <a:schemeClr val="accent1"/>
+          </a:fillRef>
+          <a:effectRef idx="1">
+            <a:schemeClr val="accent1"/>
+          </a:effectRef>
+          <a:fontRef idx="minor">
+            <a:schemeClr val="tx1"/>
+          </a:fontRef>
+        </p:style>
+      </p:cxnSp>
+      <p:sp>
+        <p:nvSpPr>
+          <p:cNvPr id="36" name="Oval 35"/>
           <p:cNvSpPr/>
           <p:nvPr/>
         </p:nvSpPr>
         <p:spPr>
           <a:xfrm>
-            <a:off x="6511900" y="2418622"/>
+            <a:off x="6511900" y="2372215"/>
             <a:ext cx="128016" cy="128016"/>
           </a:xfrm>
           <a:prstGeom prst="ellipse">
@@ -13725,14 +13579,14 @@
       </p:sp>
       <p:sp>
         <p:nvSpPr>
-          <p:cNvPr id="33" name="TextBox 32"/>
+          <p:cNvPr id="37" name="TextBox 36"/>
           <p:cNvSpPr txBox="1"/>
           <p:nvPr/>
         </p:nvSpPr>
         <p:spPr>
           <a:xfrm>
-            <a:off x="6255868" y="2190022"/>
-            <a:ext cx="640080" cy="164592"/>
+            <a:off x="6255868" y="2180191"/>
+            <a:ext cx="640080" cy="137160"/>
           </a:xfrm>
           <a:prstGeom prst="rect">
             <a:avLst/>
@@ -13748,7 +13602,7 @@
           <a:p>
             <a:pPr algn="ctr"/>
             <a:r>
-              <a:rPr sz="700" b="0" i="0">
+              <a:rPr sz="600" b="0" i="0">
                 <a:solidFill>
                   <a:srgbClr val="BBBBBB"/>
                 </a:solidFill>
@@ -13759,15 +13613,51 @@
           </a:p>
         </p:txBody>
       </p:sp>
-      <p:sp>
-        <p:nvSpPr>
-          <p:cNvPr id="34" name="Oval 33"/>
+      <p:cxnSp>
+        <p:nvCxnSpPr>
+          <p:cNvPr id="38" name="Connector 37"/>
+          <p:cNvCxnSpPr/>
+          <p:nvPr/>
+        </p:nvCxnSpPr>
+        <p:spPr>
+          <a:xfrm flipH="1">
+            <a:off x="5800496" y="2436223"/>
+            <a:ext cx="508864" cy="0"/>
+          </a:xfrm>
+          <a:prstGeom prst="line">
+            <a:avLst/>
+          </a:prstGeom>
+          <a:ln w="15240">
+            <a:solidFill>
+              <a:srgbClr val="C53E1F"/>
+            </a:solidFill>
+          </a:ln>
+          <a:effectLst/>
+        </p:spPr>
+        <p:style>
+          <a:lnRef idx="2">
+            <a:schemeClr val="accent1"/>
+          </a:lnRef>
+          <a:fillRef idx="0">
+            <a:schemeClr val="accent1"/>
+          </a:fillRef>
+          <a:effectRef idx="1">
+            <a:schemeClr val="accent1"/>
+          </a:effectRef>
+          <a:fontRef idx="minor">
+            <a:schemeClr val="tx1"/>
+          </a:fontRef>
+        </p:style>
+      </p:cxnSp>
+      <p:sp>
+        <p:nvSpPr>
+          <p:cNvPr id="39" name="Oval 38"/>
           <p:cNvSpPr/>
           <p:nvPr/>
         </p:nvSpPr>
         <p:spPr>
           <a:xfrm>
-            <a:off x="5736488" y="2276793"/>
+            <a:off x="5736488" y="2372215"/>
             <a:ext cx="128016" cy="128016"/>
           </a:xfrm>
           <a:prstGeom prst="ellipse">
@@ -13807,14 +13697,14 @@
       </p:sp>
       <p:sp>
         <p:nvSpPr>
-          <p:cNvPr id="35" name="TextBox 34"/>
+          <p:cNvPr id="40" name="TextBox 39"/>
           <p:cNvSpPr txBox="1"/>
           <p:nvPr/>
         </p:nvSpPr>
         <p:spPr>
           <a:xfrm>
-            <a:off x="5480456" y="2048193"/>
-            <a:ext cx="640080" cy="164592"/>
+            <a:off x="5480456" y="2180191"/>
+            <a:ext cx="640080" cy="137160"/>
           </a:xfrm>
           <a:prstGeom prst="rect">
             <a:avLst/>
@@ -13830,7 +13720,7 @@
           <a:p>
             <a:pPr algn="ctr"/>
             <a:r>
-              <a:rPr sz="700" b="0" i="0">
+              <a:rPr sz="600" b="0" i="0">
                 <a:solidFill>
                   <a:srgbClr val="BBBBBB"/>
                 </a:solidFill>
@@ -13841,15 +13731,51 @@
           </a:p>
         </p:txBody>
       </p:sp>
-      <p:sp>
-        <p:nvSpPr>
-          <p:cNvPr id="36" name="Oval 35"/>
+      <p:cxnSp>
+        <p:nvCxnSpPr>
+          <p:cNvPr id="41" name="Connector 40"/>
+          <p:cNvCxnSpPr/>
+          <p:nvPr/>
+        </p:nvCxnSpPr>
+        <p:spPr>
+          <a:xfrm flipH="1">
+            <a:off x="3668116" y="2436223"/>
+            <a:ext cx="2641244" cy="0"/>
+          </a:xfrm>
+          <a:prstGeom prst="line">
+            <a:avLst/>
+          </a:prstGeom>
+          <a:ln w="15240">
+            <a:solidFill>
+              <a:srgbClr val="C53E1F"/>
+            </a:solidFill>
+          </a:ln>
+          <a:effectLst/>
+        </p:spPr>
+        <p:style>
+          <a:lnRef idx="2">
+            <a:schemeClr val="accent1"/>
+          </a:lnRef>
+          <a:fillRef idx="0">
+            <a:schemeClr val="accent1"/>
+          </a:fillRef>
+          <a:effectRef idx="1">
+            <a:schemeClr val="accent1"/>
+          </a:effectRef>
+          <a:fontRef idx="minor">
+            <a:schemeClr val="tx1"/>
+          </a:fontRef>
+        </p:style>
+      </p:cxnSp>
+      <p:sp>
+        <p:nvSpPr>
+          <p:cNvPr id="42" name="Oval 41"/>
           <p:cNvSpPr/>
           <p:nvPr/>
         </p:nvSpPr>
         <p:spPr>
           <a:xfrm>
-            <a:off x="3604108" y="2484049"/>
+            <a:off x="3604108" y="2372215"/>
             <a:ext cx="128016" cy="128016"/>
           </a:xfrm>
           <a:prstGeom prst="ellipse">
@@ -13889,14 +13815,14 @@
       </p:sp>
       <p:sp>
         <p:nvSpPr>
-          <p:cNvPr id="37" name="TextBox 36"/>
+          <p:cNvPr id="43" name="TextBox 42"/>
           <p:cNvSpPr txBox="1"/>
           <p:nvPr/>
         </p:nvSpPr>
         <p:spPr>
           <a:xfrm>
-            <a:off x="3348076" y="2255449"/>
-            <a:ext cx="640080" cy="164592"/>
+            <a:off x="3348076" y="2180191"/>
+            <a:ext cx="640080" cy="137160"/>
           </a:xfrm>
           <a:prstGeom prst="rect">
             <a:avLst/>
@@ -13912,7 +13838,7 @@
           <a:p>
             <a:pPr algn="ctr"/>
             <a:r>
-              <a:rPr sz="700" b="0" i="0">
+              <a:rPr sz="600" b="0" i="0">
                 <a:solidFill>
                   <a:srgbClr val="BBBBBB"/>
                 </a:solidFill>
@@ -13925,20 +13851,22 @@
       </p:sp>
       <p:sp>
         <p:nvSpPr>
-          <p:cNvPr id="38" name="Diamond 37"/>
+          <p:cNvPr id="44" name="Diamond 43"/>
           <p:cNvSpPr/>
           <p:nvPr/>
         </p:nvSpPr>
         <p:spPr>
           <a:xfrm>
-            <a:off x="5260772" y="2344783"/>
-            <a:ext cx="182880" cy="182880"/>
+            <a:off x="5233340" y="2317351"/>
+            <a:ext cx="237744" cy="237744"/>
           </a:xfrm>
           <a:prstGeom prst="diamond">
             <a:avLst/>
           </a:prstGeom>
-          <a:noFill/>
-          <a:ln w="19050">
+          <a:solidFill>
+            <a:srgbClr val="D4A300"/>
+          </a:solidFill>
+          <a:ln w="12700">
             <a:solidFill>
               <a:srgbClr val="222222"/>
             </a:solidFill>
@@ -13969,7 +13897,7 @@
       </p:sp>
       <p:sp>
         <p:nvSpPr>
-          <p:cNvPr id="39" name="TextBox 38"/>
+          <p:cNvPr id="45" name="TextBox 44"/>
           <p:cNvSpPr txBox="1"/>
           <p:nvPr/>
         </p:nvSpPr>
@@ -14005,7 +13933,7 @@
       </p:sp>
       <p:sp>
         <p:nvSpPr>
-          <p:cNvPr id="40" name="TextBox 39"/>
+          <p:cNvPr id="46" name="TextBox 45"/>
           <p:cNvSpPr txBox="1"/>
           <p:nvPr/>
         </p:nvSpPr>
@@ -14041,7 +13969,7 @@
       </p:sp>
       <p:sp>
         <p:nvSpPr>
-          <p:cNvPr id="41" name="Rectangle 40"/>
+          <p:cNvPr id="47" name="Rectangle 46"/>
           <p:cNvSpPr/>
           <p:nvPr/>
         </p:nvSpPr>
@@ -14054,7 +13982,7 @@
             <a:avLst/>
           </a:prstGeom>
           <a:solidFill>
-            <a:srgbClr val="E9AE9B"/>
+            <a:srgbClr val="F7D7CE"/>
           </a:solidFill>
           <a:ln>
             <a:noFill/>
@@ -14083,15 +14011,51 @@
           </a:p>
         </p:txBody>
       </p:sp>
-      <p:sp>
-        <p:nvSpPr>
-          <p:cNvPr id="42" name="Oval 41"/>
+      <p:cxnSp>
+        <p:nvCxnSpPr>
+          <p:cNvPr id="48" name="Connector 47"/>
+          <p:cNvCxnSpPr/>
+          <p:nvPr/>
+        </p:nvCxnSpPr>
+        <p:spPr>
+          <a:xfrm>
+            <a:off x="6309360" y="3024051"/>
+            <a:ext cx="1114654" cy="0"/>
+          </a:xfrm>
+          <a:prstGeom prst="line">
+            <a:avLst/>
+          </a:prstGeom>
+          <a:ln w="15240">
+            <a:solidFill>
+              <a:srgbClr val="0A7D6E"/>
+            </a:solidFill>
+          </a:ln>
+          <a:effectLst/>
+        </p:spPr>
+        <p:style>
+          <a:lnRef idx="2">
+            <a:schemeClr val="accent1"/>
+          </a:lnRef>
+          <a:fillRef idx="0">
+            <a:schemeClr val="accent1"/>
+          </a:fillRef>
+          <a:effectRef idx="1">
+            <a:schemeClr val="accent1"/>
+          </a:effectRef>
+          <a:fontRef idx="minor">
+            <a:schemeClr val="tx1"/>
+          </a:fontRef>
+        </p:style>
+      </p:cxnSp>
+      <p:sp>
+        <p:nvSpPr>
+          <p:cNvPr id="49" name="Oval 48"/>
           <p:cNvSpPr/>
           <p:nvPr/>
         </p:nvSpPr>
         <p:spPr>
           <a:xfrm>
-            <a:off x="7360006" y="3021446"/>
+            <a:off x="7360006" y="2960043"/>
             <a:ext cx="128016" cy="128016"/>
           </a:xfrm>
           <a:prstGeom prst="ellipse">
@@ -14131,14 +14095,14 @@
       </p:sp>
       <p:sp>
         <p:nvSpPr>
-          <p:cNvPr id="43" name="TextBox 42"/>
+          <p:cNvPr id="50" name="TextBox 49"/>
           <p:cNvSpPr txBox="1"/>
           <p:nvPr/>
         </p:nvSpPr>
         <p:spPr>
           <a:xfrm>
-            <a:off x="7103974" y="2792846"/>
-            <a:ext cx="640080" cy="164592"/>
+            <a:off x="7103974" y="2768019"/>
+            <a:ext cx="640080" cy="137160"/>
           </a:xfrm>
           <a:prstGeom prst="rect">
             <a:avLst/>
@@ -14154,7 +14118,7 @@
           <a:p>
             <a:pPr algn="ctr"/>
             <a:r>
-              <a:rPr sz="700" b="0" i="0">
+              <a:rPr sz="600" b="0" i="0">
                 <a:solidFill>
                   <a:srgbClr val="BBBBBB"/>
                 </a:solidFill>
@@ -14165,15 +14129,51 @@
           </a:p>
         </p:txBody>
       </p:sp>
-      <p:sp>
-        <p:nvSpPr>
-          <p:cNvPr id="44" name="Oval 43"/>
+      <p:cxnSp>
+        <p:nvCxnSpPr>
+          <p:cNvPr id="51" name="Connector 50"/>
+          <p:cNvCxnSpPr/>
+          <p:nvPr/>
+        </p:nvCxnSpPr>
+        <p:spPr>
+          <a:xfrm flipH="1">
+            <a:off x="6115507" y="3024051"/>
+            <a:ext cx="193853" cy="0"/>
+          </a:xfrm>
+          <a:prstGeom prst="line">
+            <a:avLst/>
+          </a:prstGeom>
+          <a:ln w="15240">
+            <a:solidFill>
+              <a:srgbClr val="C53E1F"/>
+            </a:solidFill>
+          </a:ln>
+          <a:effectLst/>
+        </p:spPr>
+        <p:style>
+          <a:lnRef idx="2">
+            <a:schemeClr val="accent1"/>
+          </a:lnRef>
+          <a:fillRef idx="0">
+            <a:schemeClr val="accent1"/>
+          </a:fillRef>
+          <a:effectRef idx="1">
+            <a:schemeClr val="accent1"/>
+          </a:effectRef>
+          <a:fontRef idx="minor">
+            <a:schemeClr val="tx1"/>
+          </a:fontRef>
+        </p:style>
+      </p:cxnSp>
+      <p:sp>
+        <p:nvSpPr>
+          <p:cNvPr id="52" name="Oval 51"/>
           <p:cNvSpPr/>
           <p:nvPr/>
         </p:nvSpPr>
         <p:spPr>
           <a:xfrm>
-            <a:off x="6051499" y="3027306"/>
+            <a:off x="6051499" y="2960043"/>
             <a:ext cx="128016" cy="128016"/>
           </a:xfrm>
           <a:prstGeom prst="ellipse">
@@ -14213,14 +14213,14 @@
       </p:sp>
       <p:sp>
         <p:nvSpPr>
-          <p:cNvPr id="45" name="TextBox 44"/>
+          <p:cNvPr id="53" name="TextBox 52"/>
           <p:cNvSpPr txBox="1"/>
           <p:nvPr/>
         </p:nvSpPr>
         <p:spPr>
           <a:xfrm>
-            <a:off x="5795467" y="2798706"/>
-            <a:ext cx="640080" cy="164592"/>
+            <a:off x="5795467" y="2768019"/>
+            <a:ext cx="640080" cy="137160"/>
           </a:xfrm>
           <a:prstGeom prst="rect">
             <a:avLst/>
@@ -14236,7 +14236,7 @@
           <a:p>
             <a:pPr algn="ctr"/>
             <a:r>
-              <a:rPr sz="700" b="0" i="0">
+              <a:rPr sz="600" b="0" i="0">
                 <a:solidFill>
                   <a:srgbClr val="BBBBBB"/>
                 </a:solidFill>
@@ -14247,15 +14247,51 @@
           </a:p>
         </p:txBody>
       </p:sp>
-      <p:sp>
-        <p:nvSpPr>
-          <p:cNvPr id="46" name="Oval 45"/>
+      <p:cxnSp>
+        <p:nvCxnSpPr>
+          <p:cNvPr id="54" name="Connector 53"/>
+          <p:cNvCxnSpPr/>
+          <p:nvPr/>
+        </p:nvCxnSpPr>
+        <p:spPr>
+          <a:xfrm flipH="1">
+            <a:off x="2771546" y="3024051"/>
+            <a:ext cx="3537814" cy="0"/>
+          </a:xfrm>
+          <a:prstGeom prst="line">
+            <a:avLst/>
+          </a:prstGeom>
+          <a:ln w="15240">
+            <a:solidFill>
+              <a:srgbClr val="C53E1F"/>
+            </a:solidFill>
+          </a:ln>
+          <a:effectLst/>
+        </p:spPr>
+        <p:style>
+          <a:lnRef idx="2">
+            <a:schemeClr val="accent1"/>
+          </a:lnRef>
+          <a:fillRef idx="0">
+            <a:schemeClr val="accent1"/>
+          </a:fillRef>
+          <a:effectRef idx="1">
+            <a:schemeClr val="accent1"/>
+          </a:effectRef>
+          <a:fontRef idx="minor">
+            <a:schemeClr val="tx1"/>
+          </a:fontRef>
+        </p:style>
+      </p:cxnSp>
+      <p:sp>
+        <p:nvSpPr>
+          <p:cNvPr id="55" name="Oval 54"/>
           <p:cNvSpPr/>
           <p:nvPr/>
         </p:nvSpPr>
         <p:spPr>
           <a:xfrm>
-            <a:off x="2707538" y="2872601"/>
+            <a:off x="2707538" y="2960043"/>
             <a:ext cx="128016" cy="128016"/>
           </a:xfrm>
           <a:prstGeom prst="ellipse">
@@ -14295,14 +14331,14 @@
       </p:sp>
       <p:sp>
         <p:nvSpPr>
-          <p:cNvPr id="47" name="TextBox 46"/>
+          <p:cNvPr id="56" name="TextBox 55"/>
           <p:cNvSpPr txBox="1"/>
           <p:nvPr/>
         </p:nvSpPr>
         <p:spPr>
           <a:xfrm>
-            <a:off x="2451506" y="2644001"/>
-            <a:ext cx="640080" cy="164592"/>
+            <a:off x="2451506" y="2768019"/>
+            <a:ext cx="640080" cy="137160"/>
           </a:xfrm>
           <a:prstGeom prst="rect">
             <a:avLst/>
@@ -14318,7 +14354,7 @@
           <a:p>
             <a:pPr algn="ctr"/>
             <a:r>
-              <a:rPr sz="700" b="0" i="0">
+              <a:rPr sz="600" b="0" i="0">
                 <a:solidFill>
                   <a:srgbClr val="BBBBBB"/>
                 </a:solidFill>
@@ -14331,20 +14367,22 @@
       </p:sp>
       <p:sp>
         <p:nvSpPr>
-          <p:cNvPr id="48" name="Diamond 47"/>
+          <p:cNvPr id="57" name="Diamond 56"/>
           <p:cNvSpPr/>
           <p:nvPr/>
         </p:nvSpPr>
         <p:spPr>
           <a:xfrm>
-            <a:off x="5340736" y="2932611"/>
-            <a:ext cx="182880" cy="182880"/>
+            <a:off x="5313304" y="2905179"/>
+            <a:ext cx="237744" cy="237744"/>
           </a:xfrm>
           <a:prstGeom prst="diamond">
             <a:avLst/>
           </a:prstGeom>
-          <a:noFill/>
-          <a:ln w="19050">
+          <a:solidFill>
+            <a:srgbClr val="D4A300"/>
+          </a:solidFill>
+          <a:ln w="12700">
             <a:solidFill>
               <a:srgbClr val="222222"/>
             </a:solidFill>
@@ -14375,7 +14413,7 @@
       </p:sp>
       <p:sp>
         <p:nvSpPr>
-          <p:cNvPr id="49" name="TextBox 48"/>
+          <p:cNvPr id="58" name="TextBox 57"/>
           <p:cNvSpPr txBox="1"/>
           <p:nvPr/>
         </p:nvSpPr>
@@ -14411,7 +14449,7 @@
       </p:sp>
       <p:sp>
         <p:nvSpPr>
-          <p:cNvPr id="50" name="TextBox 49"/>
+          <p:cNvPr id="59" name="TextBox 58"/>
           <p:cNvSpPr txBox="1"/>
           <p:nvPr/>
         </p:nvSpPr>
@@ -14447,7 +14485,7 @@
       </p:sp>
       <p:sp>
         <p:nvSpPr>
-          <p:cNvPr id="51" name="Rectangle 50"/>
+          <p:cNvPr id="60" name="Rectangle 59"/>
           <p:cNvSpPr/>
           <p:nvPr/>
         </p:nvSpPr>
@@ -14460,7 +14498,7 @@
             <a:avLst/>
           </a:prstGeom>
           <a:solidFill>
-            <a:srgbClr val="9FC9BE"/>
+            <a:srgbClr val="D6EDE4"/>
           </a:solidFill>
           <a:ln>
             <a:noFill/>
@@ -14489,15 +14527,51 @@
           </a:p>
         </p:txBody>
       </p:sp>
-      <p:sp>
-        <p:nvSpPr>
-          <p:cNvPr id="52" name="Oval 51"/>
+      <p:cxnSp>
+        <p:nvCxnSpPr>
+          <p:cNvPr id="61" name="Connector 60"/>
+          <p:cNvCxnSpPr/>
+          <p:nvPr/>
+        </p:nvCxnSpPr>
+        <p:spPr>
+          <a:xfrm>
+            <a:off x="6309360" y="3611880"/>
+            <a:ext cx="678485" cy="0"/>
+          </a:xfrm>
+          <a:prstGeom prst="line">
+            <a:avLst/>
+          </a:prstGeom>
+          <a:ln w="15240">
+            <a:solidFill>
+              <a:srgbClr val="0A7D6E"/>
+            </a:solidFill>
+          </a:ln>
+          <a:effectLst/>
+        </p:spPr>
+        <p:style>
+          <a:lnRef idx="2">
+            <a:schemeClr val="accent1"/>
+          </a:lnRef>
+          <a:fillRef idx="0">
+            <a:schemeClr val="accent1"/>
+          </a:fillRef>
+          <a:effectRef idx="1">
+            <a:schemeClr val="accent1"/>
+          </a:effectRef>
+          <a:fontRef idx="minor">
+            <a:schemeClr val="tx1"/>
+          </a:fontRef>
+        </p:style>
+      </p:cxnSp>
+      <p:sp>
+        <p:nvSpPr>
+          <p:cNvPr id="62" name="Oval 61"/>
           <p:cNvSpPr/>
           <p:nvPr/>
         </p:nvSpPr>
         <p:spPr>
           <a:xfrm>
-            <a:off x="6923837" y="3536206"/>
+            <a:off x="6923837" y="3547872"/>
             <a:ext cx="128016" cy="128016"/>
           </a:xfrm>
           <a:prstGeom prst="ellipse">
@@ -14537,14 +14611,14 @@
       </p:sp>
       <p:sp>
         <p:nvSpPr>
-          <p:cNvPr id="53" name="TextBox 52"/>
+          <p:cNvPr id="63" name="TextBox 62"/>
           <p:cNvSpPr txBox="1"/>
           <p:nvPr/>
         </p:nvSpPr>
         <p:spPr>
           <a:xfrm>
-            <a:off x="6667805" y="3307606"/>
-            <a:ext cx="640080" cy="164592"/>
+            <a:off x="6667805" y="3355848"/>
+            <a:ext cx="640080" cy="137160"/>
           </a:xfrm>
           <a:prstGeom prst="rect">
             <a:avLst/>
@@ -14560,7 +14634,7 @@
           <a:p>
             <a:pPr algn="ctr"/>
             <a:r>
-              <a:rPr sz="700" b="0" i="0">
+              <a:rPr sz="600" b="0" i="0">
                 <a:solidFill>
                   <a:srgbClr val="BBBBBB"/>
                 </a:solidFill>
@@ -14571,15 +14645,51 @@
           </a:p>
         </p:txBody>
       </p:sp>
-      <p:sp>
-        <p:nvSpPr>
-          <p:cNvPr id="54" name="Oval 53"/>
+      <p:cxnSp>
+        <p:nvCxnSpPr>
+          <p:cNvPr id="64" name="Connector 63"/>
+          <p:cNvCxnSpPr/>
+          <p:nvPr/>
+        </p:nvCxnSpPr>
+        <p:spPr>
+          <a:xfrm flipH="1">
+            <a:off x="5291633" y="3611880"/>
+            <a:ext cx="1017727" cy="0"/>
+          </a:xfrm>
+          <a:prstGeom prst="line">
+            <a:avLst/>
+          </a:prstGeom>
+          <a:ln w="15240">
+            <a:solidFill>
+              <a:srgbClr val="C53E1F"/>
+            </a:solidFill>
+          </a:ln>
+          <a:effectLst/>
+        </p:spPr>
+        <p:style>
+          <a:lnRef idx="2">
+            <a:schemeClr val="accent1"/>
+          </a:lnRef>
+          <a:fillRef idx="0">
+            <a:schemeClr val="accent1"/>
+          </a:fillRef>
+          <a:effectRef idx="1">
+            <a:schemeClr val="accent1"/>
+          </a:effectRef>
+          <a:fontRef idx="minor">
+            <a:schemeClr val="tx1"/>
+          </a:fontRef>
+        </p:style>
+      </p:cxnSp>
+      <p:sp>
+        <p:nvSpPr>
+          <p:cNvPr id="65" name="Oval 64"/>
           <p:cNvSpPr/>
           <p:nvPr/>
         </p:nvSpPr>
         <p:spPr>
           <a:xfrm>
-            <a:off x="5227625" y="3517493"/>
+            <a:off x="5227625" y="3547872"/>
             <a:ext cx="128016" cy="128016"/>
           </a:xfrm>
           <a:prstGeom prst="ellipse">
@@ -14619,14 +14729,14 @@
       </p:sp>
       <p:sp>
         <p:nvSpPr>
-          <p:cNvPr id="55" name="TextBox 54"/>
+          <p:cNvPr id="66" name="TextBox 65"/>
           <p:cNvSpPr txBox="1"/>
           <p:nvPr/>
         </p:nvSpPr>
         <p:spPr>
           <a:xfrm>
-            <a:off x="4971593" y="3288893"/>
-            <a:ext cx="640080" cy="164592"/>
+            <a:off x="4971593" y="3355848"/>
+            <a:ext cx="640080" cy="137160"/>
           </a:xfrm>
           <a:prstGeom prst="rect">
             <a:avLst/>
@@ -14642,7 +14752,7 @@
           <a:p>
             <a:pPr algn="ctr"/>
             <a:r>
-              <a:rPr sz="700" b="0" i="0">
+              <a:rPr sz="600" b="0" i="0">
                 <a:solidFill>
                   <a:srgbClr val="BBBBBB"/>
                 </a:solidFill>
@@ -14653,15 +14763,51 @@
           </a:p>
         </p:txBody>
       </p:sp>
-      <p:sp>
-        <p:nvSpPr>
-          <p:cNvPr id="56" name="Oval 55"/>
+      <p:cxnSp>
+        <p:nvCxnSpPr>
+          <p:cNvPr id="67" name="Connector 66"/>
+          <p:cNvCxnSpPr/>
+          <p:nvPr/>
+        </p:nvCxnSpPr>
+        <p:spPr>
+          <a:xfrm>
+            <a:off x="6309360" y="3611880"/>
+            <a:ext cx="678485" cy="0"/>
+          </a:xfrm>
+          <a:prstGeom prst="line">
+            <a:avLst/>
+          </a:prstGeom>
+          <a:ln w="15240">
+            <a:solidFill>
+              <a:srgbClr val="C53E1F"/>
+            </a:solidFill>
+          </a:ln>
+          <a:effectLst/>
+        </p:spPr>
+        <p:style>
+          <a:lnRef idx="2">
+            <a:schemeClr val="accent1"/>
+          </a:lnRef>
+          <a:fillRef idx="0">
+            <a:schemeClr val="accent1"/>
+          </a:fillRef>
+          <a:effectRef idx="1">
+            <a:schemeClr val="accent1"/>
+          </a:effectRef>
+          <a:fontRef idx="minor">
+            <a:schemeClr val="tx1"/>
+          </a:fontRef>
+        </p:style>
+      </p:cxnSp>
+      <p:sp>
+        <p:nvSpPr>
+          <p:cNvPr id="68" name="Oval 67"/>
           <p:cNvSpPr/>
           <p:nvPr/>
         </p:nvSpPr>
         <p:spPr>
           <a:xfrm>
-            <a:off x="6923837" y="3648218"/>
+            <a:off x="6923837" y="3547872"/>
             <a:ext cx="128016" cy="128016"/>
           </a:xfrm>
           <a:prstGeom prst="ellipse">
@@ -14701,14 +14847,14 @@
       </p:sp>
       <p:sp>
         <p:nvSpPr>
-          <p:cNvPr id="57" name="TextBox 56"/>
+          <p:cNvPr id="69" name="TextBox 68"/>
           <p:cNvSpPr txBox="1"/>
           <p:nvPr/>
         </p:nvSpPr>
         <p:spPr>
           <a:xfrm>
-            <a:off x="6667805" y="3419618"/>
-            <a:ext cx="640080" cy="164592"/>
+            <a:off x="6667805" y="3355848"/>
+            <a:ext cx="640080" cy="137160"/>
           </a:xfrm>
           <a:prstGeom prst="rect">
             <a:avLst/>
@@ -14724,7 +14870,7 @@
           <a:p>
             <a:pPr algn="ctr"/>
             <a:r>
-              <a:rPr sz="700" b="0" i="0">
+              <a:rPr sz="600" b="0" i="0">
                 <a:solidFill>
                   <a:srgbClr val="BBBBBB"/>
                 </a:solidFill>
@@ -14737,20 +14883,22 @@
       </p:sp>
       <p:sp>
         <p:nvSpPr>
-          <p:cNvPr id="58" name="Diamond 57"/>
+          <p:cNvPr id="70" name="Diamond 69"/>
           <p:cNvSpPr/>
           <p:nvPr/>
         </p:nvSpPr>
         <p:spPr>
           <a:xfrm>
-            <a:off x="6334232" y="3520440"/>
-            <a:ext cx="182880" cy="182880"/>
+            <a:off x="6306800" y="3493008"/>
+            <a:ext cx="237744" cy="237744"/>
           </a:xfrm>
           <a:prstGeom prst="diamond">
             <a:avLst/>
           </a:prstGeom>
-          <a:noFill/>
-          <a:ln w="19050">
+          <a:solidFill>
+            <a:srgbClr val="D4A300"/>
+          </a:solidFill>
+          <a:ln w="12700">
             <a:solidFill>
               <a:srgbClr val="222222"/>
             </a:solidFill>
@@ -14781,7 +14929,7 @@
       </p:sp>
       <p:sp>
         <p:nvSpPr>
-          <p:cNvPr id="59" name="TextBox 58"/>
+          <p:cNvPr id="71" name="TextBox 70"/>
           <p:cNvSpPr txBox="1"/>
           <p:nvPr/>
         </p:nvSpPr>
@@ -14817,7 +14965,7 @@
       </p:sp>
       <p:sp>
         <p:nvSpPr>
-          <p:cNvPr id="60" name="TextBox 59"/>
+          <p:cNvPr id="72" name="TextBox 71"/>
           <p:cNvSpPr txBox="1"/>
           <p:nvPr/>
         </p:nvSpPr>
@@ -14853,7 +15001,7 @@
       </p:sp>
       <p:sp>
         <p:nvSpPr>
-          <p:cNvPr id="61" name="Rectangle 60"/>
+          <p:cNvPr id="73" name="Rectangle 72"/>
           <p:cNvSpPr/>
           <p:nvPr/>
         </p:nvSpPr>
@@ -14866,7 +15014,7 @@
             <a:avLst/>
           </a:prstGeom>
           <a:solidFill>
-            <a:srgbClr val="9FC9BE"/>
+            <a:srgbClr val="D6EDE4"/>
           </a:solidFill>
           <a:ln>
             <a:noFill/>
@@ -14895,15 +15043,51 @@
           </a:p>
         </p:txBody>
       </p:sp>
-      <p:sp>
-        <p:nvSpPr>
-          <p:cNvPr id="62" name="Oval 61"/>
+      <p:cxnSp>
+        <p:nvCxnSpPr>
+          <p:cNvPr id="74" name="Connector 73"/>
+          <p:cNvCxnSpPr/>
+          <p:nvPr/>
+        </p:nvCxnSpPr>
+        <p:spPr>
+          <a:xfrm>
+            <a:off x="6309360" y="4199709"/>
+            <a:ext cx="24232" cy="0"/>
+          </a:xfrm>
+          <a:prstGeom prst="line">
+            <a:avLst/>
+          </a:prstGeom>
+          <a:ln w="15240">
+            <a:solidFill>
+              <a:srgbClr val="0A7D6E"/>
+            </a:solidFill>
+          </a:ln>
+          <a:effectLst/>
+        </p:spPr>
+        <p:style>
+          <a:lnRef idx="2">
+            <a:schemeClr val="accent1"/>
+          </a:lnRef>
+          <a:fillRef idx="0">
+            <a:schemeClr val="accent1"/>
+          </a:fillRef>
+          <a:effectRef idx="1">
+            <a:schemeClr val="accent1"/>
+          </a:effectRef>
+          <a:fontRef idx="minor">
+            <a:schemeClr val="tx1"/>
+          </a:fontRef>
+        </p:style>
+      </p:cxnSp>
+      <p:sp>
+        <p:nvSpPr>
+          <p:cNvPr id="75" name="Oval 74"/>
           <p:cNvSpPr/>
           <p:nvPr/>
         </p:nvSpPr>
         <p:spPr>
           <a:xfrm>
-            <a:off x="6269584" y="4169528"/>
+            <a:off x="6269584" y="4135701"/>
             <a:ext cx="128016" cy="128016"/>
           </a:xfrm>
           <a:prstGeom prst="ellipse">
@@ -14943,14 +15127,14 @@
       </p:sp>
       <p:sp>
         <p:nvSpPr>
-          <p:cNvPr id="63" name="TextBox 62"/>
+          <p:cNvPr id="76" name="TextBox 75"/>
           <p:cNvSpPr txBox="1"/>
           <p:nvPr/>
         </p:nvSpPr>
         <p:spPr>
           <a:xfrm>
-            <a:off x="6013552" y="3940928"/>
-            <a:ext cx="640080" cy="164592"/>
+            <a:off x="6013552" y="3943677"/>
+            <a:ext cx="640080" cy="137160"/>
           </a:xfrm>
           <a:prstGeom prst="rect">
             <a:avLst/>
@@ -14966,7 +15150,7 @@
           <a:p>
             <a:pPr algn="ctr"/>
             <a:r>
-              <a:rPr sz="700" b="0" i="0">
+              <a:rPr sz="600" b="0" i="0">
                 <a:solidFill>
                   <a:srgbClr val="BBBBBB"/>
                 </a:solidFill>
@@ -14977,15 +15161,51 @@
           </a:p>
         </p:txBody>
       </p:sp>
-      <p:sp>
-        <p:nvSpPr>
-          <p:cNvPr id="64" name="Oval 63"/>
+      <p:cxnSp>
+        <p:nvCxnSpPr>
+          <p:cNvPr id="77" name="Connector 76"/>
+          <p:cNvCxnSpPr/>
+          <p:nvPr/>
+        </p:nvCxnSpPr>
+        <p:spPr>
+          <a:xfrm flipH="1">
+            <a:off x="3910432" y="4199709"/>
+            <a:ext cx="2398928" cy="0"/>
+          </a:xfrm>
+          <a:prstGeom prst="line">
+            <a:avLst/>
+          </a:prstGeom>
+          <a:ln w="15240">
+            <a:solidFill>
+              <a:srgbClr val="C53E1F"/>
+            </a:solidFill>
+          </a:ln>
+          <a:effectLst/>
+        </p:spPr>
+        <p:style>
+          <a:lnRef idx="2">
+            <a:schemeClr val="accent1"/>
+          </a:lnRef>
+          <a:fillRef idx="0">
+            <a:schemeClr val="accent1"/>
+          </a:fillRef>
+          <a:effectRef idx="1">
+            <a:schemeClr val="accent1"/>
+          </a:effectRef>
+          <a:fontRef idx="minor">
+            <a:schemeClr val="tx1"/>
+          </a:fontRef>
+        </p:style>
+      </p:cxnSp>
+      <p:sp>
+        <p:nvSpPr>
+          <p:cNvPr id="78" name="Oval 77"/>
           <p:cNvSpPr/>
           <p:nvPr/>
         </p:nvSpPr>
         <p:spPr>
           <a:xfrm>
-            <a:off x="3846424" y="4211592"/>
+            <a:off x="3846424" y="4135701"/>
             <a:ext cx="128016" cy="128016"/>
           </a:xfrm>
           <a:prstGeom prst="ellipse">
@@ -15025,14 +15245,14 @@
       </p:sp>
       <p:sp>
         <p:nvSpPr>
-          <p:cNvPr id="65" name="TextBox 64"/>
+          <p:cNvPr id="79" name="TextBox 78"/>
           <p:cNvSpPr txBox="1"/>
           <p:nvPr/>
         </p:nvSpPr>
         <p:spPr>
           <a:xfrm>
-            <a:off x="3590392" y="3982992"/>
-            <a:ext cx="640080" cy="164592"/>
+            <a:off x="3590392" y="3943677"/>
+            <a:ext cx="640080" cy="137160"/>
           </a:xfrm>
           <a:prstGeom prst="rect">
             <a:avLst/>
@@ -15048,7 +15268,7 @@
           <a:p>
             <a:pPr algn="ctr"/>
             <a:r>
-              <a:rPr sz="700" b="0" i="0">
+              <a:rPr sz="600" b="0" i="0">
                 <a:solidFill>
                   <a:srgbClr val="BBBBBB"/>
                 </a:solidFill>
@@ -15059,15 +15279,51 @@
           </a:p>
         </p:txBody>
       </p:sp>
-      <p:sp>
-        <p:nvSpPr>
-          <p:cNvPr id="66" name="Oval 65"/>
+      <p:cxnSp>
+        <p:nvCxnSpPr>
+          <p:cNvPr id="80" name="Connector 79"/>
+          <p:cNvCxnSpPr/>
+          <p:nvPr/>
+        </p:nvCxnSpPr>
+        <p:spPr>
+          <a:xfrm flipH="1">
+            <a:off x="2650388" y="4199709"/>
+            <a:ext cx="3658972" cy="0"/>
+          </a:xfrm>
+          <a:prstGeom prst="line">
+            <a:avLst/>
+          </a:prstGeom>
+          <a:ln w="15240">
+            <a:solidFill>
+              <a:srgbClr val="C53E1F"/>
+            </a:solidFill>
+          </a:ln>
+          <a:effectLst/>
+        </p:spPr>
+        <p:style>
+          <a:lnRef idx="2">
+            <a:schemeClr val="accent1"/>
+          </a:lnRef>
+          <a:fillRef idx="0">
+            <a:schemeClr val="accent1"/>
+          </a:fillRef>
+          <a:effectRef idx="1">
+            <a:schemeClr val="accent1"/>
+          </a:effectRef>
+          <a:fontRef idx="minor">
+            <a:schemeClr val="tx1"/>
+          </a:fontRef>
+        </p:style>
+      </p:cxnSp>
+      <p:sp>
+        <p:nvSpPr>
+          <p:cNvPr id="81" name="Oval 80"/>
           <p:cNvSpPr/>
           <p:nvPr/>
         </p:nvSpPr>
         <p:spPr>
           <a:xfrm>
-            <a:off x="2586380" y="4122395"/>
+            <a:off x="2586380" y="4135701"/>
             <a:ext cx="128016" cy="128016"/>
           </a:xfrm>
           <a:prstGeom prst="ellipse">
@@ -15107,14 +15363,14 @@
       </p:sp>
       <p:sp>
         <p:nvSpPr>
-          <p:cNvPr id="67" name="TextBox 66"/>
+          <p:cNvPr id="82" name="TextBox 81"/>
           <p:cNvSpPr txBox="1"/>
           <p:nvPr/>
         </p:nvSpPr>
         <p:spPr>
           <a:xfrm>
-            <a:off x="2330348" y="3893795"/>
-            <a:ext cx="640080" cy="164592"/>
+            <a:off x="2330348" y="3943677"/>
+            <a:ext cx="640080" cy="137160"/>
           </a:xfrm>
           <a:prstGeom prst="rect">
             <a:avLst/>
@@ -15130,7 +15386,7 @@
           <a:p>
             <a:pPr algn="ctr"/>
             <a:r>
-              <a:rPr sz="700" b="0" i="0">
+              <a:rPr sz="600" b="0" i="0">
                 <a:solidFill>
                   <a:srgbClr val="BBBBBB"/>
                 </a:solidFill>
@@ -15143,20 +15399,22 @@
       </p:sp>
       <p:sp>
         <p:nvSpPr>
-          <p:cNvPr id="68" name="Diamond 67"/>
+          <p:cNvPr id="83" name="Diamond 82"/>
           <p:cNvSpPr/>
           <p:nvPr/>
         </p:nvSpPr>
         <p:spPr>
           <a:xfrm>
-            <a:off x="4211544" y="4108269"/>
-            <a:ext cx="182880" cy="182880"/>
+            <a:off x="4184112" y="4080837"/>
+            <a:ext cx="237744" cy="237744"/>
           </a:xfrm>
           <a:prstGeom prst="diamond">
             <a:avLst/>
           </a:prstGeom>
-          <a:noFill/>
-          <a:ln w="19050">
+          <a:solidFill>
+            <a:srgbClr val="D4A300"/>
+          </a:solidFill>
+          <a:ln w="12700">
             <a:solidFill>
               <a:srgbClr val="222222"/>
             </a:solidFill>
@@ -15187,7 +15445,7 @@
       </p:sp>
       <p:sp>
         <p:nvSpPr>
-          <p:cNvPr id="69" name="TextBox 68"/>
+          <p:cNvPr id="84" name="TextBox 83"/>
           <p:cNvSpPr txBox="1"/>
           <p:nvPr/>
         </p:nvSpPr>
@@ -15223,7 +15481,7 @@
       </p:sp>
       <p:sp>
         <p:nvSpPr>
-          <p:cNvPr id="70" name="TextBox 69"/>
+          <p:cNvPr id="85" name="TextBox 84"/>
           <p:cNvSpPr txBox="1"/>
           <p:nvPr/>
         </p:nvSpPr>
@@ -15259,7 +15517,7 @@
       </p:sp>
       <p:sp>
         <p:nvSpPr>
-          <p:cNvPr id="71" name="Rectangle 70"/>
+          <p:cNvPr id="86" name="Rectangle 85"/>
           <p:cNvSpPr/>
           <p:nvPr/>
         </p:nvSpPr>
@@ -15272,7 +15530,7 @@
             <a:avLst/>
           </a:prstGeom>
           <a:solidFill>
-            <a:srgbClr val="9FC9BE"/>
+            <a:srgbClr val="D6EDE4"/>
           </a:solidFill>
           <a:ln>
             <a:noFill/>
@@ -15301,15 +15559,51 @@
           </a:p>
         </p:txBody>
       </p:sp>
-      <p:sp>
-        <p:nvSpPr>
-          <p:cNvPr id="72" name="Oval 71"/>
+      <p:cxnSp>
+        <p:nvCxnSpPr>
+          <p:cNvPr id="87" name="Connector 86"/>
+          <p:cNvCxnSpPr/>
+          <p:nvPr/>
+        </p:nvCxnSpPr>
+        <p:spPr>
+          <a:xfrm flipH="1">
+            <a:off x="4225442" y="4787537"/>
+            <a:ext cx="2083918" cy="0"/>
+          </a:xfrm>
+          <a:prstGeom prst="line">
+            <a:avLst/>
+          </a:prstGeom>
+          <a:ln w="15240">
+            <a:solidFill>
+              <a:srgbClr val="0A7D6E"/>
+            </a:solidFill>
+          </a:ln>
+          <a:effectLst/>
+        </p:spPr>
+        <p:style>
+          <a:lnRef idx="2">
+            <a:schemeClr val="accent1"/>
+          </a:lnRef>
+          <a:fillRef idx="0">
+            <a:schemeClr val="accent1"/>
+          </a:fillRef>
+          <a:effectRef idx="1">
+            <a:schemeClr val="accent1"/>
+          </a:effectRef>
+          <a:fontRef idx="minor">
+            <a:schemeClr val="tx1"/>
+          </a:fontRef>
+        </p:style>
+      </p:cxnSp>
+      <p:sp>
+        <p:nvSpPr>
+          <p:cNvPr id="88" name="Oval 87"/>
           <p:cNvSpPr/>
           <p:nvPr/>
         </p:nvSpPr>
         <p:spPr>
           <a:xfrm>
-            <a:off x="4161434" y="4659394"/>
+            <a:off x="4161434" y="4723529"/>
             <a:ext cx="128016" cy="128016"/>
           </a:xfrm>
           <a:prstGeom prst="ellipse">
@@ -15349,14 +15643,14 @@
       </p:sp>
       <p:sp>
         <p:nvSpPr>
-          <p:cNvPr id="73" name="TextBox 72"/>
+          <p:cNvPr id="89" name="TextBox 88"/>
           <p:cNvSpPr txBox="1"/>
           <p:nvPr/>
         </p:nvSpPr>
         <p:spPr>
           <a:xfrm>
-            <a:off x="3905402" y="4430794"/>
-            <a:ext cx="640080" cy="164592"/>
+            <a:off x="3905402" y="4531505"/>
+            <a:ext cx="640080" cy="137160"/>
           </a:xfrm>
           <a:prstGeom prst="rect">
             <a:avLst/>
@@ -15372,7 +15666,7 @@
           <a:p>
             <a:pPr algn="ctr"/>
             <a:r>
-              <a:rPr sz="700" b="0" i="0">
+              <a:rPr sz="600" b="0" i="0">
                 <a:solidFill>
                   <a:srgbClr val="BBBBBB"/>
                 </a:solidFill>
@@ -15383,15 +15677,51 @@
           </a:p>
         </p:txBody>
       </p:sp>
-      <p:sp>
-        <p:nvSpPr>
-          <p:cNvPr id="74" name="Oval 73"/>
+      <p:cxnSp>
+        <p:nvCxnSpPr>
+          <p:cNvPr id="90" name="Connector 89"/>
+          <p:cNvCxnSpPr/>
+          <p:nvPr/>
+        </p:nvCxnSpPr>
+        <p:spPr>
+          <a:xfrm flipH="1">
+            <a:off x="4225442" y="4787537"/>
+            <a:ext cx="2083918" cy="0"/>
+          </a:xfrm>
+          <a:prstGeom prst="line">
+            <a:avLst/>
+          </a:prstGeom>
+          <a:ln w="15240">
+            <a:solidFill>
+              <a:srgbClr val="C53E1F"/>
+            </a:solidFill>
+          </a:ln>
+          <a:effectLst/>
+        </p:spPr>
+        <p:style>
+          <a:lnRef idx="2">
+            <a:schemeClr val="accent1"/>
+          </a:lnRef>
+          <a:fillRef idx="0">
+            <a:schemeClr val="accent1"/>
+          </a:fillRef>
+          <a:effectRef idx="1">
+            <a:schemeClr val="accent1"/>
+          </a:effectRef>
+          <a:fontRef idx="minor">
+            <a:schemeClr val="tx1"/>
+          </a:fontRef>
+        </p:style>
+      </p:cxnSp>
+      <p:sp>
+        <p:nvSpPr>
+          <p:cNvPr id="91" name="Oval 90"/>
           <p:cNvSpPr/>
           <p:nvPr/>
         </p:nvSpPr>
         <p:spPr>
           <a:xfrm>
-            <a:off x="4161434" y="4736364"/>
+            <a:off x="4161434" y="4723529"/>
             <a:ext cx="128016" cy="128016"/>
           </a:xfrm>
           <a:prstGeom prst="ellipse">
@@ -15431,14 +15761,14 @@
       </p:sp>
       <p:sp>
         <p:nvSpPr>
-          <p:cNvPr id="75" name="TextBox 74"/>
+          <p:cNvPr id="92" name="TextBox 91"/>
           <p:cNvSpPr txBox="1"/>
           <p:nvPr/>
         </p:nvSpPr>
         <p:spPr>
           <a:xfrm>
-            <a:off x="3905402" y="4507764"/>
-            <a:ext cx="640080" cy="164592"/>
+            <a:off x="3905402" y="4531505"/>
+            <a:ext cx="640080" cy="137160"/>
           </a:xfrm>
           <a:prstGeom prst="rect">
             <a:avLst/>
@@ -15454,7 +15784,7 @@
           <a:p>
             <a:pPr algn="ctr"/>
             <a:r>
-              <a:rPr sz="700" b="0" i="0">
+              <a:rPr sz="600" b="0" i="0">
                 <a:solidFill>
                   <a:srgbClr val="BBBBBB"/>
                 </a:solidFill>
@@ -15465,15 +15795,51 @@
           </a:p>
         </p:txBody>
       </p:sp>
-      <p:sp>
-        <p:nvSpPr>
-          <p:cNvPr id="76" name="Oval 75"/>
+      <p:cxnSp>
+        <p:nvCxnSpPr>
+          <p:cNvPr id="93" name="Connector 92"/>
+          <p:cNvCxnSpPr/>
+          <p:nvPr/>
+        </p:nvCxnSpPr>
+        <p:spPr>
+          <a:xfrm flipH="1">
+            <a:off x="1390345" y="4787537"/>
+            <a:ext cx="4919015" cy="0"/>
+          </a:xfrm>
+          <a:prstGeom prst="line">
+            <a:avLst/>
+          </a:prstGeom>
+          <a:ln w="15240">
+            <a:solidFill>
+              <a:srgbClr val="C53E1F"/>
+            </a:solidFill>
+          </a:ln>
+          <a:effectLst/>
+        </p:spPr>
+        <p:style>
+          <a:lnRef idx="2">
+            <a:schemeClr val="accent1"/>
+          </a:lnRef>
+          <a:fillRef idx="0">
+            <a:schemeClr val="accent1"/>
+          </a:fillRef>
+          <a:effectRef idx="1">
+            <a:schemeClr val="accent1"/>
+          </a:effectRef>
+          <a:fontRef idx="minor">
+            <a:schemeClr val="tx1"/>
+          </a:fontRef>
+        </p:style>
+      </p:cxnSp>
+      <p:sp>
+        <p:nvSpPr>
+          <p:cNvPr id="94" name="Oval 93"/>
           <p:cNvSpPr/>
           <p:nvPr/>
         </p:nvSpPr>
         <p:spPr>
           <a:xfrm>
-            <a:off x="1326337" y="4620969"/>
+            <a:off x="1326337" y="4723529"/>
             <a:ext cx="128016" cy="128016"/>
           </a:xfrm>
           <a:prstGeom prst="ellipse">
@@ -15513,14 +15879,14 @@
       </p:sp>
       <p:sp>
         <p:nvSpPr>
-          <p:cNvPr id="77" name="TextBox 76"/>
+          <p:cNvPr id="95" name="TextBox 94"/>
           <p:cNvSpPr txBox="1"/>
           <p:nvPr/>
         </p:nvSpPr>
         <p:spPr>
           <a:xfrm>
-            <a:off x="1070305" y="4392369"/>
-            <a:ext cx="640080" cy="164592"/>
+            <a:off x="1070305" y="4531505"/>
+            <a:ext cx="640080" cy="137160"/>
           </a:xfrm>
           <a:prstGeom prst="rect">
             <a:avLst/>
@@ -15536,7 +15902,7 @@
           <a:p>
             <a:pPr algn="ctr"/>
             <a:r>
-              <a:rPr sz="700" b="0" i="0">
+              <a:rPr sz="600" b="0" i="0">
                 <a:solidFill>
                   <a:srgbClr val="BBBBBB"/>
                 </a:solidFill>
@@ -15549,20 +15915,22 @@
       </p:sp>
       <p:sp>
         <p:nvSpPr>
-          <p:cNvPr id="78" name="Diamond 77"/>
+          <p:cNvPr id="96" name="Diamond 95"/>
           <p:cNvSpPr/>
           <p:nvPr/>
         </p:nvSpPr>
         <p:spPr>
           <a:xfrm>
-            <a:off x="3186547" y="4696097"/>
-            <a:ext cx="182880" cy="182880"/>
+            <a:off x="3159115" y="4668665"/>
+            <a:ext cx="237744" cy="237744"/>
           </a:xfrm>
           <a:prstGeom prst="diamond">
             <a:avLst/>
           </a:prstGeom>
-          <a:noFill/>
-          <a:ln w="19050">
+          <a:solidFill>
+            <a:srgbClr val="D4A300"/>
+          </a:solidFill>
+          <a:ln w="12700">
             <a:solidFill>
               <a:srgbClr val="222222"/>
             </a:solidFill>
@@ -15593,7 +15961,7 @@
       </p:sp>
       <p:sp>
         <p:nvSpPr>
-          <p:cNvPr id="79" name="TextBox 78"/>
+          <p:cNvPr id="97" name="TextBox 96"/>
           <p:cNvSpPr txBox="1"/>
           <p:nvPr/>
         </p:nvSpPr>
@@ -15629,7 +15997,7 @@
       </p:sp>
       <p:sp>
         <p:nvSpPr>
-          <p:cNvPr id="80" name="TextBox 79"/>
+          <p:cNvPr id="98" name="TextBox 97"/>
           <p:cNvSpPr txBox="1"/>
           <p:nvPr/>
         </p:nvSpPr>
@@ -15665,7 +16033,7 @@
       </p:sp>
       <p:sp>
         <p:nvSpPr>
-          <p:cNvPr id="81" name="Rectangle 80"/>
+          <p:cNvPr id="99" name="Rectangle 98"/>
           <p:cNvSpPr/>
           <p:nvPr/>
         </p:nvSpPr>
@@ -15678,7 +16046,7 @@
             <a:avLst/>
           </a:prstGeom>
           <a:solidFill>
-            <a:srgbClr val="9FC9BE"/>
+            <a:srgbClr val="D6EDE4"/>
           </a:solidFill>
           <a:ln>
             <a:noFill/>
@@ -15707,15 +16075,51 @@
           </a:p>
         </p:txBody>
       </p:sp>
-      <p:sp>
-        <p:nvSpPr>
-          <p:cNvPr id="82" name="Oval 81"/>
+      <p:cxnSp>
+        <p:nvCxnSpPr>
+          <p:cNvPr id="100" name="Connector 99"/>
+          <p:cNvCxnSpPr/>
+          <p:nvPr/>
+        </p:nvCxnSpPr>
+        <p:spPr>
+          <a:xfrm>
+            <a:off x="6309360" y="5375366"/>
+            <a:ext cx="411937" cy="0"/>
+          </a:xfrm>
+          <a:prstGeom prst="line">
+            <a:avLst/>
+          </a:prstGeom>
+          <a:ln w="15240">
+            <a:solidFill>
+              <a:srgbClr val="0A7D6E"/>
+            </a:solidFill>
+          </a:ln>
+          <a:effectLst/>
+        </p:spPr>
+        <p:style>
+          <a:lnRef idx="2">
+            <a:schemeClr val="accent1"/>
+          </a:lnRef>
+          <a:fillRef idx="0">
+            <a:schemeClr val="accent1"/>
+          </a:fillRef>
+          <a:effectRef idx="1">
+            <a:schemeClr val="accent1"/>
+          </a:effectRef>
+          <a:fontRef idx="minor">
+            <a:schemeClr val="tx1"/>
+          </a:fontRef>
+        </p:style>
+      </p:cxnSp>
+      <p:sp>
+        <p:nvSpPr>
+          <p:cNvPr id="101" name="Oval 100"/>
           <p:cNvSpPr/>
           <p:nvPr/>
         </p:nvSpPr>
         <p:spPr>
           <a:xfrm>
-            <a:off x="6657289" y="5388394"/>
+            <a:off x="6657289" y="5311358"/>
             <a:ext cx="128016" cy="128016"/>
           </a:xfrm>
           <a:prstGeom prst="ellipse">
@@ -15755,14 +16159,14 @@
       </p:sp>
       <p:sp>
         <p:nvSpPr>
-          <p:cNvPr id="83" name="TextBox 82"/>
+          <p:cNvPr id="102" name="TextBox 101"/>
           <p:cNvSpPr txBox="1"/>
           <p:nvPr/>
         </p:nvSpPr>
         <p:spPr>
           <a:xfrm>
-            <a:off x="6401257" y="5159794"/>
-            <a:ext cx="640080" cy="164592"/>
+            <a:off x="6401257" y="5119334"/>
+            <a:ext cx="640080" cy="137160"/>
           </a:xfrm>
           <a:prstGeom prst="rect">
             <a:avLst/>
@@ -15778,7 +16182,7 @@
           <a:p>
             <a:pPr algn="ctr"/>
             <a:r>
-              <a:rPr sz="700" b="0" i="0">
+              <a:rPr sz="600" b="0" i="0">
                 <a:solidFill>
                   <a:srgbClr val="BBBBBB"/>
                 </a:solidFill>
@@ -15789,15 +16193,51 @@
           </a:p>
         </p:txBody>
       </p:sp>
-      <p:sp>
-        <p:nvSpPr>
-          <p:cNvPr id="84" name="Oval 83"/>
+      <p:cxnSp>
+        <p:nvCxnSpPr>
+          <p:cNvPr id="103" name="Connector 102"/>
+          <p:cNvCxnSpPr/>
+          <p:nvPr/>
+        </p:nvCxnSpPr>
+        <p:spPr>
+          <a:xfrm>
+            <a:off x="6309360" y="5375366"/>
+            <a:ext cx="411937" cy="0"/>
+          </a:xfrm>
+          <a:prstGeom prst="line">
+            <a:avLst/>
+          </a:prstGeom>
+          <a:ln w="15240">
+            <a:solidFill>
+              <a:srgbClr val="C53E1F"/>
+            </a:solidFill>
+          </a:ln>
+          <a:effectLst/>
+        </p:spPr>
+        <p:style>
+          <a:lnRef idx="2">
+            <a:schemeClr val="accent1"/>
+          </a:lnRef>
+          <a:fillRef idx="0">
+            <a:schemeClr val="accent1"/>
+          </a:fillRef>
+          <a:effectRef idx="1">
+            <a:schemeClr val="accent1"/>
+          </a:effectRef>
+          <a:fontRef idx="minor">
+            <a:schemeClr val="tx1"/>
+          </a:fontRef>
+        </p:style>
+      </p:cxnSp>
+      <p:sp>
+        <p:nvSpPr>
+          <p:cNvPr id="104" name="Oval 103"/>
           <p:cNvSpPr/>
           <p:nvPr/>
         </p:nvSpPr>
         <p:spPr>
           <a:xfrm>
-            <a:off x="6657289" y="5342316"/>
+            <a:off x="6657289" y="5311358"/>
             <a:ext cx="128016" cy="128016"/>
           </a:xfrm>
           <a:prstGeom prst="ellipse">
@@ -15837,14 +16277,14 @@
       </p:sp>
       <p:sp>
         <p:nvSpPr>
-          <p:cNvPr id="85" name="TextBox 84"/>
+          <p:cNvPr id="105" name="TextBox 104"/>
           <p:cNvSpPr txBox="1"/>
           <p:nvPr/>
         </p:nvSpPr>
         <p:spPr>
           <a:xfrm>
-            <a:off x="6401257" y="5113716"/>
-            <a:ext cx="640080" cy="164592"/>
+            <a:off x="6401257" y="5119334"/>
+            <a:ext cx="640080" cy="137160"/>
           </a:xfrm>
           <a:prstGeom prst="rect">
             <a:avLst/>
@@ -15860,7 +16300,7 @@
           <a:p>
             <a:pPr algn="ctr"/>
             <a:r>
-              <a:rPr sz="700" b="0" i="0">
+              <a:rPr sz="600" b="0" i="0">
                 <a:solidFill>
                   <a:srgbClr val="BBBBBB"/>
                 </a:solidFill>
@@ -15871,15 +16311,51 @@
           </a:p>
         </p:txBody>
       </p:sp>
-      <p:sp>
-        <p:nvSpPr>
-          <p:cNvPr id="86" name="Oval 85"/>
+      <p:cxnSp>
+        <p:nvCxnSpPr>
+          <p:cNvPr id="106" name="Connector 105"/>
+          <p:cNvCxnSpPr/>
+          <p:nvPr/>
+        </p:nvCxnSpPr>
+        <p:spPr>
+          <a:xfrm flipH="1">
+            <a:off x="881482" y="5375366"/>
+            <a:ext cx="5427878" cy="0"/>
+          </a:xfrm>
+          <a:prstGeom prst="line">
+            <a:avLst/>
+          </a:prstGeom>
+          <a:ln w="15240">
+            <a:solidFill>
+              <a:srgbClr val="C53E1F"/>
+            </a:solidFill>
+          </a:ln>
+          <a:effectLst/>
+        </p:spPr>
+        <p:style>
+          <a:lnRef idx="2">
+            <a:schemeClr val="accent1"/>
+          </a:lnRef>
+          <a:fillRef idx="0">
+            <a:schemeClr val="accent1"/>
+          </a:fillRef>
+          <a:effectRef idx="1">
+            <a:schemeClr val="accent1"/>
+          </a:effectRef>
+          <a:fontRef idx="minor">
+            <a:schemeClr val="tx1"/>
+          </a:fontRef>
+        </p:style>
+      </p:cxnSp>
+      <p:sp>
+        <p:nvSpPr>
+          <p:cNvPr id="107" name="Oval 106"/>
           <p:cNvSpPr/>
           <p:nvPr/>
         </p:nvSpPr>
         <p:spPr>
           <a:xfrm>
-            <a:off x="817474" y="5372042"/>
+            <a:off x="817474" y="5311358"/>
             <a:ext cx="128016" cy="128016"/>
           </a:xfrm>
           <a:prstGeom prst="ellipse">
@@ -15919,14 +16395,14 @@
       </p:sp>
       <p:sp>
         <p:nvSpPr>
-          <p:cNvPr id="87" name="TextBox 86"/>
+          <p:cNvPr id="108" name="TextBox 107"/>
           <p:cNvSpPr txBox="1"/>
           <p:nvPr/>
         </p:nvSpPr>
         <p:spPr>
           <a:xfrm>
-            <a:off x="561442" y="5143442"/>
-            <a:ext cx="640080" cy="164592"/>
+            <a:off x="561442" y="5119334"/>
+            <a:ext cx="640080" cy="137160"/>
           </a:xfrm>
           <a:prstGeom prst="rect">
             <a:avLst/>
@@ -15942,7 +16418,7 @@
           <a:p>
             <a:pPr algn="ctr"/>
             <a:r>
-              <a:rPr sz="700" b="0" i="0">
+              <a:rPr sz="600" b="0" i="0">
                 <a:solidFill>
                   <a:srgbClr val="BBBBBB"/>
                 </a:solidFill>
@@ -15955,20 +16431,22 @@
       </p:sp>
       <p:sp>
         <p:nvSpPr>
-          <p:cNvPr id="88" name="Diamond 87"/>
+          <p:cNvPr id="109" name="Diamond 108"/>
           <p:cNvSpPr/>
           <p:nvPr/>
         </p:nvSpPr>
         <p:spPr>
           <a:xfrm>
-            <a:off x="4684060" y="5283926"/>
-            <a:ext cx="182880" cy="182880"/>
+            <a:off x="4656628" y="5256494"/>
+            <a:ext cx="237744" cy="237744"/>
           </a:xfrm>
           <a:prstGeom prst="diamond">
             <a:avLst/>
           </a:prstGeom>
-          <a:noFill/>
-          <a:ln w="19050">
+          <a:solidFill>
+            <a:srgbClr val="D4A300"/>
+          </a:solidFill>
+          <a:ln w="12700">
             <a:solidFill>
               <a:srgbClr val="222222"/>
             </a:solidFill>
@@ -15999,7 +16477,7 @@
       </p:sp>
       <p:sp>
         <p:nvSpPr>
-          <p:cNvPr id="89" name="TextBox 88"/>
+          <p:cNvPr id="110" name="TextBox 109"/>
           <p:cNvSpPr txBox="1"/>
           <p:nvPr/>
         </p:nvSpPr>
@@ -16035,7 +16513,7 @@
       </p:sp>
       <p:cxnSp>
         <p:nvCxnSpPr>
-          <p:cNvPr id="90" name="Connector 89"/>
+          <p:cNvPr id="111" name="Connector 110"/>
           <p:cNvCxnSpPr/>
           <p:nvPr/>
         </p:nvCxnSpPr>
@@ -16071,7 +16549,7 @@
       </p:cxnSp>
       <p:sp>
         <p:nvSpPr>
-          <p:cNvPr id="91" name="TextBox 90"/>
+          <p:cNvPr id="112" name="TextBox 111"/>
           <p:cNvSpPr txBox="1"/>
           <p:nvPr/>
         </p:nvSpPr>
@@ -16107,7 +16585,7 @@
       </p:sp>
       <p:sp>
         <p:nvSpPr>
-          <p:cNvPr id="92" name="TextBox 91"/>
+          <p:cNvPr id="113" name="TextBox 112"/>
           <p:cNvSpPr txBox="1"/>
           <p:nvPr/>
         </p:nvSpPr>
@@ -16143,7 +16621,53 @@
       </p:sp>
       <p:sp>
         <p:nvSpPr>
-          <p:cNvPr id="93" name="TextBox 92"/>
+          <p:cNvPr id="114" name="Rectangle 113"/>
+          <p:cNvSpPr/>
+          <p:nvPr/>
+        </p:nvSpPr>
+        <p:spPr>
+          <a:xfrm>
+            <a:off x="1463040" y="6263640"/>
+            <a:ext cx="10515600" cy="320040"/>
+          </a:xfrm>
+          <a:prstGeom prst="rect">
+            <a:avLst/>
+          </a:prstGeom>
+          <a:solidFill>
+            <a:srgbClr val="F0F0F0"/>
+          </a:solidFill>
+          <a:ln w="10160">
+            <a:solidFill>
+              <a:srgbClr val="222222"/>
+            </a:solidFill>
+          </a:ln>
+          <a:effectLst/>
+        </p:spPr>
+        <p:style>
+          <a:lnRef idx="1">
+            <a:schemeClr val="accent1"/>
+          </a:lnRef>
+          <a:fillRef idx="3">
+            <a:schemeClr val="accent1"/>
+          </a:fillRef>
+          <a:effectRef idx="2">
+            <a:schemeClr val="accent1"/>
+          </a:effectRef>
+          <a:fontRef idx="minor">
+            <a:schemeClr val="lt1"/>
+          </a:fontRef>
+        </p:style>
+        <p:txBody>
+          <a:bodyPr rtlCol="0" anchor="ctr"/>
+          <a:lstStyle/>
+          <a:p>
+            <a:pPr algn="ctr"/>
+          </a:p>
+        </p:txBody>
+      </p:sp>
+      <p:sp>
+        <p:nvSpPr>
+          <p:cNvPr id="115" name="TextBox 114"/>
           <p:cNvSpPr txBox="1"/>
           <p:nvPr/>
         </p:nvSpPr>
@@ -16164,15 +16688,15 @@
           </a:bodyPr>
           <a:lstStyle/>
           <a:p>
-            <a:pPr algn="l"/>
+            <a:pPr algn="ctr"/>
             <a:r>
-              <a:rPr sz="800" b="0" i="1">
+              <a:rPr sz="900" b="0" i="0">
                 <a:solidFill>
                   <a:srgbClr val="222222"/>
                 </a:solidFill>
                 <a:latin typeface="Arial"/>
               </a:rPr>
-              <a:t>Shaded band marks discovery-predicted direction (teal = up, coral = down). Diamond = mean Δ across 3 paired subjects. Thread-1 DSB/cellcycle/E2F move DOWN (target-engagement prediction met); Thread-2 DOWN (plausibly FOLFOXIRI-era triple-chemo immunosuppression).</a:t>
+              <a:t>Teal = discovery-predicted direction (tumor DOWN for Thread 1; immune UP for Thread 2). Gold diamond = mean Δ. Thread-1 DSB/cellcycle/E2F DOWN ✓; Thread-2 DOWN (FOLFOXIRI-era immunosuppression).</a:t>
             </a:r>
           </a:p>
         </p:txBody>
